--- a/CS332_Project_Presentation_Navy_Revised.pptx
+++ b/CS332_Project_Presentation_Navy_Revised.pptx
@@ -5,39 +5,41 @@
     <p:sldMasterId id="2147483648" r:id="rId1"/>
   </p:sldMasterIdLst>
   <p:notesMasterIdLst>
-    <p:notesMasterId r:id="rId12"/>
+    <p:notesMasterId r:id="rId14"/>
   </p:notesMasterIdLst>
   <p:sldIdLst>
     <p:sldId id="256" r:id="rId2"/>
     <p:sldId id="257" r:id="rId3"/>
     <p:sldId id="258" r:id="rId4"/>
-    <p:sldId id="259" r:id="rId5"/>
-    <p:sldId id="260" r:id="rId6"/>
-    <p:sldId id="261" r:id="rId7"/>
-    <p:sldId id="262" r:id="rId8"/>
-    <p:sldId id="263" r:id="rId9"/>
-    <p:sldId id="264" r:id="rId10"/>
-    <p:sldId id="265" r:id="rId11"/>
+    <p:sldId id="267" r:id="rId5"/>
+    <p:sldId id="268" r:id="rId6"/>
+    <p:sldId id="259" r:id="rId7"/>
+    <p:sldId id="260" r:id="rId8"/>
+    <p:sldId id="261" r:id="rId9"/>
+    <p:sldId id="262" r:id="rId10"/>
+    <p:sldId id="263" r:id="rId11"/>
+    <p:sldId id="264" r:id="rId12"/>
+    <p:sldId id="265" r:id="rId13"/>
   </p:sldIdLst>
   <p:sldSz cx="18288000" cy="10287000"/>
   <p:notesSz cx="6858000" cy="9144000"/>
   <p:embeddedFontLst>
     <p:embeddedFont>
       <p:font typeface="윤고딕" panose="020B0600000101010101" charset="-127"/>
-      <p:regular r:id="rId13"/>
+      <p:regular r:id="rId15"/>
     </p:embeddedFont>
     <p:embeddedFont>
       <p:font typeface="Garet Light" panose="020B0600000101010101" charset="0"/>
-      <p:regular r:id="rId14"/>
+      <p:regular r:id="rId16"/>
     </p:embeddedFont>
     <p:embeddedFont>
       <p:font typeface="Glacial Indifference" panose="020B0600000101010101" charset="0"/>
-      <p:regular r:id="rId15"/>
+      <p:regular r:id="rId17"/>
     </p:embeddedFont>
     <p:embeddedFont>
       <p:font typeface="맑은 고딕" panose="020B0503020000020004" pitchFamily="50" charset="-127"/>
-      <p:regular r:id="rId16"/>
-      <p:bold r:id="rId17"/>
+      <p:regular r:id="rId18"/>
+      <p:bold r:id="rId19"/>
     </p:embeddedFont>
   </p:embeddedFontLst>
   <p:defaultTextStyle>
@@ -568,7 +570,7 @@
           <a:p>
             <a:fld id="{5CD9D091-C2AB-504C-8DCF-40E70763B075}" type="slidenum">
               <a:rPr lang="en-KR" smtClean="0"/>
-              <a:t>5</a:t>
+              <a:t>7</a:t>
             </a:fld>
             <a:endParaRPr lang="en-KR"/>
           </a:p>
@@ -668,7 +670,7 @@
           <a:p>
             <a:fld id="{5CD9D091-C2AB-504C-8DCF-40E70763B075}" type="slidenum">
               <a:rPr lang="en-KR" smtClean="0"/>
-              <a:t>6</a:t>
+              <a:t>8</a:t>
             </a:fld>
             <a:endParaRPr lang="en-KR"/>
           </a:p>
@@ -3618,101 +3620,34 @@
           <a:chExt cx="0" cy="0"/>
         </a:xfrm>
       </p:grpSpPr>
-      <p:grpSp>
-        <p:nvGrpSpPr>
-          <p:cNvPr id="2" name="Group 2"/>
-          <p:cNvGrpSpPr/>
-          <p:nvPr/>
-        </p:nvGrpSpPr>
-        <p:grpSpPr>
-          <a:xfrm>
-            <a:off x="-290868" y="10008764"/>
-            <a:ext cx="18869735" cy="120011"/>
-            <a:chOff x="0" y="0"/>
-            <a:chExt cx="4969807" cy="31608"/>
-          </a:xfrm>
-        </p:grpSpPr>
-        <p:sp>
-          <p:nvSpPr>
-            <p:cNvPr id="3" name="Freeform 3"/>
-            <p:cNvSpPr/>
-            <p:nvPr/>
-          </p:nvSpPr>
-          <p:spPr>
-            <a:xfrm>
-              <a:off x="0" y="0"/>
-              <a:ext cx="4969807" cy="31608"/>
-            </a:xfrm>
-            <a:custGeom>
-              <a:avLst/>
-              <a:gdLst/>
-              <a:ahLst/>
-              <a:cxnLst/>
-              <a:rect l="l" t="t" r="r" b="b"/>
-              <a:pathLst>
-                <a:path w="4969807" h="31608">
-                  <a:moveTo>
-                    <a:pt x="0" y="0"/>
-                  </a:moveTo>
-                  <a:lnTo>
-                    <a:pt x="4969807" y="0"/>
-                  </a:lnTo>
-                  <a:lnTo>
-                    <a:pt x="4969807" y="31608"/>
-                  </a:lnTo>
-                  <a:lnTo>
-                    <a:pt x="0" y="31608"/>
-                  </a:lnTo>
-                  <a:close/>
-                </a:path>
-              </a:pathLst>
-            </a:custGeom>
-            <a:solidFill>
-              <a:srgbClr val="191919"/>
-            </a:solidFill>
-            <a:ln cap="sq">
-              <a:noFill/>
-              <a:prstDash val="solid"/>
-              <a:miter/>
-            </a:ln>
-          </p:spPr>
-          <p:txBody>
-            <a:bodyPr/>
-            <a:lstStyle/>
-            <a:p>
-              <a:endParaRPr lang="ko-KR" altLang="en-US"/>
-            </a:p>
-          </p:txBody>
-        </p:sp>
-        <p:sp>
-          <p:nvSpPr>
-            <p:cNvPr id="4" name="TextBox 4"/>
-            <p:cNvSpPr txBox="1"/>
-            <p:nvPr/>
-          </p:nvSpPr>
-          <p:spPr>
-            <a:xfrm>
-              <a:off x="0" y="-47625"/>
-              <a:ext cx="4969807" cy="79233"/>
-            </a:xfrm>
-            <a:prstGeom prst="rect">
-              <a:avLst/>
-            </a:prstGeom>
-          </p:spPr>
-          <p:txBody>
-            <a:bodyPr lIns="50800" tIns="50800" rIns="50800" bIns="50800" rtlCol="0" anchor="ctr"/>
-            <a:lstStyle/>
-            <a:p>
-              <a:pPr algn="ctr">
-                <a:lnSpc>
-                  <a:spcPts val="2659"/>
-                </a:lnSpc>
-              </a:pPr>
-              <a:endParaRPr/>
-            </a:p>
-          </p:txBody>
-        </p:sp>
-      </p:grpSp>
+      <p:sp>
+        <p:nvSpPr>
+          <p:cNvPr id="4" name="TextBox 4"/>
+          <p:cNvSpPr txBox="1"/>
+          <p:nvPr/>
+        </p:nvSpPr>
+        <p:spPr>
+          <a:xfrm>
+            <a:off x="-290868" y="9827939"/>
+            <a:ext cx="18869735" cy="300836"/>
+          </a:xfrm>
+          <a:prstGeom prst="rect">
+            <a:avLst/>
+          </a:prstGeom>
+        </p:spPr>
+        <p:txBody>
+          <a:bodyPr lIns="50800" tIns="50800" rIns="50800" bIns="50800" rtlCol="0" anchor="ctr"/>
+          <a:lstStyle/>
+          <a:p>
+            <a:pPr algn="ctr">
+              <a:lnSpc>
+                <a:spcPts val="2659"/>
+              </a:lnSpc>
+            </a:pPr>
+            <a:endParaRPr/>
+          </a:p>
+        </p:txBody>
+      </p:sp>
       <p:sp>
         <p:nvSpPr>
           <p:cNvPr id="5" name="TextBox 5"/>
@@ -3851,6 +3786,1972 @@
 </file>
 
 <file path=ppt/slides/slide10.xml><?xml version="1.0" encoding="utf-8"?>
+<p:sld xmlns:a="http://schemas.openxmlformats.org/drawingml/2006/main" xmlns:r="http://schemas.openxmlformats.org/officeDocument/2006/relationships" xmlns:p="http://schemas.openxmlformats.org/presentationml/2006/main">
+  <p:cSld>
+    <p:spTree>
+      <p:nvGrpSpPr>
+        <p:cNvPr id="1" name="">
+          <a:extLst>
+            <a:ext uri="{FF2B5EF4-FFF2-40B4-BE49-F238E27FC236}">
+              <a16:creationId xmlns:a16="http://schemas.microsoft.com/office/drawing/2014/main" id="{4FC890A9-16A9-4DAB-A330-65BA6E36BE4A}"/>
+            </a:ext>
+          </a:extLst>
+        </p:cNvPr>
+        <p:cNvGrpSpPr/>
+        <p:nvPr/>
+      </p:nvGrpSpPr>
+      <p:grpSpPr>
+        <a:xfrm>
+          <a:off x="0" y="0"/>
+          <a:ext cx="0" cy="0"/>
+          <a:chOff x="0" y="0"/>
+          <a:chExt cx="0" cy="0"/>
+        </a:xfrm>
+      </p:grpSpPr>
+      <p:sp>
+        <p:nvSpPr>
+          <p:cNvPr id="2" name="Title 1">
+            <a:extLst>
+              <a:ext uri="{FF2B5EF4-FFF2-40B4-BE49-F238E27FC236}">
+                <a16:creationId xmlns:a16="http://schemas.microsoft.com/office/drawing/2014/main" id="{D457A58C-9E62-EAA8-A90E-F602DD59F1D4}"/>
+              </a:ext>
+            </a:extLst>
+          </p:cNvPr>
+          <p:cNvSpPr>
+            <a:spLocks noGrp="1"/>
+          </p:cNvSpPr>
+          <p:nvPr>
+            <p:ph type="title"/>
+          </p:nvPr>
+        </p:nvSpPr>
+        <p:spPr/>
+        <p:txBody>
+          <a:bodyPr/>
+          <a:lstStyle/>
+          <a:p>
+            <a:r>
+              <a:rPr lang="en-KR" dirty="0"/>
+              <a:t>Master Plan</a:t>
+            </a:r>
+          </a:p>
+        </p:txBody>
+      </p:sp>
+      <p:sp>
+        <p:nvSpPr>
+          <p:cNvPr id="6" name="TextBox 5">
+            <a:extLst>
+              <a:ext uri="{FF2B5EF4-FFF2-40B4-BE49-F238E27FC236}">
+                <a16:creationId xmlns:a16="http://schemas.microsoft.com/office/drawing/2014/main" id="{8A833590-9F32-19CD-C3D4-C2CC91B6CEC1}"/>
+              </a:ext>
+            </a:extLst>
+          </p:cNvPr>
+          <p:cNvSpPr txBox="1"/>
+          <p:nvPr/>
+        </p:nvSpPr>
+        <p:spPr>
+          <a:xfrm>
+            <a:off x="1046023" y="2695617"/>
+            <a:ext cx="7653121" cy="923330"/>
+          </a:xfrm>
+          <a:prstGeom prst="rect">
+            <a:avLst/>
+          </a:prstGeom>
+          <a:noFill/>
+        </p:spPr>
+        <p:txBody>
+          <a:bodyPr wrap="none" rtlCol="0">
+            <a:spAutoFit/>
+          </a:bodyPr>
+          <a:lstStyle/>
+          <a:p>
+            <a:pPr marL="428625" indent="-428625">
+              <a:buFontTx/>
+              <a:buChar char="-"/>
+            </a:pPr>
+            <a:r>
+              <a:rPr lang="en-US" sz="2700" b="1" dirty="0">
+                <a:solidFill>
+                  <a:srgbClr val="FF0000"/>
+                </a:solidFill>
+              </a:rPr>
+              <a:t>Implement some message structures in proto file</a:t>
+            </a:r>
+          </a:p>
+          <a:p>
+            <a:pPr marL="428625" indent="-428625">
+              <a:buFontTx/>
+              <a:buChar char="-"/>
+            </a:pPr>
+            <a:r>
+              <a:rPr lang="en-US" sz="2700" b="1" dirty="0">
+                <a:solidFill>
+                  <a:srgbClr val="FF0000"/>
+                </a:solidFill>
+              </a:rPr>
+              <a:t>Implement error handling logic</a:t>
+            </a:r>
+            <a:endParaRPr lang="en-KR" sz="2700" b="1" dirty="0">
+              <a:solidFill>
+                <a:srgbClr val="FF0000"/>
+              </a:solidFill>
+            </a:endParaRPr>
+          </a:p>
+        </p:txBody>
+      </p:sp>
+      <p:pic>
+        <p:nvPicPr>
+          <p:cNvPr id="12" name="Picture 11" descr="A diagram of a computer program&#10;&#10;AI-generated content may be incorrect.">
+            <a:extLst>
+              <a:ext uri="{FF2B5EF4-FFF2-40B4-BE49-F238E27FC236}">
+                <a16:creationId xmlns:a16="http://schemas.microsoft.com/office/drawing/2014/main" id="{9B1ECC24-A3A0-8DFD-CEC8-97527AC06AD3}"/>
+              </a:ext>
+            </a:extLst>
+          </p:cNvPr>
+          <p:cNvPicPr>
+            <a:picLocks noChangeAspect="1"/>
+          </p:cNvPicPr>
+          <p:nvPr/>
+        </p:nvPicPr>
+        <p:blipFill>
+          <a:blip r:embed="rId2"/>
+          <a:stretch>
+            <a:fillRect/>
+          </a:stretch>
+        </p:blipFill>
+        <p:spPr>
+          <a:xfrm>
+            <a:off x="1046022" y="3665114"/>
+            <a:ext cx="8097978" cy="4031088"/>
+          </a:xfrm>
+          <a:prstGeom prst="rect">
+            <a:avLst/>
+          </a:prstGeom>
+        </p:spPr>
+      </p:pic>
+      <p:pic>
+        <p:nvPicPr>
+          <p:cNvPr id="14" name="Picture 13" descr="A diagram of a workflow&#10;&#10;AI-generated content may be incorrect.">
+            <a:extLst>
+              <a:ext uri="{FF2B5EF4-FFF2-40B4-BE49-F238E27FC236}">
+                <a16:creationId xmlns:a16="http://schemas.microsoft.com/office/drawing/2014/main" id="{E0AF1C67-3A71-A520-CD32-2880AB9112D3}"/>
+              </a:ext>
+            </a:extLst>
+          </p:cNvPr>
+          <p:cNvPicPr>
+            <a:picLocks noChangeAspect="1"/>
+          </p:cNvPicPr>
+          <p:nvPr/>
+        </p:nvPicPr>
+        <p:blipFill>
+          <a:blip r:embed="rId3"/>
+          <a:stretch>
+            <a:fillRect/>
+          </a:stretch>
+        </p:blipFill>
+        <p:spPr>
+          <a:xfrm>
+            <a:off x="10020301" y="3673846"/>
+            <a:ext cx="6845300" cy="3629417"/>
+          </a:xfrm>
+          <a:prstGeom prst="rect">
+            <a:avLst/>
+          </a:prstGeom>
+        </p:spPr>
+      </p:pic>
+      <p:sp>
+        <p:nvSpPr>
+          <p:cNvPr id="15" name="TextBox 14">
+            <a:extLst>
+              <a:ext uri="{FF2B5EF4-FFF2-40B4-BE49-F238E27FC236}">
+                <a16:creationId xmlns:a16="http://schemas.microsoft.com/office/drawing/2014/main" id="{BD9BC214-6920-1C12-583B-21EBEED1D4B1}"/>
+              </a:ext>
+            </a:extLst>
+          </p:cNvPr>
+          <p:cNvSpPr txBox="1"/>
+          <p:nvPr/>
+        </p:nvSpPr>
+        <p:spPr>
+          <a:xfrm>
+            <a:off x="9732823" y="2695617"/>
+            <a:ext cx="7653121" cy="923330"/>
+          </a:xfrm>
+          <a:prstGeom prst="rect">
+            <a:avLst/>
+          </a:prstGeom>
+          <a:noFill/>
+        </p:spPr>
+        <p:txBody>
+          <a:bodyPr wrap="none" rtlCol="0">
+            <a:spAutoFit/>
+          </a:bodyPr>
+          <a:lstStyle/>
+          <a:p>
+            <a:pPr marL="428625" indent="-428625">
+              <a:buFontTx/>
+              <a:buChar char="-"/>
+            </a:pPr>
+            <a:r>
+              <a:rPr lang="en-US" sz="2700" b="1" dirty="0">
+                <a:solidFill>
+                  <a:srgbClr val="FF0000"/>
+                </a:solidFill>
+              </a:rPr>
+              <a:t>Implement some message structures in proto file</a:t>
+            </a:r>
+          </a:p>
+          <a:p>
+            <a:pPr marL="428625" indent="-428625">
+              <a:buFontTx/>
+              <a:buChar char="-"/>
+            </a:pPr>
+            <a:r>
+              <a:rPr lang="en-US" sz="2700" b="1" dirty="0">
+                <a:solidFill>
+                  <a:srgbClr val="FF0000"/>
+                </a:solidFill>
+              </a:rPr>
+              <a:t>Implement sampling logic</a:t>
+            </a:r>
+            <a:endParaRPr lang="en-KR" sz="2700" b="1" dirty="0">
+              <a:solidFill>
+                <a:srgbClr val="FF0000"/>
+              </a:solidFill>
+            </a:endParaRPr>
+          </a:p>
+        </p:txBody>
+      </p:sp>
+    </p:spTree>
+    <p:extLst>
+      <p:ext uri="{BB962C8B-B14F-4D97-AF65-F5344CB8AC3E}">
+        <p14:creationId xmlns:p14="http://schemas.microsoft.com/office/powerpoint/2010/main" val="3065963681"/>
+      </p:ext>
+    </p:extLst>
+  </p:cSld>
+  <p:clrMapOvr>
+    <a:masterClrMapping/>
+  </p:clrMapOvr>
+</p:sld>
+</file>
+
+<file path=ppt/slides/slide11.xml><?xml version="1.0" encoding="utf-8"?>
+<p:sld xmlns:a="http://schemas.openxmlformats.org/drawingml/2006/main" xmlns:r="http://schemas.openxmlformats.org/officeDocument/2006/relationships" xmlns:p="http://schemas.openxmlformats.org/presentationml/2006/main">
+  <p:cSld>
+    <p:spTree>
+      <p:nvGrpSpPr>
+        <p:cNvPr id="1" name=""/>
+        <p:cNvGrpSpPr/>
+        <p:nvPr/>
+      </p:nvGrpSpPr>
+      <p:grpSpPr>
+        <a:xfrm>
+          <a:off x="0" y="0"/>
+          <a:ext cx="0" cy="0"/>
+          <a:chOff x="0" y="0"/>
+          <a:chExt cx="0" cy="0"/>
+        </a:xfrm>
+      </p:grpSpPr>
+      <p:sp>
+        <p:nvSpPr>
+          <p:cNvPr id="28" name="사각형: 둥근 모서리 27">
+            <a:extLst>
+              <a:ext uri="{FF2B5EF4-FFF2-40B4-BE49-F238E27FC236}">
+                <a16:creationId xmlns:a16="http://schemas.microsoft.com/office/drawing/2014/main" id="{EF56AD0E-7B14-F1B7-DAA2-34A034E509CC}"/>
+              </a:ext>
+            </a:extLst>
+          </p:cNvPr>
+          <p:cNvSpPr/>
+          <p:nvPr/>
+        </p:nvSpPr>
+        <p:spPr>
+          <a:xfrm>
+            <a:off x="6202687" y="1606132"/>
+            <a:ext cx="4239312" cy="3036470"/>
+          </a:xfrm>
+          <a:prstGeom prst="roundRect">
+            <a:avLst>
+              <a:gd name="adj" fmla="val 13083"/>
+            </a:avLst>
+          </a:prstGeom>
+          <a:noFill/>
+        </p:spPr>
+        <p:style>
+          <a:lnRef idx="2">
+            <a:schemeClr val="accent1">
+              <a:shade val="15000"/>
+            </a:schemeClr>
+          </a:lnRef>
+          <a:fillRef idx="1">
+            <a:schemeClr val="accent1"/>
+          </a:fillRef>
+          <a:effectRef idx="0">
+            <a:schemeClr val="accent1"/>
+          </a:effectRef>
+          <a:fontRef idx="minor">
+            <a:schemeClr val="lt1"/>
+          </a:fontRef>
+        </p:style>
+        <p:txBody>
+          <a:bodyPr rtlCol="0" anchor="ctr"/>
+          <a:lstStyle/>
+          <a:p>
+            <a:pPr algn="ctr"/>
+            <a:endParaRPr lang="ko-KR" altLang="en-US" sz="2700" dirty="0"/>
+          </a:p>
+        </p:txBody>
+      </p:sp>
+      <p:sp>
+        <p:nvSpPr>
+          <p:cNvPr id="9" name="사각형: 둥근 모서리 8">
+            <a:extLst>
+              <a:ext uri="{FF2B5EF4-FFF2-40B4-BE49-F238E27FC236}">
+                <a16:creationId xmlns:a16="http://schemas.microsoft.com/office/drawing/2014/main" id="{AEB63CFC-CAA2-9E98-9495-52E356BC0F25}"/>
+              </a:ext>
+            </a:extLst>
+          </p:cNvPr>
+          <p:cNvSpPr/>
+          <p:nvPr/>
+        </p:nvSpPr>
+        <p:spPr>
+          <a:xfrm>
+            <a:off x="11504856" y="1352119"/>
+            <a:ext cx="4560936" cy="6823757"/>
+          </a:xfrm>
+          <a:prstGeom prst="roundRect">
+            <a:avLst>
+              <a:gd name="adj" fmla="val 8906"/>
+            </a:avLst>
+          </a:prstGeom>
+          <a:solidFill>
+            <a:schemeClr val="bg1">
+              <a:lumMod val="75000"/>
+            </a:schemeClr>
+          </a:solidFill>
+          <a:ln>
+            <a:noFill/>
+          </a:ln>
+        </p:spPr>
+        <p:style>
+          <a:lnRef idx="2">
+            <a:schemeClr val="accent1">
+              <a:shade val="15000"/>
+            </a:schemeClr>
+          </a:lnRef>
+          <a:fillRef idx="1">
+            <a:schemeClr val="accent1"/>
+          </a:fillRef>
+          <a:effectRef idx="0">
+            <a:schemeClr val="accent1"/>
+          </a:effectRef>
+          <a:fontRef idx="minor">
+            <a:schemeClr val="lt1"/>
+          </a:fontRef>
+        </p:style>
+        <p:txBody>
+          <a:bodyPr rtlCol="0" anchor="ctr"/>
+          <a:lstStyle/>
+          <a:p>
+            <a:pPr algn="ctr"/>
+            <a:endParaRPr lang="ko-KR" altLang="en-US" sz="2700"/>
+          </a:p>
+        </p:txBody>
+      </p:sp>
+      <p:sp>
+        <p:nvSpPr>
+          <p:cNvPr id="5" name="사각형: 둥근 모서리 4">
+            <a:extLst>
+              <a:ext uri="{FF2B5EF4-FFF2-40B4-BE49-F238E27FC236}">
+                <a16:creationId xmlns:a16="http://schemas.microsoft.com/office/drawing/2014/main" id="{BEBAE5D3-1CAC-029C-D557-9AFF299C803B}"/>
+              </a:ext>
+            </a:extLst>
+          </p:cNvPr>
+          <p:cNvSpPr/>
+          <p:nvPr/>
+        </p:nvSpPr>
+        <p:spPr>
+          <a:xfrm>
+            <a:off x="5176683" y="952500"/>
+            <a:ext cx="11739717" cy="7625268"/>
+          </a:xfrm>
+          <a:prstGeom prst="roundRect">
+            <a:avLst>
+              <a:gd name="adj" fmla="val 13083"/>
+            </a:avLst>
+          </a:prstGeom>
+          <a:noFill/>
+        </p:spPr>
+        <p:style>
+          <a:lnRef idx="2">
+            <a:schemeClr val="accent1">
+              <a:shade val="15000"/>
+            </a:schemeClr>
+          </a:lnRef>
+          <a:fillRef idx="1">
+            <a:schemeClr val="accent1"/>
+          </a:fillRef>
+          <a:effectRef idx="0">
+            <a:schemeClr val="accent1"/>
+          </a:effectRef>
+          <a:fontRef idx="minor">
+            <a:schemeClr val="lt1"/>
+          </a:fontRef>
+        </p:style>
+        <p:txBody>
+          <a:bodyPr rtlCol="0" anchor="ctr"/>
+          <a:lstStyle/>
+          <a:p>
+            <a:pPr algn="ctr"/>
+            <a:endParaRPr lang="ko-KR" altLang="en-US" sz="2700"/>
+          </a:p>
+        </p:txBody>
+      </p:sp>
+      <p:sp>
+        <p:nvSpPr>
+          <p:cNvPr id="4" name="TextBox 3">
+            <a:extLst>
+              <a:ext uri="{FF2B5EF4-FFF2-40B4-BE49-F238E27FC236}">
+                <a16:creationId xmlns:a16="http://schemas.microsoft.com/office/drawing/2014/main" id="{71C17467-D8B1-5AEB-954A-CDAFFEFAB05D}"/>
+              </a:ext>
+            </a:extLst>
+          </p:cNvPr>
+          <p:cNvSpPr txBox="1"/>
+          <p:nvPr/>
+        </p:nvSpPr>
+        <p:spPr>
+          <a:xfrm>
+            <a:off x="9735944" y="609451"/>
+            <a:ext cx="2551473" cy="738664"/>
+          </a:xfrm>
+          <a:prstGeom prst="rect">
+            <a:avLst/>
+          </a:prstGeom>
+          <a:solidFill>
+            <a:schemeClr val="bg1"/>
+          </a:solidFill>
+        </p:spPr>
+        <p:txBody>
+          <a:bodyPr wrap="square" rtlCol="0">
+            <a:spAutoFit/>
+          </a:bodyPr>
+          <a:lstStyle/>
+          <a:p>
+            <a:pPr algn="ctr"/>
+            <a:r>
+              <a:rPr lang="en-US" altLang="ko-KR" sz="4200" dirty="0">
+                <a:latin typeface="Aptos Display" panose="020B0004020202020204" pitchFamily="34" charset="0"/>
+              </a:rPr>
+              <a:t>Worker 1</a:t>
+            </a:r>
+            <a:endParaRPr lang="ko-KR" altLang="en-US" sz="2700" dirty="0">
+              <a:latin typeface="Aptos Display" panose="020B0004020202020204" pitchFamily="34" charset="0"/>
+            </a:endParaRPr>
+          </a:p>
+        </p:txBody>
+      </p:sp>
+      <p:sp>
+        <p:nvSpPr>
+          <p:cNvPr id="7" name="직사각형 6">
+            <a:extLst>
+              <a:ext uri="{FF2B5EF4-FFF2-40B4-BE49-F238E27FC236}">
+                <a16:creationId xmlns:a16="http://schemas.microsoft.com/office/drawing/2014/main" id="{BADAED13-15D1-90A6-1540-9AA81355447C}"/>
+              </a:ext>
+            </a:extLst>
+          </p:cNvPr>
+          <p:cNvSpPr/>
+          <p:nvPr/>
+        </p:nvSpPr>
+        <p:spPr>
+          <a:xfrm>
+            <a:off x="11867115" y="2160235"/>
+            <a:ext cx="3836423" cy="1479041"/>
+          </a:xfrm>
+          <a:prstGeom prst="rect">
+            <a:avLst/>
+          </a:prstGeom>
+          <a:solidFill>
+            <a:schemeClr val="bg1">
+              <a:lumMod val="50000"/>
+            </a:schemeClr>
+          </a:solidFill>
+          <a:ln>
+            <a:noFill/>
+          </a:ln>
+        </p:spPr>
+        <p:style>
+          <a:lnRef idx="2">
+            <a:schemeClr val="accent1">
+              <a:shade val="15000"/>
+            </a:schemeClr>
+          </a:lnRef>
+          <a:fillRef idx="1">
+            <a:schemeClr val="accent1"/>
+          </a:fillRef>
+          <a:effectRef idx="0">
+            <a:schemeClr val="accent1"/>
+          </a:effectRef>
+          <a:fontRef idx="minor">
+            <a:schemeClr val="lt1"/>
+          </a:fontRef>
+        </p:style>
+        <p:txBody>
+          <a:bodyPr rtlCol="0" anchor="ctr"/>
+          <a:lstStyle/>
+          <a:p>
+            <a:pPr algn="ctr"/>
+            <a:r>
+              <a:rPr lang="en-US" altLang="ko-KR" sz="2700" dirty="0">
+                <a:latin typeface="Aptos Display" panose="020B0004020202020204" pitchFamily="34" charset="0"/>
+              </a:rPr>
+              <a:t>Input data</a:t>
+            </a:r>
+            <a:endParaRPr lang="ko-KR" altLang="en-US" sz="2700" dirty="0">
+              <a:latin typeface="Aptos Display" panose="020B0004020202020204" pitchFamily="34" charset="0"/>
+            </a:endParaRPr>
+          </a:p>
+        </p:txBody>
+      </p:sp>
+      <p:sp>
+        <p:nvSpPr>
+          <p:cNvPr id="8" name="TextBox 7">
+            <a:extLst>
+              <a:ext uri="{FF2B5EF4-FFF2-40B4-BE49-F238E27FC236}">
+                <a16:creationId xmlns:a16="http://schemas.microsoft.com/office/drawing/2014/main" id="{7D4CC956-1733-C218-2846-E5764CC01711}"/>
+              </a:ext>
+            </a:extLst>
+          </p:cNvPr>
+          <p:cNvSpPr txBox="1"/>
+          <p:nvPr/>
+        </p:nvSpPr>
+        <p:spPr>
+          <a:xfrm>
+            <a:off x="13330635" y="1456829"/>
+            <a:ext cx="814647" cy="553998"/>
+          </a:xfrm>
+          <a:prstGeom prst="rect">
+            <a:avLst/>
+          </a:prstGeom>
+          <a:noFill/>
+        </p:spPr>
+        <p:txBody>
+          <a:bodyPr wrap="none" rtlCol="0">
+            <a:spAutoFit/>
+          </a:bodyPr>
+          <a:lstStyle/>
+          <a:p>
+            <a:r>
+              <a:rPr lang="en-US" altLang="ko-KR" sz="3000" dirty="0">
+                <a:solidFill>
+                  <a:schemeClr val="bg1"/>
+                </a:solidFill>
+                <a:latin typeface="Aptos Display" panose="020B0004020202020204" pitchFamily="34" charset="0"/>
+              </a:rPr>
+              <a:t>disk</a:t>
+            </a:r>
+            <a:endParaRPr lang="ko-KR" altLang="en-US" sz="3000" dirty="0">
+              <a:solidFill>
+                <a:schemeClr val="bg1"/>
+              </a:solidFill>
+              <a:latin typeface="Aptos Display" panose="020B0004020202020204" pitchFamily="34" charset="0"/>
+            </a:endParaRPr>
+          </a:p>
+        </p:txBody>
+      </p:sp>
+      <p:sp>
+        <p:nvSpPr>
+          <p:cNvPr id="10" name="직사각형 9">
+            <a:extLst>
+              <a:ext uri="{FF2B5EF4-FFF2-40B4-BE49-F238E27FC236}">
+                <a16:creationId xmlns:a16="http://schemas.microsoft.com/office/drawing/2014/main" id="{71881D22-44EF-8992-6EDB-F1DF53DFF6BB}"/>
+              </a:ext>
+            </a:extLst>
+          </p:cNvPr>
+          <p:cNvSpPr/>
+          <p:nvPr/>
+        </p:nvSpPr>
+        <p:spPr>
+          <a:xfrm>
+            <a:off x="11867115" y="3742195"/>
+            <a:ext cx="3836423" cy="477740"/>
+          </a:xfrm>
+          <a:prstGeom prst="rect">
+            <a:avLst/>
+          </a:prstGeom>
+          <a:solidFill>
+            <a:schemeClr val="bg1">
+              <a:lumMod val="50000"/>
+            </a:schemeClr>
+          </a:solidFill>
+          <a:ln>
+            <a:noFill/>
+          </a:ln>
+        </p:spPr>
+        <p:style>
+          <a:lnRef idx="2">
+            <a:schemeClr val="accent1">
+              <a:shade val="15000"/>
+            </a:schemeClr>
+          </a:lnRef>
+          <a:fillRef idx="1">
+            <a:schemeClr val="accent1"/>
+          </a:fillRef>
+          <a:effectRef idx="0">
+            <a:schemeClr val="accent1"/>
+          </a:effectRef>
+          <a:fontRef idx="minor">
+            <a:schemeClr val="lt1"/>
+          </a:fontRef>
+        </p:style>
+        <p:txBody>
+          <a:bodyPr rtlCol="0" anchor="ctr"/>
+          <a:lstStyle/>
+          <a:p>
+            <a:pPr algn="ctr"/>
+            <a:r>
+              <a:rPr lang="en-US" altLang="ko-KR" dirty="0"/>
+              <a:t>Worker 1 </a:t>
+            </a:r>
+            <a:endParaRPr lang="ko-KR" altLang="en-US" dirty="0"/>
+          </a:p>
+        </p:txBody>
+      </p:sp>
+      <p:sp>
+        <p:nvSpPr>
+          <p:cNvPr id="11" name="직사각형 10">
+            <a:extLst>
+              <a:ext uri="{FF2B5EF4-FFF2-40B4-BE49-F238E27FC236}">
+                <a16:creationId xmlns:a16="http://schemas.microsoft.com/office/drawing/2014/main" id="{DDEA7143-26E5-5D75-F104-B88BDF5D79C6}"/>
+              </a:ext>
+            </a:extLst>
+          </p:cNvPr>
+          <p:cNvSpPr/>
+          <p:nvPr/>
+        </p:nvSpPr>
+        <p:spPr>
+          <a:xfrm>
+            <a:off x="11867112" y="4330285"/>
+            <a:ext cx="3836423" cy="477740"/>
+          </a:xfrm>
+          <a:prstGeom prst="rect">
+            <a:avLst/>
+          </a:prstGeom>
+          <a:solidFill>
+            <a:schemeClr val="bg1">
+              <a:lumMod val="50000"/>
+            </a:schemeClr>
+          </a:solidFill>
+          <a:ln>
+            <a:noFill/>
+          </a:ln>
+        </p:spPr>
+        <p:style>
+          <a:lnRef idx="2">
+            <a:schemeClr val="accent1">
+              <a:shade val="15000"/>
+            </a:schemeClr>
+          </a:lnRef>
+          <a:fillRef idx="1">
+            <a:schemeClr val="accent1"/>
+          </a:fillRef>
+          <a:effectRef idx="0">
+            <a:schemeClr val="accent1"/>
+          </a:effectRef>
+          <a:fontRef idx="minor">
+            <a:schemeClr val="lt1"/>
+          </a:fontRef>
+        </p:style>
+        <p:txBody>
+          <a:bodyPr rtlCol="0" anchor="ctr"/>
+          <a:lstStyle/>
+          <a:p>
+            <a:pPr algn="ctr"/>
+            <a:r>
+              <a:rPr lang="en-US" altLang="ko-KR" dirty="0"/>
+              <a:t>Worker 2</a:t>
+            </a:r>
+            <a:endParaRPr lang="ko-KR" altLang="en-US" dirty="0"/>
+          </a:p>
+        </p:txBody>
+      </p:sp>
+      <p:sp>
+        <p:nvSpPr>
+          <p:cNvPr id="13" name="직사각형 12">
+            <a:extLst>
+              <a:ext uri="{FF2B5EF4-FFF2-40B4-BE49-F238E27FC236}">
+                <a16:creationId xmlns:a16="http://schemas.microsoft.com/office/drawing/2014/main" id="{855C3C4A-5A3E-275B-2045-A7E67A9EB499}"/>
+              </a:ext>
+            </a:extLst>
+          </p:cNvPr>
+          <p:cNvSpPr/>
+          <p:nvPr/>
+        </p:nvSpPr>
+        <p:spPr>
+          <a:xfrm>
+            <a:off x="11867111" y="5811289"/>
+            <a:ext cx="3836423" cy="477740"/>
+          </a:xfrm>
+          <a:prstGeom prst="rect">
+            <a:avLst/>
+          </a:prstGeom>
+          <a:solidFill>
+            <a:schemeClr val="bg1">
+              <a:lumMod val="50000"/>
+            </a:schemeClr>
+          </a:solidFill>
+          <a:ln>
+            <a:noFill/>
+          </a:ln>
+        </p:spPr>
+        <p:style>
+          <a:lnRef idx="2">
+            <a:schemeClr val="accent1">
+              <a:shade val="15000"/>
+            </a:schemeClr>
+          </a:lnRef>
+          <a:fillRef idx="1">
+            <a:schemeClr val="accent1"/>
+          </a:fillRef>
+          <a:effectRef idx="0">
+            <a:schemeClr val="accent1"/>
+          </a:effectRef>
+          <a:fontRef idx="minor">
+            <a:schemeClr val="lt1"/>
+          </a:fontRef>
+        </p:style>
+        <p:txBody>
+          <a:bodyPr rtlCol="0" anchor="ctr"/>
+          <a:lstStyle/>
+          <a:p>
+            <a:pPr algn="ctr"/>
+            <a:r>
+              <a:rPr lang="en-US" altLang="ko-KR" dirty="0"/>
+              <a:t>Worker 20</a:t>
+            </a:r>
+            <a:endParaRPr lang="ko-KR" altLang="en-US" dirty="0"/>
+          </a:p>
+        </p:txBody>
+      </p:sp>
+      <p:sp>
+        <p:nvSpPr>
+          <p:cNvPr id="15" name="TextBox 14">
+            <a:extLst>
+              <a:ext uri="{FF2B5EF4-FFF2-40B4-BE49-F238E27FC236}">
+                <a16:creationId xmlns:a16="http://schemas.microsoft.com/office/drawing/2014/main" id="{552218C7-4CCA-7E13-1B56-6D847D294606}"/>
+              </a:ext>
+            </a:extLst>
+          </p:cNvPr>
+          <p:cNvSpPr txBox="1"/>
+          <p:nvPr/>
+        </p:nvSpPr>
+        <p:spPr>
+          <a:xfrm rot="5400000">
+            <a:off x="13582443" y="5037739"/>
+            <a:ext cx="665567" cy="553998"/>
+          </a:xfrm>
+          <a:prstGeom prst="rect">
+            <a:avLst/>
+          </a:prstGeom>
+          <a:noFill/>
+        </p:spPr>
+        <p:txBody>
+          <a:bodyPr wrap="none" rtlCol="0">
+            <a:spAutoFit/>
+          </a:bodyPr>
+          <a:lstStyle/>
+          <a:p>
+            <a:r>
+              <a:rPr lang="en-US" altLang="ko-KR" sz="3000" b="1" dirty="0">
+                <a:solidFill>
+                  <a:schemeClr val="bg1"/>
+                </a:solidFill>
+              </a:rPr>
+              <a:t>. . .</a:t>
+            </a:r>
+            <a:endParaRPr lang="ko-KR" altLang="en-US" sz="3000" b="1" dirty="0">
+              <a:solidFill>
+                <a:schemeClr val="bg1"/>
+              </a:solidFill>
+            </a:endParaRPr>
+          </a:p>
+        </p:txBody>
+      </p:sp>
+      <p:sp>
+        <p:nvSpPr>
+          <p:cNvPr id="16" name="사각형: 둥근 모서리 15">
+            <a:extLst>
+              <a:ext uri="{FF2B5EF4-FFF2-40B4-BE49-F238E27FC236}">
+                <a16:creationId xmlns:a16="http://schemas.microsoft.com/office/drawing/2014/main" id="{91DA388E-33E2-3782-2246-B4865B72E89F}"/>
+              </a:ext>
+            </a:extLst>
+          </p:cNvPr>
+          <p:cNvSpPr/>
+          <p:nvPr/>
+        </p:nvSpPr>
+        <p:spPr>
+          <a:xfrm>
+            <a:off x="1463081" y="5117324"/>
+            <a:ext cx="2959910" cy="1050837"/>
+          </a:xfrm>
+          <a:prstGeom prst="roundRect">
+            <a:avLst/>
+          </a:prstGeom>
+          <a:noFill/>
+          <a:ln>
+            <a:prstDash val="solid"/>
+            <a:extLst>
+              <a:ext uri="{C807C97D-BFC1-408E-A445-0C87EB9F89A2}">
+                <ask:lineSketchStyleProps xmlns:ask="http://schemas.microsoft.com/office/drawing/2018/sketchyshapes">
+                  <ask:type>
+                    <ask:lineSketchNone/>
+                  </ask:type>
+                </ask:lineSketchStyleProps>
+              </a:ext>
+            </a:extLst>
+          </a:ln>
+        </p:spPr>
+        <p:style>
+          <a:lnRef idx="2">
+            <a:schemeClr val="accent1">
+              <a:shade val="15000"/>
+            </a:schemeClr>
+          </a:lnRef>
+          <a:fillRef idx="1">
+            <a:schemeClr val="accent1"/>
+          </a:fillRef>
+          <a:effectRef idx="0">
+            <a:schemeClr val="accent1"/>
+          </a:effectRef>
+          <a:fontRef idx="minor">
+            <a:schemeClr val="lt1"/>
+          </a:fontRef>
+        </p:style>
+        <p:txBody>
+          <a:bodyPr rtlCol="0" anchor="ctr"/>
+          <a:lstStyle/>
+          <a:p>
+            <a:pPr algn="ctr"/>
+            <a:r>
+              <a:rPr lang="en-US" altLang="ko-KR" sz="2700" dirty="0">
+                <a:solidFill>
+                  <a:schemeClr val="tx1"/>
+                </a:solidFill>
+              </a:rPr>
+              <a:t>Master</a:t>
+            </a:r>
+            <a:endParaRPr lang="ko-KR" altLang="en-US" sz="2700" dirty="0">
+              <a:solidFill>
+                <a:schemeClr val="tx1"/>
+              </a:solidFill>
+            </a:endParaRPr>
+          </a:p>
+        </p:txBody>
+      </p:sp>
+      <p:sp>
+        <p:nvSpPr>
+          <p:cNvPr id="19" name="사각형: 둥근 모서리 18">
+            <a:extLst>
+              <a:ext uri="{FF2B5EF4-FFF2-40B4-BE49-F238E27FC236}">
+                <a16:creationId xmlns:a16="http://schemas.microsoft.com/office/drawing/2014/main" id="{D576BBB1-7C29-9A46-E70E-194DCACA804A}"/>
+              </a:ext>
+            </a:extLst>
+          </p:cNvPr>
+          <p:cNvSpPr/>
+          <p:nvPr/>
+        </p:nvSpPr>
+        <p:spPr>
+          <a:xfrm>
+            <a:off x="12435270" y="8969463"/>
+            <a:ext cx="2959910" cy="1050837"/>
+          </a:xfrm>
+          <a:prstGeom prst="roundRect">
+            <a:avLst>
+              <a:gd name="adj" fmla="val 13083"/>
+            </a:avLst>
+          </a:prstGeom>
+          <a:noFill/>
+        </p:spPr>
+        <p:style>
+          <a:lnRef idx="2">
+            <a:schemeClr val="accent1">
+              <a:shade val="15000"/>
+            </a:schemeClr>
+          </a:lnRef>
+          <a:fillRef idx="1">
+            <a:schemeClr val="accent1"/>
+          </a:fillRef>
+          <a:effectRef idx="0">
+            <a:schemeClr val="accent1"/>
+          </a:effectRef>
+          <a:fontRef idx="minor">
+            <a:schemeClr val="lt1"/>
+          </a:fontRef>
+        </p:style>
+        <p:txBody>
+          <a:bodyPr rtlCol="0" anchor="ctr"/>
+          <a:lstStyle/>
+          <a:p>
+            <a:pPr algn="ctr"/>
+            <a:r>
+              <a:rPr lang="en-US" altLang="ko-KR" sz="2700" dirty="0">
+                <a:solidFill>
+                  <a:schemeClr val="tx1"/>
+                </a:solidFill>
+              </a:rPr>
+              <a:t>Worker 20</a:t>
+            </a:r>
+            <a:endParaRPr lang="ko-KR" altLang="en-US" sz="2700" dirty="0">
+              <a:solidFill>
+                <a:schemeClr val="tx1"/>
+              </a:solidFill>
+            </a:endParaRPr>
+          </a:p>
+        </p:txBody>
+      </p:sp>
+      <p:pic>
+        <p:nvPicPr>
+          <p:cNvPr id="1026" name="Picture 2" descr="정렬 - 무료 ui개 아이콘">
+            <a:extLst>
+              <a:ext uri="{FF2B5EF4-FFF2-40B4-BE49-F238E27FC236}">
+                <a16:creationId xmlns:a16="http://schemas.microsoft.com/office/drawing/2014/main" id="{8575AA38-E128-3F49-933F-A447B228788B}"/>
+              </a:ext>
+            </a:extLst>
+          </p:cNvPr>
+          <p:cNvPicPr>
+            <a:picLocks noChangeAspect="1" noChangeArrowheads="1"/>
+          </p:cNvPicPr>
+          <p:nvPr/>
+        </p:nvPicPr>
+        <p:blipFill rotWithShape="1">
+          <a:blip r:embed="rId2">
+            <a:extLst>
+              <a:ext uri="{28A0092B-C50C-407E-A947-70E740481C1C}">
+                <a14:useLocalDpi xmlns:a14="http://schemas.microsoft.com/office/drawing/2010/main" val="0"/>
+              </a:ext>
+            </a:extLst>
+          </a:blip>
+          <a:srcRect b="13066"/>
+          <a:stretch>
+            <a:fillRect/>
+          </a:stretch>
+        </p:blipFill>
+        <p:spPr bwMode="auto">
+          <a:xfrm>
+            <a:off x="6648638" y="1565179"/>
+            <a:ext cx="3406646" cy="2961509"/>
+          </a:xfrm>
+          <a:prstGeom prst="rect">
+            <a:avLst/>
+          </a:prstGeom>
+          <a:noFill/>
+          <a:extLst>
+            <a:ext uri="{909E8E84-426E-40DD-AFC4-6F175D3DCCD1}">
+              <a14:hiddenFill xmlns:a14="http://schemas.microsoft.com/office/drawing/2010/main">
+                <a:solidFill>
+                  <a:srgbClr val="FFFFFF"/>
+                </a:solidFill>
+              </a14:hiddenFill>
+            </a:ext>
+          </a:extLst>
+        </p:spPr>
+      </p:pic>
+      <p:sp>
+        <p:nvSpPr>
+          <p:cNvPr id="27" name="TextBox 26">
+            <a:extLst>
+              <a:ext uri="{FF2B5EF4-FFF2-40B4-BE49-F238E27FC236}">
+                <a16:creationId xmlns:a16="http://schemas.microsoft.com/office/drawing/2014/main" id="{81A08C38-C98A-E792-2608-FFF503709C2F}"/>
+              </a:ext>
+            </a:extLst>
+          </p:cNvPr>
+          <p:cNvSpPr txBox="1"/>
+          <p:nvPr/>
+        </p:nvSpPr>
+        <p:spPr>
+          <a:xfrm>
+            <a:off x="6524414" y="1218931"/>
+            <a:ext cx="3661091" cy="646331"/>
+          </a:xfrm>
+          <a:prstGeom prst="rect">
+            <a:avLst/>
+          </a:prstGeom>
+          <a:noFill/>
+        </p:spPr>
+        <p:txBody>
+          <a:bodyPr wrap="square" rtlCol="0">
+            <a:spAutoFit/>
+          </a:bodyPr>
+          <a:lstStyle/>
+          <a:p>
+            <a:pPr algn="ctr"/>
+            <a:r>
+              <a:rPr lang="en-US" altLang="ko-KR" sz="3600" dirty="0">
+                <a:latin typeface="Aptos Display" panose="020B0004020202020204" pitchFamily="34" charset="0"/>
+              </a:rPr>
+              <a:t>Sorting Algorithm</a:t>
+            </a:r>
+            <a:endParaRPr lang="ko-KR" altLang="en-US" sz="2400" dirty="0">
+              <a:latin typeface="Aptos Display" panose="020B0004020202020204" pitchFamily="34" charset="0"/>
+            </a:endParaRPr>
+          </a:p>
+        </p:txBody>
+      </p:sp>
+      <p:cxnSp>
+        <p:nvCxnSpPr>
+          <p:cNvPr id="44" name="연결선: 구부러짐 43">
+            <a:extLst>
+              <a:ext uri="{FF2B5EF4-FFF2-40B4-BE49-F238E27FC236}">
+                <a16:creationId xmlns:a16="http://schemas.microsoft.com/office/drawing/2014/main" id="{CF512DA3-7AB6-B946-A38B-192EA7AE2C9B}"/>
+              </a:ext>
+            </a:extLst>
+          </p:cNvPr>
+          <p:cNvCxnSpPr>
+            <a:cxnSpLocks/>
+            <a:stCxn id="7" idx="1"/>
+            <a:endCxn id="28" idx="3"/>
+          </p:cNvCxnSpPr>
+          <p:nvPr/>
+        </p:nvCxnSpPr>
+        <p:spPr>
+          <a:xfrm rot="10800000" flipV="1">
+            <a:off x="10442001" y="2899754"/>
+            <a:ext cx="1425116" cy="224612"/>
+          </a:xfrm>
+          <a:prstGeom prst="curvedConnector3">
+            <a:avLst/>
+          </a:prstGeom>
+          <a:ln w="28575">
+            <a:tailEnd type="triangle"/>
+          </a:ln>
+        </p:spPr>
+        <p:style>
+          <a:lnRef idx="2">
+            <a:schemeClr val="dk1"/>
+          </a:lnRef>
+          <a:fillRef idx="0">
+            <a:schemeClr val="dk1"/>
+          </a:fillRef>
+          <a:effectRef idx="1">
+            <a:schemeClr val="dk1"/>
+          </a:effectRef>
+          <a:fontRef idx="minor">
+            <a:schemeClr val="tx1"/>
+          </a:fontRef>
+        </p:style>
+      </p:cxnSp>
+      <p:cxnSp>
+        <p:nvCxnSpPr>
+          <p:cNvPr id="1046" name="연결선: 구부러짐 1045">
+            <a:extLst>
+              <a:ext uri="{FF2B5EF4-FFF2-40B4-BE49-F238E27FC236}">
+                <a16:creationId xmlns:a16="http://schemas.microsoft.com/office/drawing/2014/main" id="{4D54E85B-F582-656F-4AAE-5F065EE0EBEF}"/>
+              </a:ext>
+            </a:extLst>
+          </p:cNvPr>
+          <p:cNvCxnSpPr>
+            <a:stCxn id="16" idx="3"/>
+            <a:endCxn id="28" idx="1"/>
+          </p:cNvCxnSpPr>
+          <p:nvPr/>
+        </p:nvCxnSpPr>
+        <p:spPr>
+          <a:xfrm flipV="1">
+            <a:off x="4422991" y="3124367"/>
+            <a:ext cx="1779696" cy="2518376"/>
+          </a:xfrm>
+          <a:prstGeom prst="curvedConnector3">
+            <a:avLst/>
+          </a:prstGeom>
+          <a:ln w="28575">
+            <a:solidFill>
+              <a:schemeClr val="tx1"/>
+            </a:solidFill>
+            <a:headEnd type="triangle"/>
+            <a:tailEnd type="triangle"/>
+          </a:ln>
+        </p:spPr>
+        <p:style>
+          <a:lnRef idx="2">
+            <a:schemeClr val="dk1"/>
+          </a:lnRef>
+          <a:fillRef idx="0">
+            <a:schemeClr val="dk1"/>
+          </a:fillRef>
+          <a:effectRef idx="1">
+            <a:schemeClr val="dk1"/>
+          </a:effectRef>
+          <a:fontRef idx="minor">
+            <a:schemeClr val="tx1"/>
+          </a:fontRef>
+        </p:style>
+      </p:cxnSp>
+      <p:sp>
+        <p:nvSpPr>
+          <p:cNvPr id="1047" name="직사각형 1046">
+            <a:extLst>
+              <a:ext uri="{FF2B5EF4-FFF2-40B4-BE49-F238E27FC236}">
+                <a16:creationId xmlns:a16="http://schemas.microsoft.com/office/drawing/2014/main" id="{8625605C-A1D4-A781-F758-BE027437D060}"/>
+              </a:ext>
+            </a:extLst>
+          </p:cNvPr>
+          <p:cNvSpPr/>
+          <p:nvPr/>
+        </p:nvSpPr>
+        <p:spPr>
+          <a:xfrm>
+            <a:off x="11867109" y="6384283"/>
+            <a:ext cx="3836423" cy="1479041"/>
+          </a:xfrm>
+          <a:prstGeom prst="rect">
+            <a:avLst/>
+          </a:prstGeom>
+          <a:solidFill>
+            <a:schemeClr val="bg1">
+              <a:lumMod val="50000"/>
+            </a:schemeClr>
+          </a:solidFill>
+          <a:ln>
+            <a:noFill/>
+          </a:ln>
+        </p:spPr>
+        <p:style>
+          <a:lnRef idx="2">
+            <a:schemeClr val="accent1">
+              <a:shade val="15000"/>
+            </a:schemeClr>
+          </a:lnRef>
+          <a:fillRef idx="1">
+            <a:schemeClr val="accent1"/>
+          </a:fillRef>
+          <a:effectRef idx="0">
+            <a:schemeClr val="accent1"/>
+          </a:effectRef>
+          <a:fontRef idx="minor">
+            <a:schemeClr val="lt1"/>
+          </a:fontRef>
+        </p:style>
+        <p:txBody>
+          <a:bodyPr rtlCol="0" anchor="ctr"/>
+          <a:lstStyle/>
+          <a:p>
+            <a:pPr algn="ctr"/>
+            <a:r>
+              <a:rPr lang="en-US" altLang="ko-KR" sz="2700" dirty="0">
+                <a:latin typeface="Aptos Display" panose="020B0004020202020204" pitchFamily="34" charset="0"/>
+              </a:rPr>
+              <a:t>Output data</a:t>
+            </a:r>
+            <a:endParaRPr lang="ko-KR" altLang="en-US" sz="2700" dirty="0">
+              <a:latin typeface="Aptos Display" panose="020B0004020202020204" pitchFamily="34" charset="0"/>
+            </a:endParaRPr>
+          </a:p>
+        </p:txBody>
+      </p:sp>
+      <p:sp>
+        <p:nvSpPr>
+          <p:cNvPr id="1053" name="사각형: 둥근 모서리 1052">
+            <a:extLst>
+              <a:ext uri="{FF2B5EF4-FFF2-40B4-BE49-F238E27FC236}">
+                <a16:creationId xmlns:a16="http://schemas.microsoft.com/office/drawing/2014/main" id="{34794977-44E8-6C1C-5400-5B29CB7A97D9}"/>
+              </a:ext>
+            </a:extLst>
+          </p:cNvPr>
+          <p:cNvSpPr/>
+          <p:nvPr/>
+        </p:nvSpPr>
+        <p:spPr>
+          <a:xfrm>
+            <a:off x="6480168" y="8969463"/>
+            <a:ext cx="2959910" cy="1050837"/>
+          </a:xfrm>
+          <a:prstGeom prst="roundRect">
+            <a:avLst>
+              <a:gd name="adj" fmla="val 13083"/>
+            </a:avLst>
+          </a:prstGeom>
+          <a:noFill/>
+        </p:spPr>
+        <p:style>
+          <a:lnRef idx="2">
+            <a:schemeClr val="accent1">
+              <a:shade val="15000"/>
+            </a:schemeClr>
+          </a:lnRef>
+          <a:fillRef idx="1">
+            <a:schemeClr val="accent1"/>
+          </a:fillRef>
+          <a:effectRef idx="0">
+            <a:schemeClr val="accent1"/>
+          </a:effectRef>
+          <a:fontRef idx="minor">
+            <a:schemeClr val="lt1"/>
+          </a:fontRef>
+        </p:style>
+        <p:txBody>
+          <a:bodyPr rtlCol="0" anchor="ctr"/>
+          <a:lstStyle/>
+          <a:p>
+            <a:pPr algn="ctr"/>
+            <a:r>
+              <a:rPr lang="en-US" altLang="ko-KR" sz="2700" dirty="0">
+                <a:solidFill>
+                  <a:schemeClr val="tx1"/>
+                </a:solidFill>
+              </a:rPr>
+              <a:t>Worker 2</a:t>
+            </a:r>
+            <a:endParaRPr lang="ko-KR" altLang="en-US" sz="2700" dirty="0">
+              <a:solidFill>
+                <a:schemeClr val="tx1"/>
+              </a:solidFill>
+            </a:endParaRPr>
+          </a:p>
+        </p:txBody>
+      </p:sp>
+      <p:sp>
+        <p:nvSpPr>
+          <p:cNvPr id="1054" name="사각형: 둥근 모서리 1053">
+            <a:extLst>
+              <a:ext uri="{FF2B5EF4-FFF2-40B4-BE49-F238E27FC236}">
+                <a16:creationId xmlns:a16="http://schemas.microsoft.com/office/drawing/2014/main" id="{51FE1A14-D5F4-F567-59D1-610CC7BDE7AF}"/>
+              </a:ext>
+            </a:extLst>
+          </p:cNvPr>
+          <p:cNvSpPr/>
+          <p:nvPr/>
+        </p:nvSpPr>
+        <p:spPr>
+          <a:xfrm>
+            <a:off x="9829797" y="8964969"/>
+            <a:ext cx="370454" cy="1050837"/>
+          </a:xfrm>
+          <a:prstGeom prst="roundRect">
+            <a:avLst>
+              <a:gd name="adj" fmla="val 13083"/>
+            </a:avLst>
+          </a:prstGeom>
+          <a:noFill/>
+        </p:spPr>
+        <p:style>
+          <a:lnRef idx="2">
+            <a:schemeClr val="accent1">
+              <a:shade val="15000"/>
+            </a:schemeClr>
+          </a:lnRef>
+          <a:fillRef idx="1">
+            <a:schemeClr val="accent1"/>
+          </a:fillRef>
+          <a:effectRef idx="0">
+            <a:schemeClr val="accent1"/>
+          </a:effectRef>
+          <a:fontRef idx="minor">
+            <a:schemeClr val="lt1"/>
+          </a:fontRef>
+        </p:style>
+        <p:txBody>
+          <a:bodyPr rtlCol="0" anchor="ctr"/>
+          <a:lstStyle/>
+          <a:p>
+            <a:pPr algn="ctr"/>
+            <a:endParaRPr lang="ko-KR" altLang="en-US" sz="2700" dirty="0">
+              <a:solidFill>
+                <a:schemeClr val="tx1"/>
+              </a:solidFill>
+            </a:endParaRPr>
+          </a:p>
+        </p:txBody>
+      </p:sp>
+      <p:sp>
+        <p:nvSpPr>
+          <p:cNvPr id="1055" name="TextBox 1054">
+            <a:extLst>
+              <a:ext uri="{FF2B5EF4-FFF2-40B4-BE49-F238E27FC236}">
+                <a16:creationId xmlns:a16="http://schemas.microsoft.com/office/drawing/2014/main" id="{9E8525B7-E348-E674-DAEF-3DD3F082E029}"/>
+              </a:ext>
+            </a:extLst>
+          </p:cNvPr>
+          <p:cNvSpPr txBox="1"/>
+          <p:nvPr/>
+        </p:nvSpPr>
+        <p:spPr>
+          <a:xfrm>
+            <a:off x="10863629" y="9114108"/>
+            <a:ext cx="665567" cy="553998"/>
+          </a:xfrm>
+          <a:prstGeom prst="rect">
+            <a:avLst/>
+          </a:prstGeom>
+          <a:noFill/>
+        </p:spPr>
+        <p:txBody>
+          <a:bodyPr wrap="none" rtlCol="0">
+            <a:spAutoFit/>
+          </a:bodyPr>
+          <a:lstStyle/>
+          <a:p>
+            <a:r>
+              <a:rPr lang="en-US" altLang="ko-KR" sz="3000" b="1" dirty="0"/>
+              <a:t>. . .</a:t>
+            </a:r>
+            <a:endParaRPr lang="ko-KR" altLang="en-US" sz="3000" b="1" dirty="0"/>
+          </a:p>
+        </p:txBody>
+      </p:sp>
+      <p:pic>
+        <p:nvPicPr>
+          <p:cNvPr id="1060" name="Picture 6" descr="git pull과 git merge 비교">
+            <a:extLst>
+              <a:ext uri="{FF2B5EF4-FFF2-40B4-BE49-F238E27FC236}">
+                <a16:creationId xmlns:a16="http://schemas.microsoft.com/office/drawing/2014/main" id="{8573909C-5E72-535A-C0D9-475ED2BD88A7}"/>
+              </a:ext>
+            </a:extLst>
+          </p:cNvPr>
+          <p:cNvPicPr>
+            <a:picLocks noChangeAspect="1" noChangeArrowheads="1"/>
+          </p:cNvPicPr>
+          <p:nvPr/>
+        </p:nvPicPr>
+        <p:blipFill>
+          <a:blip r:embed="rId3">
+            <a:extLst>
+              <a:ext uri="{28A0092B-C50C-407E-A947-70E740481C1C}">
+                <a14:useLocalDpi xmlns:a14="http://schemas.microsoft.com/office/drawing/2010/main" val="0"/>
+              </a:ext>
+            </a:extLst>
+          </a:blip>
+          <a:srcRect/>
+          <a:stretch>
+            <a:fillRect/>
+          </a:stretch>
+        </p:blipFill>
+        <p:spPr bwMode="auto">
+          <a:xfrm rot="16200000">
+            <a:off x="6865338" y="5234466"/>
+            <a:ext cx="2853762" cy="2853762"/>
+          </a:xfrm>
+          <a:prstGeom prst="rect">
+            <a:avLst/>
+          </a:prstGeom>
+          <a:noFill/>
+          <a:extLst>
+            <a:ext uri="{909E8E84-426E-40DD-AFC4-6F175D3DCCD1}">
+              <a14:hiddenFill xmlns:a14="http://schemas.microsoft.com/office/drawing/2010/main">
+                <a:solidFill>
+                  <a:srgbClr val="FFFFFF"/>
+                </a:solidFill>
+              </a14:hiddenFill>
+            </a:ext>
+          </a:extLst>
+        </p:spPr>
+      </p:pic>
+      <p:sp>
+        <p:nvSpPr>
+          <p:cNvPr id="1062" name="사각형: 둥근 모서리 1061">
+            <a:extLst>
+              <a:ext uri="{FF2B5EF4-FFF2-40B4-BE49-F238E27FC236}">
+                <a16:creationId xmlns:a16="http://schemas.microsoft.com/office/drawing/2014/main" id="{1EF32E6D-5F3F-D73F-8507-03D13280B725}"/>
+              </a:ext>
+            </a:extLst>
+          </p:cNvPr>
+          <p:cNvSpPr/>
+          <p:nvPr/>
+        </p:nvSpPr>
+        <p:spPr>
+          <a:xfrm>
+            <a:off x="6194101" y="5050912"/>
+            <a:ext cx="4239312" cy="3036470"/>
+          </a:xfrm>
+          <a:prstGeom prst="roundRect">
+            <a:avLst>
+              <a:gd name="adj" fmla="val 13083"/>
+            </a:avLst>
+          </a:prstGeom>
+          <a:noFill/>
+        </p:spPr>
+        <p:style>
+          <a:lnRef idx="2">
+            <a:schemeClr val="accent1">
+              <a:shade val="15000"/>
+            </a:schemeClr>
+          </a:lnRef>
+          <a:fillRef idx="1">
+            <a:schemeClr val="accent1"/>
+          </a:fillRef>
+          <a:effectRef idx="0">
+            <a:schemeClr val="accent1"/>
+          </a:effectRef>
+          <a:fontRef idx="minor">
+            <a:schemeClr val="lt1"/>
+          </a:fontRef>
+        </p:style>
+        <p:txBody>
+          <a:bodyPr rtlCol="0" anchor="ctr"/>
+          <a:lstStyle/>
+          <a:p>
+            <a:pPr algn="ctr"/>
+            <a:endParaRPr lang="ko-KR" altLang="en-US" sz="2700" dirty="0"/>
+          </a:p>
+        </p:txBody>
+      </p:sp>
+      <p:sp>
+        <p:nvSpPr>
+          <p:cNvPr id="1063" name="TextBox 1062">
+            <a:extLst>
+              <a:ext uri="{FF2B5EF4-FFF2-40B4-BE49-F238E27FC236}">
+                <a16:creationId xmlns:a16="http://schemas.microsoft.com/office/drawing/2014/main" id="{8BE6016C-4006-5855-9A96-BE27812E88CC}"/>
+              </a:ext>
+            </a:extLst>
+          </p:cNvPr>
+          <p:cNvSpPr txBox="1"/>
+          <p:nvPr/>
+        </p:nvSpPr>
+        <p:spPr>
+          <a:xfrm>
+            <a:off x="7329192" y="4669336"/>
+            <a:ext cx="1967564" cy="646331"/>
+          </a:xfrm>
+          <a:prstGeom prst="rect">
+            <a:avLst/>
+          </a:prstGeom>
+          <a:solidFill>
+            <a:schemeClr val="bg1"/>
+          </a:solidFill>
+        </p:spPr>
+        <p:txBody>
+          <a:bodyPr wrap="square" rtlCol="0">
+            <a:spAutoFit/>
+          </a:bodyPr>
+          <a:lstStyle/>
+          <a:p>
+            <a:pPr algn="ctr"/>
+            <a:r>
+              <a:rPr lang="en-US" altLang="ko-KR" sz="3600" dirty="0">
+                <a:latin typeface="Aptos Display" panose="020B0004020202020204" pitchFamily="34" charset="0"/>
+              </a:rPr>
+              <a:t>Merge</a:t>
+            </a:r>
+            <a:endParaRPr lang="ko-KR" altLang="en-US" sz="2400" dirty="0">
+              <a:latin typeface="Aptos Display" panose="020B0004020202020204" pitchFamily="34" charset="0"/>
+            </a:endParaRPr>
+          </a:p>
+        </p:txBody>
+      </p:sp>
+      <p:cxnSp>
+        <p:nvCxnSpPr>
+          <p:cNvPr id="1067" name="연결선: 구부러짐 1066">
+            <a:extLst>
+              <a:ext uri="{FF2B5EF4-FFF2-40B4-BE49-F238E27FC236}">
+                <a16:creationId xmlns:a16="http://schemas.microsoft.com/office/drawing/2014/main" id="{105EA37D-4FE8-EE40-A157-CB92629E3BA3}"/>
+              </a:ext>
+            </a:extLst>
+          </p:cNvPr>
+          <p:cNvCxnSpPr>
+            <a:cxnSpLocks/>
+            <a:stCxn id="10" idx="1"/>
+            <a:endCxn id="1062" idx="3"/>
+          </p:cNvCxnSpPr>
+          <p:nvPr/>
+        </p:nvCxnSpPr>
+        <p:spPr>
+          <a:xfrm rot="10800000" flipV="1">
+            <a:off x="10433415" y="3981065"/>
+            <a:ext cx="1433702" cy="2588082"/>
+          </a:xfrm>
+          <a:prstGeom prst="curvedConnector3">
+            <a:avLst/>
+          </a:prstGeom>
+          <a:ln w="28575">
+            <a:tailEnd type="triangle"/>
+          </a:ln>
+        </p:spPr>
+        <p:style>
+          <a:lnRef idx="2">
+            <a:schemeClr val="dk1"/>
+          </a:lnRef>
+          <a:fillRef idx="0">
+            <a:schemeClr val="dk1"/>
+          </a:fillRef>
+          <a:effectRef idx="1">
+            <a:schemeClr val="dk1"/>
+          </a:effectRef>
+          <a:fontRef idx="minor">
+            <a:schemeClr val="tx1"/>
+          </a:fontRef>
+        </p:style>
+      </p:cxnSp>
+      <p:cxnSp>
+        <p:nvCxnSpPr>
+          <p:cNvPr id="1069" name="연결선: 구부러짐 1068">
+            <a:extLst>
+              <a:ext uri="{FF2B5EF4-FFF2-40B4-BE49-F238E27FC236}">
+                <a16:creationId xmlns:a16="http://schemas.microsoft.com/office/drawing/2014/main" id="{EE0E06F7-2A96-F10B-6A07-881C12605785}"/>
+              </a:ext>
+            </a:extLst>
+          </p:cNvPr>
+          <p:cNvCxnSpPr>
+            <a:cxnSpLocks/>
+            <a:stCxn id="1062" idx="1"/>
+            <a:endCxn id="1047" idx="1"/>
+          </p:cNvCxnSpPr>
+          <p:nvPr/>
+        </p:nvCxnSpPr>
+        <p:spPr>
+          <a:xfrm rot="10800000" flipH="1" flipV="1">
+            <a:off x="6194100" y="6569146"/>
+            <a:ext cx="5673008" cy="554657"/>
+          </a:xfrm>
+          <a:prstGeom prst="curvedConnector5">
+            <a:avLst>
+              <a:gd name="adj1" fmla="val -9684"/>
+              <a:gd name="adj2" fmla="val 321229"/>
+              <a:gd name="adj3" fmla="val 87364"/>
+            </a:avLst>
+          </a:prstGeom>
+          <a:ln w="28575">
+            <a:tailEnd type="triangle"/>
+          </a:ln>
+        </p:spPr>
+        <p:style>
+          <a:lnRef idx="2">
+            <a:schemeClr val="dk1"/>
+          </a:lnRef>
+          <a:fillRef idx="0">
+            <a:schemeClr val="dk1"/>
+          </a:fillRef>
+          <a:effectRef idx="1">
+            <a:schemeClr val="dk1"/>
+          </a:effectRef>
+          <a:fontRef idx="minor">
+            <a:schemeClr val="tx1"/>
+          </a:fontRef>
+        </p:style>
+      </p:cxnSp>
+      <p:sp>
+        <p:nvSpPr>
+          <p:cNvPr id="3" name="TextBox 2">
+            <a:extLst>
+              <a:ext uri="{FF2B5EF4-FFF2-40B4-BE49-F238E27FC236}">
+                <a16:creationId xmlns:a16="http://schemas.microsoft.com/office/drawing/2014/main" id="{DC946AB8-E302-DAE5-810E-1B36BE9B6B12}"/>
+              </a:ext>
+            </a:extLst>
+          </p:cNvPr>
+          <p:cNvSpPr txBox="1"/>
+          <p:nvPr/>
+        </p:nvSpPr>
+        <p:spPr>
+          <a:xfrm>
+            <a:off x="11011681" y="2535581"/>
+            <a:ext cx="301686" cy="369332"/>
+          </a:xfrm>
+          <a:prstGeom prst="rect">
+            <a:avLst/>
+          </a:prstGeom>
+          <a:noFill/>
+        </p:spPr>
+        <p:txBody>
+          <a:bodyPr wrap="none" rtlCol="0">
+            <a:spAutoFit/>
+          </a:bodyPr>
+          <a:lstStyle/>
+          <a:p>
+            <a:r>
+              <a:rPr lang="en-US" altLang="ko-KR" dirty="0"/>
+              <a:t>1</a:t>
+            </a:r>
+            <a:endParaRPr lang="ko-KR" altLang="en-US" dirty="0"/>
+          </a:p>
+        </p:txBody>
+      </p:sp>
+      <p:sp>
+        <p:nvSpPr>
+          <p:cNvPr id="6" name="TextBox 5">
+            <a:extLst>
+              <a:ext uri="{FF2B5EF4-FFF2-40B4-BE49-F238E27FC236}">
+                <a16:creationId xmlns:a16="http://schemas.microsoft.com/office/drawing/2014/main" id="{3C2932DF-4C22-EFA9-8EEC-E55D776B19CE}"/>
+              </a:ext>
+            </a:extLst>
+          </p:cNvPr>
+          <p:cNvSpPr txBox="1"/>
+          <p:nvPr/>
+        </p:nvSpPr>
+        <p:spPr>
+          <a:xfrm>
+            <a:off x="5392169" y="3853853"/>
+            <a:ext cx="301686" cy="369332"/>
+          </a:xfrm>
+          <a:prstGeom prst="rect">
+            <a:avLst/>
+          </a:prstGeom>
+          <a:noFill/>
+        </p:spPr>
+        <p:txBody>
+          <a:bodyPr wrap="none" rtlCol="0">
+            <a:spAutoFit/>
+          </a:bodyPr>
+          <a:lstStyle/>
+          <a:p>
+            <a:r>
+              <a:rPr lang="en-US" altLang="ko-KR" dirty="0"/>
+              <a:t>2</a:t>
+            </a:r>
+            <a:endParaRPr lang="ko-KR" altLang="en-US" dirty="0"/>
+          </a:p>
+        </p:txBody>
+      </p:sp>
+      <p:cxnSp>
+        <p:nvCxnSpPr>
+          <p:cNvPr id="22" name="연결선: 구부러짐 21">
+            <a:extLst>
+              <a:ext uri="{FF2B5EF4-FFF2-40B4-BE49-F238E27FC236}">
+                <a16:creationId xmlns:a16="http://schemas.microsoft.com/office/drawing/2014/main" id="{80B0557B-65B0-164E-958B-A5ADF5D3DEC0}"/>
+              </a:ext>
+            </a:extLst>
+          </p:cNvPr>
+          <p:cNvCxnSpPr>
+            <a:cxnSpLocks/>
+            <a:stCxn id="28" idx="3"/>
+            <a:endCxn id="11" idx="1"/>
+          </p:cNvCxnSpPr>
+          <p:nvPr/>
+        </p:nvCxnSpPr>
+        <p:spPr>
+          <a:xfrm>
+            <a:off x="10441999" y="3124367"/>
+            <a:ext cx="1425113" cy="1444788"/>
+          </a:xfrm>
+          <a:prstGeom prst="curvedConnector3">
+            <a:avLst/>
+          </a:prstGeom>
+          <a:ln w="28575">
+            <a:tailEnd type="triangle"/>
+          </a:ln>
+        </p:spPr>
+        <p:style>
+          <a:lnRef idx="1">
+            <a:schemeClr val="dk1"/>
+          </a:lnRef>
+          <a:fillRef idx="0">
+            <a:schemeClr val="dk1"/>
+          </a:fillRef>
+          <a:effectRef idx="0">
+            <a:schemeClr val="dk1"/>
+          </a:effectRef>
+          <a:fontRef idx="minor">
+            <a:schemeClr val="tx1"/>
+          </a:fontRef>
+        </p:style>
+      </p:cxnSp>
+      <p:sp>
+        <p:nvSpPr>
+          <p:cNvPr id="24" name="TextBox 23">
+            <a:extLst>
+              <a:ext uri="{FF2B5EF4-FFF2-40B4-BE49-F238E27FC236}">
+                <a16:creationId xmlns:a16="http://schemas.microsoft.com/office/drawing/2014/main" id="{8F633A61-08F6-2890-3E12-E1E17FD9F866}"/>
+              </a:ext>
+            </a:extLst>
+          </p:cNvPr>
+          <p:cNvSpPr txBox="1"/>
+          <p:nvPr/>
+        </p:nvSpPr>
+        <p:spPr>
+          <a:xfrm>
+            <a:off x="11047564" y="3169660"/>
+            <a:ext cx="301686" cy="369332"/>
+          </a:xfrm>
+          <a:prstGeom prst="rect">
+            <a:avLst/>
+          </a:prstGeom>
+          <a:noFill/>
+        </p:spPr>
+        <p:txBody>
+          <a:bodyPr wrap="none" rtlCol="0">
+            <a:spAutoFit/>
+          </a:bodyPr>
+          <a:lstStyle/>
+          <a:p>
+            <a:r>
+              <a:rPr lang="en-US" altLang="ko-KR" dirty="0"/>
+              <a:t>3</a:t>
+            </a:r>
+            <a:endParaRPr lang="ko-KR" altLang="en-US" dirty="0"/>
+          </a:p>
+        </p:txBody>
+      </p:sp>
+      <p:sp>
+        <p:nvSpPr>
+          <p:cNvPr id="25" name="TextBox 24">
+            <a:extLst>
+              <a:ext uri="{FF2B5EF4-FFF2-40B4-BE49-F238E27FC236}">
+                <a16:creationId xmlns:a16="http://schemas.microsoft.com/office/drawing/2014/main" id="{55238D4A-4C7E-DD97-1A73-7B742A782CC5}"/>
+              </a:ext>
+            </a:extLst>
+          </p:cNvPr>
+          <p:cNvSpPr txBox="1"/>
+          <p:nvPr/>
+        </p:nvSpPr>
+        <p:spPr>
+          <a:xfrm>
+            <a:off x="16090373" y="7917943"/>
+            <a:ext cx="301686" cy="369332"/>
+          </a:xfrm>
+          <a:prstGeom prst="rect">
+            <a:avLst/>
+          </a:prstGeom>
+          <a:noFill/>
+        </p:spPr>
+        <p:txBody>
+          <a:bodyPr wrap="none" rtlCol="0">
+            <a:spAutoFit/>
+          </a:bodyPr>
+          <a:lstStyle/>
+          <a:p>
+            <a:r>
+              <a:rPr lang="en-US" altLang="ko-KR" dirty="0"/>
+              <a:t>4</a:t>
+            </a:r>
+            <a:endParaRPr lang="ko-KR" altLang="en-US" dirty="0"/>
+          </a:p>
+        </p:txBody>
+      </p:sp>
+      <p:sp>
+        <p:nvSpPr>
+          <p:cNvPr id="26" name="TextBox 25">
+            <a:extLst>
+              <a:ext uri="{FF2B5EF4-FFF2-40B4-BE49-F238E27FC236}">
+                <a16:creationId xmlns:a16="http://schemas.microsoft.com/office/drawing/2014/main" id="{F7182D90-3788-40CC-24CB-169B0D645518}"/>
+              </a:ext>
+            </a:extLst>
+          </p:cNvPr>
+          <p:cNvSpPr txBox="1"/>
+          <p:nvPr/>
+        </p:nvSpPr>
+        <p:spPr>
+          <a:xfrm>
+            <a:off x="10790541" y="5499299"/>
+            <a:ext cx="301686" cy="369332"/>
+          </a:xfrm>
+          <a:prstGeom prst="rect">
+            <a:avLst/>
+          </a:prstGeom>
+          <a:noFill/>
+        </p:spPr>
+        <p:txBody>
+          <a:bodyPr wrap="none" rtlCol="0">
+            <a:spAutoFit/>
+          </a:bodyPr>
+          <a:lstStyle/>
+          <a:p>
+            <a:r>
+              <a:rPr lang="en-US" altLang="ko-KR" dirty="0"/>
+              <a:t>5</a:t>
+            </a:r>
+            <a:endParaRPr lang="ko-KR" altLang="en-US" dirty="0"/>
+          </a:p>
+        </p:txBody>
+      </p:sp>
+      <p:sp>
+        <p:nvSpPr>
+          <p:cNvPr id="29" name="TextBox 28">
+            <a:extLst>
+              <a:ext uri="{FF2B5EF4-FFF2-40B4-BE49-F238E27FC236}">
+                <a16:creationId xmlns:a16="http://schemas.microsoft.com/office/drawing/2014/main" id="{00B30E3E-E4B1-BF04-025C-60166AC81D0D}"/>
+              </a:ext>
+            </a:extLst>
+          </p:cNvPr>
+          <p:cNvSpPr txBox="1"/>
+          <p:nvPr/>
+        </p:nvSpPr>
+        <p:spPr>
+          <a:xfrm>
+            <a:off x="10639726" y="7587854"/>
+            <a:ext cx="301686" cy="369332"/>
+          </a:xfrm>
+          <a:prstGeom prst="rect">
+            <a:avLst/>
+          </a:prstGeom>
+          <a:noFill/>
+        </p:spPr>
+        <p:txBody>
+          <a:bodyPr wrap="none" rtlCol="0">
+            <a:spAutoFit/>
+          </a:bodyPr>
+          <a:lstStyle/>
+          <a:p>
+            <a:r>
+              <a:rPr lang="en-US" altLang="ko-KR" dirty="0"/>
+              <a:t>6</a:t>
+            </a:r>
+            <a:endParaRPr lang="ko-KR" altLang="en-US" dirty="0"/>
+          </a:p>
+        </p:txBody>
+      </p:sp>
+      <p:cxnSp>
+        <p:nvCxnSpPr>
+          <p:cNvPr id="31" name="연결선: 구부러짐 30">
+            <a:extLst>
+              <a:ext uri="{FF2B5EF4-FFF2-40B4-BE49-F238E27FC236}">
+                <a16:creationId xmlns:a16="http://schemas.microsoft.com/office/drawing/2014/main" id="{7B2142AC-A3C8-CC94-6F4A-224C6774F14C}"/>
+              </a:ext>
+            </a:extLst>
+          </p:cNvPr>
+          <p:cNvCxnSpPr>
+            <a:stCxn id="1047" idx="3"/>
+            <a:endCxn id="19" idx="3"/>
+          </p:cNvCxnSpPr>
+          <p:nvPr/>
+        </p:nvCxnSpPr>
+        <p:spPr>
+          <a:xfrm flipH="1">
+            <a:off x="15395180" y="7123804"/>
+            <a:ext cx="308352" cy="2371078"/>
+          </a:xfrm>
+          <a:prstGeom prst="curvedConnector3">
+            <a:avLst>
+              <a:gd name="adj1" fmla="val -74136"/>
+            </a:avLst>
+          </a:prstGeom>
+          <a:ln w="28575">
+            <a:tailEnd type="triangle"/>
+          </a:ln>
+        </p:spPr>
+        <p:style>
+          <a:lnRef idx="1">
+            <a:schemeClr val="dk1"/>
+          </a:lnRef>
+          <a:fillRef idx="0">
+            <a:schemeClr val="dk1"/>
+          </a:fillRef>
+          <a:effectRef idx="0">
+            <a:schemeClr val="dk1"/>
+          </a:effectRef>
+          <a:fontRef idx="minor">
+            <a:schemeClr val="tx1"/>
+          </a:fontRef>
+        </p:style>
+      </p:cxnSp>
+      <p:cxnSp>
+        <p:nvCxnSpPr>
+          <p:cNvPr id="33" name="연결선: 구부러짐 32">
+            <a:extLst>
+              <a:ext uri="{FF2B5EF4-FFF2-40B4-BE49-F238E27FC236}">
+                <a16:creationId xmlns:a16="http://schemas.microsoft.com/office/drawing/2014/main" id="{C52BF79D-597B-3819-FB50-4E703FF808DE}"/>
+              </a:ext>
+            </a:extLst>
+          </p:cNvPr>
+          <p:cNvCxnSpPr>
+            <a:stCxn id="19" idx="3"/>
+            <a:endCxn id="10" idx="3"/>
+          </p:cNvCxnSpPr>
+          <p:nvPr/>
+        </p:nvCxnSpPr>
+        <p:spPr>
+          <a:xfrm flipV="1">
+            <a:off x="15395180" y="3981065"/>
+            <a:ext cx="308358" cy="5513817"/>
+          </a:xfrm>
+          <a:prstGeom prst="curvedConnector3">
+            <a:avLst>
+              <a:gd name="adj1" fmla="val 451542"/>
+            </a:avLst>
+          </a:prstGeom>
+          <a:ln w="28575">
+            <a:tailEnd type="triangle"/>
+          </a:ln>
+        </p:spPr>
+        <p:style>
+          <a:lnRef idx="1">
+            <a:schemeClr val="dk1"/>
+          </a:lnRef>
+          <a:fillRef idx="0">
+            <a:schemeClr val="dk1"/>
+          </a:fillRef>
+          <a:effectRef idx="0">
+            <a:schemeClr val="dk1"/>
+          </a:effectRef>
+          <a:fontRef idx="minor">
+            <a:schemeClr val="tx1"/>
+          </a:fontRef>
+        </p:style>
+      </p:cxnSp>
+      <p:sp>
+        <p:nvSpPr>
+          <p:cNvPr id="35" name="Title 1">
+            <a:extLst>
+              <a:ext uri="{FF2B5EF4-FFF2-40B4-BE49-F238E27FC236}">
+                <a16:creationId xmlns:a16="http://schemas.microsoft.com/office/drawing/2014/main" id="{B569BF8D-42B5-4EC7-CC82-47E79E018506}"/>
+              </a:ext>
+            </a:extLst>
+          </p:cNvPr>
+          <p:cNvSpPr txBox="1">
+            <a:spLocks/>
+          </p:cNvSpPr>
+          <p:nvPr/>
+        </p:nvSpPr>
+        <p:spPr>
+          <a:xfrm>
+            <a:off x="783798" y="676798"/>
+            <a:ext cx="3498379" cy="1143000"/>
+          </a:xfrm>
+          <a:prstGeom prst="rect">
+            <a:avLst/>
+          </a:prstGeom>
+        </p:spPr>
+        <p:txBody>
+          <a:bodyPr vert="horz" lIns="91440" tIns="45720" rIns="91440" bIns="45720" rtlCol="0" anchor="ctr">
+            <a:normAutofit fontScale="92500" lnSpcReduction="20000"/>
+          </a:bodyPr>
+          <a:lstStyle>
+            <a:lvl1pPr algn="ctr" defTabSz="914400" rtl="0" eaLnBrk="1" latinLnBrk="0" hangingPunct="1">
+              <a:spcBef>
+                <a:spcPct val="0"/>
+              </a:spcBef>
+              <a:buNone/>
+              <a:defRPr sz="4400" kern="1200">
+                <a:solidFill>
+                  <a:schemeClr val="tx1"/>
+                </a:solidFill>
+                <a:latin typeface="+mj-lt"/>
+                <a:ea typeface="+mj-ea"/>
+                <a:cs typeface="+mj-cs"/>
+              </a:defRPr>
+            </a:lvl1pPr>
+          </a:lstStyle>
+          <a:p>
+            <a:pPr algn="r"/>
+            <a:r>
+              <a:rPr lang="en-US" dirty="0"/>
+              <a:t>Worker</a:t>
+            </a:r>
+            <a:r>
+              <a:rPr lang="en-KR" dirty="0"/>
+              <a:t> </a:t>
+            </a:r>
+            <a:r>
+              <a:rPr lang="en-US" dirty="0"/>
+              <a:t>Design </a:t>
+            </a:r>
+          </a:p>
+          <a:p>
+            <a:pPr algn="r"/>
+            <a:r>
+              <a:rPr lang="en-US" dirty="0"/>
+              <a:t>   - abstraction</a:t>
+            </a:r>
+            <a:endParaRPr lang="en-KR" dirty="0"/>
+          </a:p>
+        </p:txBody>
+      </p:sp>
+    </p:spTree>
+    <p:extLst>
+      <p:ext uri="{BB962C8B-B14F-4D97-AF65-F5344CB8AC3E}">
+        <p14:creationId xmlns:p14="http://schemas.microsoft.com/office/powerpoint/2010/main" val="2850443503"/>
+      </p:ext>
+    </p:extLst>
+  </p:cSld>
+  <p:clrMapOvr>
+    <a:masterClrMapping/>
+  </p:clrMapOvr>
+</p:sld>
+</file>
+
+<file path=ppt/slides/slide12.xml><?xml version="1.0" encoding="utf-8"?>
 <p:sld xmlns:a="http://schemas.openxmlformats.org/drawingml/2006/main" xmlns:r="http://schemas.openxmlformats.org/officeDocument/2006/relationships" xmlns:p="http://schemas.openxmlformats.org/presentationml/2006/main">
   <p:cSld>
     <p:spTree>
@@ -5624,113 +7525,16 @@
           <a:chExt cx="0" cy="0"/>
         </a:xfrm>
       </p:grpSpPr>
-      <p:grpSp>
-        <p:nvGrpSpPr>
-          <p:cNvPr id="2" name="Group 2"/>
-          <p:cNvGrpSpPr/>
-          <p:nvPr/>
-        </p:nvGrpSpPr>
-        <p:grpSpPr>
-          <a:xfrm>
-            <a:off x="-290868" y="10008764"/>
-            <a:ext cx="18869735" cy="120011"/>
-            <a:chOff x="0" y="0"/>
-            <a:chExt cx="4969807" cy="31608"/>
-          </a:xfrm>
-        </p:grpSpPr>
-        <p:sp>
-          <p:nvSpPr>
-            <p:cNvPr id="3" name="Freeform 3"/>
-            <p:cNvSpPr/>
-            <p:nvPr/>
-          </p:nvSpPr>
-          <p:spPr>
-            <a:xfrm>
-              <a:off x="0" y="0"/>
-              <a:ext cx="4969807" cy="31608"/>
-            </a:xfrm>
-            <a:custGeom>
-              <a:avLst/>
-              <a:gdLst/>
-              <a:ahLst/>
-              <a:cxnLst/>
-              <a:rect l="l" t="t" r="r" b="b"/>
-              <a:pathLst>
-                <a:path w="4969807" h="31608">
-                  <a:moveTo>
-                    <a:pt x="0" y="0"/>
-                  </a:moveTo>
-                  <a:lnTo>
-                    <a:pt x="4969807" y="0"/>
-                  </a:lnTo>
-                  <a:lnTo>
-                    <a:pt x="4969807" y="31608"/>
-                  </a:lnTo>
-                  <a:lnTo>
-                    <a:pt x="0" y="31608"/>
-                  </a:lnTo>
-                  <a:close/>
-                </a:path>
-              </a:pathLst>
-            </a:custGeom>
-            <a:solidFill>
-              <a:srgbClr val="191919"/>
-            </a:solidFill>
-            <a:ln w="19050" cap="sq">
-              <a:solidFill>
-                <a:srgbClr val="191919"/>
-              </a:solidFill>
-              <a:prstDash val="solid"/>
-              <a:miter/>
-            </a:ln>
-          </p:spPr>
-          <p:txBody>
-            <a:bodyPr/>
-            <a:lstStyle/>
-            <a:p>
-              <a:endParaRPr lang="ko-KR" altLang="en-US"/>
-            </a:p>
-          </p:txBody>
-        </p:sp>
-        <p:sp>
-          <p:nvSpPr>
-            <p:cNvPr id="4" name="TextBox 4"/>
-            <p:cNvSpPr txBox="1"/>
-            <p:nvPr/>
-          </p:nvSpPr>
-          <p:spPr>
-            <a:xfrm>
-              <a:off x="0" y="-47625"/>
-              <a:ext cx="4969807" cy="79233"/>
-            </a:xfrm>
-            <a:prstGeom prst="rect">
-              <a:avLst/>
-            </a:prstGeom>
-          </p:spPr>
-          <p:txBody>
-            <a:bodyPr lIns="50800" tIns="50800" rIns="50800" bIns="50800" rtlCol="0" anchor="ctr"/>
-            <a:lstStyle/>
-            <a:p>
-              <a:pPr algn="ctr">
-                <a:lnSpc>
-                  <a:spcPts val="2659"/>
-                </a:lnSpc>
-              </a:pPr>
-              <a:endParaRPr/>
-            </a:p>
-          </p:txBody>
-        </p:sp>
-      </p:grpSp>
-      <p:sp>
-        <p:nvSpPr>
-          <p:cNvPr id="5" name="TextBox 5"/>
+      <p:sp>
+        <p:nvSpPr>
+          <p:cNvPr id="6" name="TextBox 6"/>
           <p:cNvSpPr txBox="1"/>
           <p:nvPr/>
         </p:nvSpPr>
         <p:spPr>
           <a:xfrm>
-            <a:off x="13378146" y="790575"/>
-            <a:ext cx="3881154" cy="438785"/>
+            <a:off x="206108" y="944123"/>
+            <a:ext cx="3104115" cy="794850"/>
           </a:xfrm>
           <a:prstGeom prst="rect">
             <a:avLst/>
@@ -5744,14 +7548,14 @@
           <a:p>
             <a:pPr algn="r">
               <a:lnSpc>
-                <a:spcPts val="3639"/>
+                <a:spcPts val="6589"/>
               </a:lnSpc>
               <a:spcBef>
                 <a:spcPct val="0"/>
               </a:spcBef>
             </a:pPr>
             <a:r>
-              <a:rPr lang="en-US" sz="2599">
+              <a:rPr lang="en-US" sz="4706" spc="-65" dirty="0">
                 <a:solidFill>
                   <a:srgbClr val="191919"/>
                 </a:solidFill>
@@ -5760,83 +7564,8 @@
                 <a:cs typeface="윤고딕"/>
                 <a:sym typeface="윤고딕"/>
               </a:rPr>
-              <a:t>Navy Team</a:t>
-            </a:r>
-          </a:p>
-        </p:txBody>
-      </p:sp>
-      <p:sp>
-        <p:nvSpPr>
-          <p:cNvPr id="6" name="TextBox 6"/>
-          <p:cNvSpPr txBox="1"/>
-          <p:nvPr/>
-        </p:nvSpPr>
-        <p:spPr>
-          <a:xfrm>
-            <a:off x="206108" y="944123"/>
-            <a:ext cx="3104115" cy="794850"/>
-          </a:xfrm>
-          <a:prstGeom prst="rect">
-            <a:avLst/>
-          </a:prstGeom>
-        </p:spPr>
-        <p:txBody>
-          <a:bodyPr lIns="0" tIns="0" rIns="0" bIns="0" rtlCol="0" anchor="t">
-            <a:spAutoFit/>
-          </a:bodyPr>
-          <a:lstStyle/>
-          <a:p>
-            <a:pPr algn="r">
-              <a:lnSpc>
-                <a:spcPts val="6589"/>
-              </a:lnSpc>
-              <a:spcBef>
-                <a:spcPct val="0"/>
-              </a:spcBef>
-            </a:pPr>
-            <a:r>
-              <a:rPr lang="en-US" sz="4706" spc="-65">
-                <a:solidFill>
-                  <a:srgbClr val="191919"/>
-                </a:solidFill>
-                <a:latin typeface="윤고딕"/>
-                <a:ea typeface="윤고딕"/>
-                <a:cs typeface="윤고딕"/>
-                <a:sym typeface="윤고딕"/>
-              </a:rPr>
-              <a:t>Our plan</a:t>
-            </a:r>
-          </a:p>
-        </p:txBody>
-      </p:sp>
-      <p:sp>
-        <p:nvSpPr>
-          <p:cNvPr id="7" name="AutoShape 7"/>
-          <p:cNvSpPr/>
-          <p:nvPr/>
-        </p:nvSpPr>
-        <p:spPr>
-          <a:xfrm>
-            <a:off x="0" y="828675"/>
-            <a:ext cx="3276389" cy="0"/>
-          </a:xfrm>
-          <a:prstGeom prst="line">
-            <a:avLst/>
-          </a:prstGeom>
-          <a:ln w="38100" cap="flat">
-            <a:solidFill>
-              <a:srgbClr val="191919"/>
-            </a:solidFill>
-            <a:prstDash val="solid"/>
-            <a:headEnd type="none" w="sm" len="sm"/>
-            <a:tailEnd type="none" w="sm" len="sm"/>
-          </a:ln>
-        </p:spPr>
-        <p:txBody>
-          <a:bodyPr/>
-          <a:lstStyle/>
-          <a:p>
-            <a:endParaRPr lang="ko-KR" altLang="en-US"/>
+              <a:t>Our Plan</a:t>
+            </a:r>
           </a:p>
         </p:txBody>
       </p:sp>
@@ -5848,15 +7577,15 @@
         </p:nvSpPr>
         <p:spPr>
           <a:xfrm>
-            <a:off x="1758166" y="3721851"/>
-            <a:ext cx="8370571" cy="507366"/>
+            <a:off x="1758167" y="3721851"/>
+            <a:ext cx="6547634" cy="481670"/>
           </a:xfrm>
           <a:prstGeom prst="rect">
             <a:avLst/>
           </a:prstGeom>
         </p:spPr>
         <p:txBody>
-          <a:bodyPr lIns="0" tIns="0" rIns="0" bIns="0" rtlCol="0" anchor="t">
+          <a:bodyPr wrap="square" lIns="0" tIns="0" rIns="0" bIns="0" rtlCol="0" anchor="t">
             <a:spAutoFit/>
           </a:bodyPr>
           <a:lstStyle/>
@@ -5870,7 +7599,7 @@
               </a:spcBef>
             </a:pPr>
             <a:r>
-              <a:rPr lang="en-US" sz="2899">
+              <a:rPr lang="en-US" sz="2899" dirty="0">
                 <a:solidFill>
                   <a:srgbClr val="191919"/>
                 </a:solidFill>
@@ -5914,7 +7643,7 @@
               </a:spcBef>
             </a:pPr>
             <a:r>
-              <a:rPr lang="en-US" sz="2899">
+              <a:rPr lang="en-US" sz="2899" dirty="0">
                 <a:solidFill>
                   <a:srgbClr val="191919"/>
                 </a:solidFill>
@@ -6012,6 +7741,56 @@
                 <a:sym typeface="윤고딕"/>
               </a:rPr>
               <a:t>Week 7~8: Test</a:t>
+            </a:r>
+          </a:p>
+        </p:txBody>
+      </p:sp>
+      <p:sp>
+        <p:nvSpPr>
+          <p:cNvPr id="15" name="TextBox 8">
+            <a:extLst>
+              <a:ext uri="{FF2B5EF4-FFF2-40B4-BE49-F238E27FC236}">
+                <a16:creationId xmlns:a16="http://schemas.microsoft.com/office/drawing/2014/main" id="{8D081E82-84FE-7ACE-53FE-74CE11DAD537}"/>
+              </a:ext>
+            </a:extLst>
+          </p:cNvPr>
+          <p:cNvSpPr txBox="1"/>
+          <p:nvPr/>
+        </p:nvSpPr>
+        <p:spPr>
+          <a:xfrm>
+            <a:off x="9982200" y="7477541"/>
+            <a:ext cx="6547634" cy="481670"/>
+          </a:xfrm>
+          <a:prstGeom prst="rect">
+            <a:avLst/>
+          </a:prstGeom>
+        </p:spPr>
+        <p:txBody>
+          <a:bodyPr wrap="square" lIns="0" tIns="0" rIns="0" bIns="0" rtlCol="0" anchor="t">
+            <a:spAutoFit/>
+          </a:bodyPr>
+          <a:lstStyle/>
+          <a:p>
+            <a:pPr algn="l">
+              <a:lnSpc>
+                <a:spcPts val="4059"/>
+              </a:lnSpc>
+              <a:spcBef>
+                <a:spcPct val="0"/>
+              </a:spcBef>
+            </a:pPr>
+            <a:r>
+              <a:rPr lang="en-US" sz="2899" dirty="0">
+                <a:solidFill>
+                  <a:srgbClr val="191919"/>
+                </a:solidFill>
+                <a:latin typeface="윤고딕"/>
+                <a:ea typeface="윤고딕"/>
+                <a:cs typeface="윤고딕"/>
+                <a:sym typeface="윤고딕"/>
+              </a:rPr>
+              <a:t>Meeting: Once a week, face-to-face</a:t>
             </a:r>
           </a:p>
         </p:txBody>
@@ -6041,134 +7820,6 @@
           <a:chExt cx="0" cy="0"/>
         </a:xfrm>
       </p:grpSpPr>
-      <p:grpSp>
-        <p:nvGrpSpPr>
-          <p:cNvPr id="2" name="Group 2"/>
-          <p:cNvGrpSpPr/>
-          <p:nvPr/>
-        </p:nvGrpSpPr>
-        <p:grpSpPr>
-          <a:xfrm>
-            <a:off x="-290868" y="10008764"/>
-            <a:ext cx="18869735" cy="120011"/>
-            <a:chOff x="0" y="0"/>
-            <a:chExt cx="4969807" cy="31608"/>
-          </a:xfrm>
-        </p:grpSpPr>
-        <p:sp>
-          <p:nvSpPr>
-            <p:cNvPr id="3" name="Freeform 3"/>
-            <p:cNvSpPr/>
-            <p:nvPr/>
-          </p:nvSpPr>
-          <p:spPr>
-            <a:xfrm>
-              <a:off x="0" y="0"/>
-              <a:ext cx="4969807" cy="31608"/>
-            </a:xfrm>
-            <a:custGeom>
-              <a:avLst/>
-              <a:gdLst/>
-              <a:ahLst/>
-              <a:cxnLst/>
-              <a:rect l="l" t="t" r="r" b="b"/>
-              <a:pathLst>
-                <a:path w="4969807" h="31608">
-                  <a:moveTo>
-                    <a:pt x="0" y="0"/>
-                  </a:moveTo>
-                  <a:lnTo>
-                    <a:pt x="4969807" y="0"/>
-                  </a:lnTo>
-                  <a:lnTo>
-                    <a:pt x="4969807" y="31608"/>
-                  </a:lnTo>
-                  <a:lnTo>
-                    <a:pt x="0" y="31608"/>
-                  </a:lnTo>
-                  <a:close/>
-                </a:path>
-              </a:pathLst>
-            </a:custGeom>
-            <a:solidFill>
-              <a:srgbClr val="191919"/>
-            </a:solidFill>
-            <a:ln w="19050" cap="sq">
-              <a:solidFill>
-                <a:srgbClr val="191919"/>
-              </a:solidFill>
-              <a:prstDash val="solid"/>
-              <a:miter/>
-            </a:ln>
-          </p:spPr>
-          <p:txBody>
-            <a:bodyPr/>
-            <a:lstStyle/>
-            <a:p>
-              <a:endParaRPr lang="ko-KR" altLang="en-US"/>
-            </a:p>
-          </p:txBody>
-        </p:sp>
-        <p:sp>
-          <p:nvSpPr>
-            <p:cNvPr id="4" name="TextBox 4"/>
-            <p:cNvSpPr txBox="1"/>
-            <p:nvPr/>
-          </p:nvSpPr>
-          <p:spPr>
-            <a:xfrm>
-              <a:off x="0" y="-47625"/>
-              <a:ext cx="4969807" cy="79233"/>
-            </a:xfrm>
-            <a:prstGeom prst="rect">
-              <a:avLst/>
-            </a:prstGeom>
-          </p:spPr>
-          <p:txBody>
-            <a:bodyPr lIns="50800" tIns="50800" rIns="50800" bIns="50800" rtlCol="0" anchor="ctr"/>
-            <a:lstStyle/>
-            <a:p>
-              <a:pPr algn="ctr">
-                <a:lnSpc>
-                  <a:spcPts val="2659"/>
-                </a:lnSpc>
-              </a:pPr>
-              <a:endParaRPr/>
-            </a:p>
-          </p:txBody>
-        </p:sp>
-      </p:grpSp>
-      <p:sp>
-        <p:nvSpPr>
-          <p:cNvPr id="5" name="AutoShape 5"/>
-          <p:cNvSpPr/>
-          <p:nvPr/>
-        </p:nvSpPr>
-        <p:spPr>
-          <a:xfrm>
-            <a:off x="0" y="828675"/>
-            <a:ext cx="4463094" cy="9525"/>
-          </a:xfrm>
-          <a:prstGeom prst="line">
-            <a:avLst/>
-          </a:prstGeom>
-          <a:ln w="38100" cap="flat">
-            <a:solidFill>
-              <a:srgbClr val="191919"/>
-            </a:solidFill>
-            <a:prstDash val="solid"/>
-            <a:headEnd type="none" w="sm" len="sm"/>
-            <a:tailEnd type="none" w="sm" len="sm"/>
-          </a:ln>
-        </p:spPr>
-        <p:txBody>
-          <a:bodyPr/>
-          <a:lstStyle/>
-          <a:p>
-            <a:endParaRPr lang="ko-KR" altLang="en-US"/>
-          </a:p>
-        </p:txBody>
-      </p:sp>
       <p:sp>
         <p:nvSpPr>
           <p:cNvPr id="6" name="Freeform 6"/>
@@ -6177,7 +7828,7 @@
         </p:nvSpPr>
         <p:spPr>
           <a:xfrm>
-            <a:off x="4463094" y="2406367"/>
+            <a:off x="5203347" y="2436060"/>
             <a:ext cx="5459632" cy="5414881"/>
           </a:xfrm>
           <a:custGeom>
@@ -6224,13 +7875,212 @@
       </p:sp>
       <p:sp>
         <p:nvSpPr>
+          <p:cNvPr id="8" name="Freeform 8"/>
+          <p:cNvSpPr/>
+          <p:nvPr/>
+        </p:nvSpPr>
+        <p:spPr>
+          <a:xfrm>
+            <a:off x="1722547" y="2376674"/>
+            <a:ext cx="2740547" cy="5474267"/>
+          </a:xfrm>
+          <a:custGeom>
+            <a:avLst/>
+            <a:gdLst/>
+            <a:ahLst/>
+            <a:cxnLst/>
+            <a:rect l="l" t="t" r="r" b="b"/>
+            <a:pathLst>
+              <a:path w="2740547" h="5474267">
+                <a:moveTo>
+                  <a:pt x="0" y="0"/>
+                </a:moveTo>
+                <a:lnTo>
+                  <a:pt x="2740547" y="0"/>
+                </a:lnTo>
+                <a:lnTo>
+                  <a:pt x="2740547" y="5474267"/>
+                </a:lnTo>
+                <a:lnTo>
+                  <a:pt x="0" y="5474267"/>
+                </a:lnTo>
+                <a:lnTo>
+                  <a:pt x="0" y="0"/>
+                </a:lnTo>
+                <a:close/>
+              </a:path>
+            </a:pathLst>
+          </a:custGeom>
+          <a:blipFill>
+            <a:blip r:embed="rId3"/>
+            <a:stretch>
+              <a:fillRect r="-122520"/>
+            </a:stretch>
+          </a:blipFill>
+        </p:spPr>
+        <p:txBody>
+          <a:bodyPr/>
+          <a:lstStyle/>
+          <a:p>
+            <a:endParaRPr lang="ko-KR" altLang="en-US"/>
+          </a:p>
+        </p:txBody>
+      </p:sp>
+      <p:sp>
+        <p:nvSpPr>
+          <p:cNvPr id="11" name="TextBox 11"/>
+          <p:cNvSpPr txBox="1"/>
+          <p:nvPr/>
+        </p:nvSpPr>
+        <p:spPr>
+          <a:xfrm>
+            <a:off x="0" y="944123"/>
+            <a:ext cx="4463094" cy="794850"/>
+          </a:xfrm>
+          <a:prstGeom prst="rect">
+            <a:avLst/>
+          </a:prstGeom>
+        </p:spPr>
+        <p:txBody>
+          <a:bodyPr lIns="0" tIns="0" rIns="0" bIns="0" rtlCol="0" anchor="t">
+            <a:spAutoFit/>
+          </a:bodyPr>
+          <a:lstStyle/>
+          <a:p>
+            <a:pPr algn="r">
+              <a:lnSpc>
+                <a:spcPts val="6589"/>
+              </a:lnSpc>
+              <a:spcBef>
+                <a:spcPct val="0"/>
+              </a:spcBef>
+            </a:pPr>
+            <a:r>
+              <a:rPr lang="en-US" sz="4706" spc="-65" dirty="0">
+                <a:solidFill>
+                  <a:srgbClr val="191919"/>
+                </a:solidFill>
+                <a:latin typeface="윤고딕"/>
+                <a:ea typeface="윤고딕"/>
+                <a:cs typeface="윤고딕"/>
+                <a:sym typeface="윤고딕"/>
+              </a:rPr>
+              <a:t>How we worked</a:t>
+            </a:r>
+          </a:p>
+        </p:txBody>
+      </p:sp>
+      <p:pic>
+        <p:nvPicPr>
+          <p:cNvPr id="15" name="그림 14">
+            <a:extLst>
+              <a:ext uri="{FF2B5EF4-FFF2-40B4-BE49-F238E27FC236}">
+                <a16:creationId xmlns:a16="http://schemas.microsoft.com/office/drawing/2014/main" id="{1F4830AE-107B-FAF3-1527-E694DD4D0348}"/>
+              </a:ext>
+            </a:extLst>
+          </p:cNvPr>
+          <p:cNvPicPr>
+            <a:picLocks noChangeAspect="1"/>
+          </p:cNvPicPr>
+          <p:nvPr/>
+        </p:nvPicPr>
+        <p:blipFill>
+          <a:blip r:embed="rId4"/>
+          <a:stretch>
+            <a:fillRect/>
+          </a:stretch>
+        </p:blipFill>
+        <p:spPr>
+          <a:xfrm>
+            <a:off x="11403232" y="1117266"/>
+            <a:ext cx="6773220" cy="8030696"/>
+          </a:xfrm>
+          <a:prstGeom prst="rect">
+            <a:avLst/>
+          </a:prstGeom>
+        </p:spPr>
+      </p:pic>
+      <p:pic>
+        <p:nvPicPr>
+          <p:cNvPr id="1026" name="Picture 2" descr="Notion - 나무위키">
+            <a:extLst>
+              <a:ext uri="{FF2B5EF4-FFF2-40B4-BE49-F238E27FC236}">
+                <a16:creationId xmlns:a16="http://schemas.microsoft.com/office/drawing/2014/main" id="{1684EF96-3529-9C70-F5FB-31579A4136BE}"/>
+              </a:ext>
+            </a:extLst>
+          </p:cNvPr>
+          <p:cNvPicPr>
+            <a:picLocks noChangeAspect="1" noChangeArrowheads="1"/>
+          </p:cNvPicPr>
+          <p:nvPr/>
+        </p:nvPicPr>
+        <p:blipFill>
+          <a:blip r:embed="rId5">
+            <a:extLst>
+              <a:ext uri="{28A0092B-C50C-407E-A947-70E740481C1C}">
+                <a14:useLocalDpi xmlns:a14="http://schemas.microsoft.com/office/drawing/2010/main" val="0"/>
+              </a:ext>
+            </a:extLst>
+          </a:blip>
+          <a:srcRect/>
+          <a:stretch>
+            <a:fillRect/>
+          </a:stretch>
+        </p:blipFill>
+        <p:spPr bwMode="auto">
+          <a:xfrm>
+            <a:off x="4480281" y="595580"/>
+            <a:ext cx="1446131" cy="1491936"/>
+          </a:xfrm>
+          <a:prstGeom prst="rect">
+            <a:avLst/>
+          </a:prstGeom>
+          <a:noFill/>
+          <a:extLst>
+            <a:ext uri="{909E8E84-426E-40DD-AFC4-6F175D3DCCD1}">
+              <a14:hiddenFill xmlns:a14="http://schemas.microsoft.com/office/drawing/2010/main">
+                <a:solidFill>
+                  <a:srgbClr val="FFFFFF"/>
+                </a:solidFill>
+              </a14:hiddenFill>
+            </a:ext>
+          </a:extLst>
+        </p:spPr>
+      </p:pic>
+    </p:spTree>
+  </p:cSld>
+  <p:clrMapOvr>
+    <a:masterClrMapping/>
+  </p:clrMapOvr>
+</p:sld>
+</file>
+
+<file path=ppt/slides/slide4.xml><?xml version="1.0" encoding="utf-8"?>
+<p:sld xmlns:a="http://schemas.openxmlformats.org/drawingml/2006/main" xmlns:r="http://schemas.openxmlformats.org/officeDocument/2006/relationships" xmlns:p="http://schemas.openxmlformats.org/presentationml/2006/main">
+  <p:cSld>
+    <p:spTree>
+      <p:nvGrpSpPr>
+        <p:cNvPr id="1" name=""/>
+        <p:cNvGrpSpPr/>
+        <p:nvPr/>
+      </p:nvGrpSpPr>
+      <p:grpSpPr>
+        <a:xfrm>
+          <a:off x="0" y="0"/>
+          <a:ext cx="0" cy="0"/>
+          <a:chOff x="0" y="0"/>
+          <a:chExt cx="0" cy="0"/>
+        </a:xfrm>
+      </p:grpSpPr>
+      <p:sp>
+        <p:nvSpPr>
           <p:cNvPr id="7" name="Freeform 7"/>
           <p:cNvSpPr/>
           <p:nvPr/>
         </p:nvSpPr>
         <p:spPr>
           <a:xfrm>
-            <a:off x="10426093" y="2165680"/>
+            <a:off x="1361963" y="2633251"/>
             <a:ext cx="3079360" cy="5887162"/>
           </a:xfrm>
           <a:custGeom>
@@ -6261,7 +8111,7 @@
             </a:pathLst>
           </a:custGeom>
           <a:blipFill>
-            <a:blip r:embed="rId3"/>
+            <a:blip r:embed="rId2"/>
             <a:stretch>
               <a:fillRect r="-58465"/>
             </a:stretch>
@@ -6277,66 +8127,13 @@
       </p:sp>
       <p:sp>
         <p:nvSpPr>
-          <p:cNvPr id="8" name="Freeform 8"/>
-          <p:cNvSpPr/>
-          <p:nvPr/>
-        </p:nvSpPr>
-        <p:spPr>
-          <a:xfrm>
-            <a:off x="1722547" y="2376674"/>
-            <a:ext cx="2740547" cy="5474267"/>
-          </a:xfrm>
-          <a:custGeom>
-            <a:avLst/>
-            <a:gdLst/>
-            <a:ahLst/>
-            <a:cxnLst/>
-            <a:rect l="l" t="t" r="r" b="b"/>
-            <a:pathLst>
-              <a:path w="2740547" h="5474267">
-                <a:moveTo>
-                  <a:pt x="0" y="0"/>
-                </a:moveTo>
-                <a:lnTo>
-                  <a:pt x="2740547" y="0"/>
-                </a:lnTo>
-                <a:lnTo>
-                  <a:pt x="2740547" y="5474267"/>
-                </a:lnTo>
-                <a:lnTo>
-                  <a:pt x="0" y="5474267"/>
-                </a:lnTo>
-                <a:lnTo>
-                  <a:pt x="0" y="0"/>
-                </a:lnTo>
-                <a:close/>
-              </a:path>
-            </a:pathLst>
-          </a:custGeom>
-          <a:blipFill>
-            <a:blip r:embed="rId4"/>
-            <a:stretch>
-              <a:fillRect r="-122520"/>
-            </a:stretch>
-          </a:blipFill>
-        </p:spPr>
-        <p:txBody>
-          <a:bodyPr/>
-          <a:lstStyle/>
-          <a:p>
-            <a:endParaRPr lang="ko-KR" altLang="en-US"/>
-          </a:p>
-        </p:txBody>
-      </p:sp>
-      <p:sp>
-        <p:nvSpPr>
           <p:cNvPr id="9" name="Freeform 9"/>
           <p:cNvSpPr/>
           <p:nvPr/>
         </p:nvSpPr>
         <p:spPr>
           <a:xfrm>
-            <a:off x="14010278" y="2165680"/>
+            <a:off x="6150428" y="2642343"/>
             <a:ext cx="3844526" cy="5878070"/>
           </a:xfrm>
           <a:custGeom>
@@ -6367,7 +8164,7 @@
             </a:pathLst>
           </a:custGeom>
           <a:blipFill>
-            <a:blip r:embed="rId5"/>
+            <a:blip r:embed="rId3"/>
             <a:stretch>
               <a:fillRect r="-52698"/>
             </a:stretch>
@@ -6378,50 +8175,6 @@
           <a:lstStyle/>
           <a:p>
             <a:endParaRPr lang="ko-KR" altLang="en-US"/>
-          </a:p>
-        </p:txBody>
-      </p:sp>
-      <p:sp>
-        <p:nvSpPr>
-          <p:cNvPr id="10" name="TextBox 10"/>
-          <p:cNvSpPr txBox="1"/>
-          <p:nvPr/>
-        </p:nvSpPr>
-        <p:spPr>
-          <a:xfrm>
-            <a:off x="13378146" y="790575"/>
-            <a:ext cx="3881154" cy="438785"/>
-          </a:xfrm>
-          <a:prstGeom prst="rect">
-            <a:avLst/>
-          </a:prstGeom>
-        </p:spPr>
-        <p:txBody>
-          <a:bodyPr lIns="0" tIns="0" rIns="0" bIns="0" rtlCol="0" anchor="t">
-            <a:spAutoFit/>
-          </a:bodyPr>
-          <a:lstStyle/>
-          <a:p>
-            <a:pPr algn="r">
-              <a:lnSpc>
-                <a:spcPts val="3639"/>
-              </a:lnSpc>
-              <a:spcBef>
-                <a:spcPct val="0"/>
-              </a:spcBef>
-            </a:pPr>
-            <a:r>
-              <a:rPr lang="en-US" sz="2599">
-                <a:solidFill>
-                  <a:srgbClr val="191919"/>
-                </a:solidFill>
-                <a:latin typeface="윤고딕"/>
-                <a:ea typeface="윤고딕"/>
-                <a:cs typeface="윤고딕"/>
-                <a:sym typeface="윤고딕"/>
-              </a:rPr>
-              <a:t>Navy Team</a:t>
-            </a:r>
           </a:p>
         </p:txBody>
       </p:sp>
@@ -6455,7 +8208,7 @@
               </a:spcBef>
             </a:pPr>
             <a:r>
-              <a:rPr lang="en-US" sz="4706" spc="-65">
+              <a:rPr lang="en-US" sz="4706" spc="-65" dirty="0">
                 <a:solidFill>
                   <a:srgbClr val="191919"/>
                 </a:solidFill>
@@ -6469,7 +8222,89 @@
           </a:p>
         </p:txBody>
       </p:sp>
+      <p:pic>
+        <p:nvPicPr>
+          <p:cNvPr id="2052" name="Picture 4" descr="Discord - 나무위키">
+            <a:extLst>
+              <a:ext uri="{FF2B5EF4-FFF2-40B4-BE49-F238E27FC236}">
+                <a16:creationId xmlns:a16="http://schemas.microsoft.com/office/drawing/2014/main" id="{04FE85E6-587F-B754-A948-0A1A14B3A6B4}"/>
+              </a:ext>
+            </a:extLst>
+          </p:cNvPr>
+          <p:cNvPicPr>
+            <a:picLocks noChangeAspect="1" noChangeArrowheads="1"/>
+          </p:cNvPicPr>
+          <p:nvPr/>
+        </p:nvPicPr>
+        <p:blipFill>
+          <a:blip r:embed="rId4">
+            <a:extLst>
+              <a:ext uri="{28A0092B-C50C-407E-A947-70E740481C1C}">
+                <a14:useLocalDpi xmlns:a14="http://schemas.microsoft.com/office/drawing/2010/main" val="0"/>
+              </a:ext>
+            </a:extLst>
+          </a:blip>
+          <a:srcRect/>
+          <a:stretch>
+            <a:fillRect/>
+          </a:stretch>
+        </p:blipFill>
+        <p:spPr bwMode="auto">
+          <a:xfrm>
+            <a:off x="4463094" y="492438"/>
+            <a:ext cx="1698220" cy="1698220"/>
+          </a:xfrm>
+          <a:prstGeom prst="rect">
+            <a:avLst/>
+          </a:prstGeom>
+          <a:noFill/>
+          <a:extLst>
+            <a:ext uri="{909E8E84-426E-40DD-AFC4-6F175D3DCCD1}">
+              <a14:hiddenFill xmlns:a14="http://schemas.microsoft.com/office/drawing/2010/main">
+                <a:solidFill>
+                  <a:srgbClr val="FFFFFF"/>
+                </a:solidFill>
+              </a14:hiddenFill>
+            </a:ext>
+          </a:extLst>
+        </p:spPr>
+      </p:pic>
+      <p:pic>
+        <p:nvPicPr>
+          <p:cNvPr id="3" name="그림 2">
+            <a:extLst>
+              <a:ext uri="{FF2B5EF4-FFF2-40B4-BE49-F238E27FC236}">
+                <a16:creationId xmlns:a16="http://schemas.microsoft.com/office/drawing/2014/main" id="{E2A71869-6A2C-30CB-4685-A62112442F06}"/>
+              </a:ext>
+            </a:extLst>
+          </p:cNvPr>
+          <p:cNvPicPr>
+            <a:picLocks noChangeAspect="1"/>
+          </p:cNvPicPr>
+          <p:nvPr/>
+        </p:nvPicPr>
+        <p:blipFill>
+          <a:blip r:embed="rId5"/>
+          <a:stretch>
+            <a:fillRect/>
+          </a:stretch>
+        </p:blipFill>
+        <p:spPr>
+          <a:xfrm>
+            <a:off x="11372187" y="4514646"/>
+            <a:ext cx="5553850" cy="2124371"/>
+          </a:xfrm>
+          <a:prstGeom prst="rect">
+            <a:avLst/>
+          </a:prstGeom>
+        </p:spPr>
+      </p:pic>
     </p:spTree>
+    <p:extLst>
+      <p:ext uri="{BB962C8B-B14F-4D97-AF65-F5344CB8AC3E}">
+        <p14:creationId xmlns:p14="http://schemas.microsoft.com/office/powerpoint/2010/main" val="2112821362"/>
+      </p:ext>
+    </p:extLst>
   </p:cSld>
   <p:clrMapOvr>
     <a:masterClrMapping/>
@@ -6477,7 +8312,391 @@
 </p:sld>
 </file>
 
-<file path=ppt/slides/slide4.xml><?xml version="1.0" encoding="utf-8"?>
+<file path=ppt/slides/slide5.xml><?xml version="1.0" encoding="utf-8"?>
+<p:sld xmlns:a="http://schemas.openxmlformats.org/drawingml/2006/main" xmlns:r="http://schemas.openxmlformats.org/officeDocument/2006/relationships" xmlns:p="http://schemas.openxmlformats.org/presentationml/2006/main">
+  <p:cSld>
+    <p:spTree>
+      <p:nvGrpSpPr>
+        <p:cNvPr id="1" name=""/>
+        <p:cNvGrpSpPr/>
+        <p:nvPr/>
+      </p:nvGrpSpPr>
+      <p:grpSpPr>
+        <a:xfrm>
+          <a:off x="0" y="0"/>
+          <a:ext cx="0" cy="0"/>
+          <a:chOff x="0" y="0"/>
+          <a:chExt cx="0" cy="0"/>
+        </a:xfrm>
+      </p:grpSpPr>
+      <p:sp>
+        <p:nvSpPr>
+          <p:cNvPr id="6" name="TextBox 6"/>
+          <p:cNvSpPr txBox="1"/>
+          <p:nvPr/>
+        </p:nvSpPr>
+        <p:spPr>
+          <a:xfrm>
+            <a:off x="206108" y="944123"/>
+            <a:ext cx="12062092" cy="776495"/>
+          </a:xfrm>
+          <a:prstGeom prst="rect">
+            <a:avLst/>
+          </a:prstGeom>
+        </p:spPr>
+        <p:txBody>
+          <a:bodyPr wrap="square" lIns="0" tIns="0" rIns="0" bIns="0" rtlCol="0" anchor="t">
+            <a:spAutoFit/>
+          </a:bodyPr>
+          <a:lstStyle/>
+          <a:p>
+            <a:pPr algn="r">
+              <a:lnSpc>
+                <a:spcPts val="6589"/>
+              </a:lnSpc>
+              <a:spcBef>
+                <a:spcPct val="0"/>
+              </a:spcBef>
+            </a:pPr>
+            <a:r>
+              <a:rPr lang="en-US" sz="4706" spc="-65" dirty="0">
+                <a:solidFill>
+                  <a:srgbClr val="191919"/>
+                </a:solidFill>
+                <a:latin typeface="윤고딕"/>
+                <a:ea typeface="윤고딕"/>
+                <a:cs typeface="윤고딕"/>
+                <a:sym typeface="윤고딕"/>
+              </a:rPr>
+              <a:t>How It went(with The Mythical Man-Month)</a:t>
+            </a:r>
+          </a:p>
+        </p:txBody>
+      </p:sp>
+      <p:sp>
+        <p:nvSpPr>
+          <p:cNvPr id="14" name="TextBox 8">
+            <a:extLst>
+              <a:ext uri="{FF2B5EF4-FFF2-40B4-BE49-F238E27FC236}">
+                <a16:creationId xmlns:a16="http://schemas.microsoft.com/office/drawing/2014/main" id="{6F94253F-F464-D49B-7A2A-50F5016555C5}"/>
+              </a:ext>
+            </a:extLst>
+          </p:cNvPr>
+          <p:cNvSpPr txBox="1"/>
+          <p:nvPr/>
+        </p:nvSpPr>
+        <p:spPr>
+          <a:xfrm>
+            <a:off x="990600" y="5143500"/>
+            <a:ext cx="6547634" cy="481670"/>
+          </a:xfrm>
+          <a:prstGeom prst="rect">
+            <a:avLst/>
+          </a:prstGeom>
+        </p:spPr>
+        <p:txBody>
+          <a:bodyPr wrap="square" lIns="0" tIns="0" rIns="0" bIns="0" rtlCol="0" anchor="t">
+            <a:spAutoFit/>
+          </a:bodyPr>
+          <a:lstStyle/>
+          <a:p>
+            <a:pPr algn="l">
+              <a:lnSpc>
+                <a:spcPts val="4059"/>
+              </a:lnSpc>
+              <a:spcBef>
+                <a:spcPct val="0"/>
+              </a:spcBef>
+            </a:pPr>
+            <a:r>
+              <a:rPr lang="en-US" sz="2899" dirty="0">
+                <a:solidFill>
+                  <a:srgbClr val="191919"/>
+                </a:solidFill>
+                <a:latin typeface="윤고딕"/>
+                <a:ea typeface="윤고딕"/>
+                <a:cs typeface="윤고딕"/>
+                <a:sym typeface="윤고딕"/>
+              </a:rPr>
+              <a:t>The Surgical Team</a:t>
+            </a:r>
+          </a:p>
+        </p:txBody>
+      </p:sp>
+      <p:sp>
+        <p:nvSpPr>
+          <p:cNvPr id="15" name="TextBox 8">
+            <a:extLst>
+              <a:ext uri="{FF2B5EF4-FFF2-40B4-BE49-F238E27FC236}">
+                <a16:creationId xmlns:a16="http://schemas.microsoft.com/office/drawing/2014/main" id="{8D081E82-84FE-7ACE-53FE-74CE11DAD537}"/>
+              </a:ext>
+            </a:extLst>
+          </p:cNvPr>
+          <p:cNvSpPr txBox="1"/>
+          <p:nvPr/>
+        </p:nvSpPr>
+        <p:spPr>
+          <a:xfrm>
+            <a:off x="10744323" y="4321629"/>
+            <a:ext cx="6547634" cy="481670"/>
+          </a:xfrm>
+          <a:prstGeom prst="rect">
+            <a:avLst/>
+          </a:prstGeom>
+        </p:spPr>
+        <p:txBody>
+          <a:bodyPr wrap="square" lIns="0" tIns="0" rIns="0" bIns="0" rtlCol="0" anchor="t">
+            <a:spAutoFit/>
+          </a:bodyPr>
+          <a:lstStyle/>
+          <a:p>
+            <a:pPr algn="l">
+              <a:lnSpc>
+                <a:spcPts val="4059"/>
+              </a:lnSpc>
+              <a:spcBef>
+                <a:spcPct val="0"/>
+              </a:spcBef>
+            </a:pPr>
+            <a:r>
+              <a:rPr lang="en-US" sz="2899" dirty="0">
+                <a:solidFill>
+                  <a:srgbClr val="191919"/>
+                </a:solidFill>
+                <a:latin typeface="윤고딕"/>
+                <a:ea typeface="윤고딕"/>
+                <a:cs typeface="윤고딕"/>
+                <a:sym typeface="윤고딕"/>
+              </a:rPr>
+              <a:t>Calling the Shot</a:t>
+            </a:r>
+          </a:p>
+        </p:txBody>
+      </p:sp>
+      <p:sp>
+        <p:nvSpPr>
+          <p:cNvPr id="16" name="TextBox 8">
+            <a:extLst>
+              <a:ext uri="{FF2B5EF4-FFF2-40B4-BE49-F238E27FC236}">
+                <a16:creationId xmlns:a16="http://schemas.microsoft.com/office/drawing/2014/main" id="{7245B168-93E8-0F42-C533-1C4182C18483}"/>
+              </a:ext>
+            </a:extLst>
+          </p:cNvPr>
+          <p:cNvSpPr txBox="1"/>
+          <p:nvPr/>
+        </p:nvSpPr>
+        <p:spPr>
+          <a:xfrm>
+            <a:off x="990600" y="6667500"/>
+            <a:ext cx="6547634" cy="481670"/>
+          </a:xfrm>
+          <a:prstGeom prst="rect">
+            <a:avLst/>
+          </a:prstGeom>
+        </p:spPr>
+        <p:txBody>
+          <a:bodyPr wrap="square" lIns="0" tIns="0" rIns="0" bIns="0" rtlCol="0" anchor="t">
+            <a:spAutoFit/>
+          </a:bodyPr>
+          <a:lstStyle/>
+          <a:p>
+            <a:pPr algn="l">
+              <a:lnSpc>
+                <a:spcPts val="4059"/>
+              </a:lnSpc>
+              <a:spcBef>
+                <a:spcPct val="0"/>
+              </a:spcBef>
+            </a:pPr>
+            <a:r>
+              <a:rPr lang="en-US" sz="2899" dirty="0">
+                <a:solidFill>
+                  <a:srgbClr val="191919"/>
+                </a:solidFill>
+                <a:latin typeface="윤고딕"/>
+                <a:ea typeface="윤고딕"/>
+                <a:cs typeface="윤고딕"/>
+                <a:sym typeface="윤고딕"/>
+              </a:rPr>
+              <a:t>Ten Pounds in a Five-Pound Sack</a:t>
+            </a:r>
+          </a:p>
+        </p:txBody>
+      </p:sp>
+      <p:sp>
+        <p:nvSpPr>
+          <p:cNvPr id="17" name="TextBox 8">
+            <a:extLst>
+              <a:ext uri="{FF2B5EF4-FFF2-40B4-BE49-F238E27FC236}">
+                <a16:creationId xmlns:a16="http://schemas.microsoft.com/office/drawing/2014/main" id="{9AE3FE7C-AA32-5CDF-CD7E-8B49424EB2D4}"/>
+              </a:ext>
+            </a:extLst>
+          </p:cNvPr>
+          <p:cNvSpPr txBox="1"/>
+          <p:nvPr/>
+        </p:nvSpPr>
+        <p:spPr>
+          <a:xfrm>
+            <a:off x="10727994" y="5829300"/>
+            <a:ext cx="6547634" cy="481670"/>
+          </a:xfrm>
+          <a:prstGeom prst="rect">
+            <a:avLst/>
+          </a:prstGeom>
+        </p:spPr>
+        <p:txBody>
+          <a:bodyPr wrap="square" lIns="0" tIns="0" rIns="0" bIns="0" rtlCol="0" anchor="t">
+            <a:spAutoFit/>
+          </a:bodyPr>
+          <a:lstStyle/>
+          <a:p>
+            <a:pPr algn="l">
+              <a:lnSpc>
+                <a:spcPts val="4059"/>
+              </a:lnSpc>
+              <a:spcBef>
+                <a:spcPct val="0"/>
+              </a:spcBef>
+            </a:pPr>
+            <a:r>
+              <a:rPr lang="en-US" sz="2899" dirty="0">
+                <a:solidFill>
+                  <a:srgbClr val="191919"/>
+                </a:solidFill>
+                <a:latin typeface="윤고딕"/>
+                <a:ea typeface="윤고딕"/>
+                <a:cs typeface="윤고딕"/>
+                <a:sym typeface="윤고딕"/>
+              </a:rPr>
+              <a:t>Why Did the Tower of Babel Fail?</a:t>
+            </a:r>
+          </a:p>
+        </p:txBody>
+      </p:sp>
+      <p:sp>
+        <p:nvSpPr>
+          <p:cNvPr id="4" name="TextBox 8">
+            <a:extLst>
+              <a:ext uri="{FF2B5EF4-FFF2-40B4-BE49-F238E27FC236}">
+                <a16:creationId xmlns:a16="http://schemas.microsoft.com/office/drawing/2014/main" id="{D4813D73-36CE-A3BE-28D9-6FBD95ED6EC8}"/>
+              </a:ext>
+            </a:extLst>
+          </p:cNvPr>
+          <p:cNvSpPr txBox="1"/>
+          <p:nvPr/>
+        </p:nvSpPr>
+        <p:spPr>
+          <a:xfrm>
+            <a:off x="10706223" y="7429500"/>
+            <a:ext cx="6547634" cy="481670"/>
+          </a:xfrm>
+          <a:prstGeom prst="rect">
+            <a:avLst/>
+          </a:prstGeom>
+        </p:spPr>
+        <p:txBody>
+          <a:bodyPr wrap="square" lIns="0" tIns="0" rIns="0" bIns="0" rtlCol="0" anchor="t">
+            <a:spAutoFit/>
+          </a:bodyPr>
+          <a:lstStyle/>
+          <a:p>
+            <a:pPr algn="l">
+              <a:lnSpc>
+                <a:spcPts val="4059"/>
+              </a:lnSpc>
+              <a:spcBef>
+                <a:spcPct val="0"/>
+              </a:spcBef>
+            </a:pPr>
+            <a:r>
+              <a:rPr lang="en-US" sz="2899" dirty="0">
+                <a:solidFill>
+                  <a:srgbClr val="191919"/>
+                </a:solidFill>
+                <a:latin typeface="윤고딕"/>
+                <a:ea typeface="윤고딕"/>
+                <a:cs typeface="윤고딕"/>
+                <a:sym typeface="윤고딕"/>
+              </a:rPr>
+              <a:t>The Documentary Hypothesis</a:t>
+            </a:r>
+          </a:p>
+        </p:txBody>
+      </p:sp>
+      <p:pic>
+        <p:nvPicPr>
+          <p:cNvPr id="7" name="그림 6">
+            <a:extLst>
+              <a:ext uri="{FF2B5EF4-FFF2-40B4-BE49-F238E27FC236}">
+                <a16:creationId xmlns:a16="http://schemas.microsoft.com/office/drawing/2014/main" id="{9DD5EC9F-C044-6A32-3D98-6002CDDB0C06}"/>
+              </a:ext>
+            </a:extLst>
+          </p:cNvPr>
+          <p:cNvPicPr>
+            <a:picLocks noChangeAspect="1"/>
+          </p:cNvPicPr>
+          <p:nvPr/>
+        </p:nvPicPr>
+        <p:blipFill>
+          <a:blip r:embed="rId2"/>
+          <a:stretch>
+            <a:fillRect/>
+          </a:stretch>
+        </p:blipFill>
+        <p:spPr>
+          <a:xfrm>
+            <a:off x="990600" y="2577939"/>
+            <a:ext cx="1219370" cy="1305107"/>
+          </a:xfrm>
+          <a:prstGeom prst="rect">
+            <a:avLst/>
+          </a:prstGeom>
+        </p:spPr>
+      </p:pic>
+      <p:pic>
+        <p:nvPicPr>
+          <p:cNvPr id="13" name="그림 12">
+            <a:extLst>
+              <a:ext uri="{FF2B5EF4-FFF2-40B4-BE49-F238E27FC236}">
+                <a16:creationId xmlns:a16="http://schemas.microsoft.com/office/drawing/2014/main" id="{B29C01DC-42C8-0C24-5D2F-F0C929762F53}"/>
+              </a:ext>
+            </a:extLst>
+          </p:cNvPr>
+          <p:cNvPicPr>
+            <a:picLocks noChangeAspect="1"/>
+          </p:cNvPicPr>
+          <p:nvPr/>
+        </p:nvPicPr>
+        <p:blipFill>
+          <a:blip r:embed="rId3"/>
+          <a:stretch>
+            <a:fillRect/>
+          </a:stretch>
+        </p:blipFill>
+        <p:spPr>
+          <a:xfrm>
+            <a:off x="10706223" y="2596992"/>
+            <a:ext cx="1247949" cy="1286054"/>
+          </a:xfrm>
+          <a:prstGeom prst="rect">
+            <a:avLst/>
+          </a:prstGeom>
+        </p:spPr>
+      </p:pic>
+    </p:spTree>
+    <p:extLst>
+      <p:ext uri="{BB962C8B-B14F-4D97-AF65-F5344CB8AC3E}">
+        <p14:creationId xmlns:p14="http://schemas.microsoft.com/office/powerpoint/2010/main" val="3447679154"/>
+      </p:ext>
+    </p:extLst>
+  </p:cSld>
+  <p:clrMapOvr>
+    <a:masterClrMapping/>
+  </p:clrMapOvr>
+</p:sld>
+</file>
+
+<file path=ppt/slides/slide6.xml><?xml version="1.0" encoding="utf-8"?>
 <p:sld xmlns:a="http://schemas.openxmlformats.org/drawingml/2006/main" xmlns:r="http://schemas.openxmlformats.org/officeDocument/2006/relationships" xmlns:p="http://schemas.openxmlformats.org/presentationml/2006/main">
   <p:cSld>
     <p:spTree>
@@ -7836,7 +10055,7 @@
 </p:sld>
 </file>
 
-<file path=ppt/slides/slide5.xml><?xml version="1.0" encoding="utf-8"?>
+<file path=ppt/slides/slide7.xml><?xml version="1.0" encoding="utf-8"?>
 <p:sld xmlns:a="http://schemas.openxmlformats.org/drawingml/2006/main" xmlns:r="http://schemas.openxmlformats.org/officeDocument/2006/relationships" xmlns:p="http://schemas.openxmlformats.org/presentationml/2006/main">
   <p:cSld>
     <p:spTree>
@@ -9593,7 +11812,7 @@
 </p:sld>
 </file>
 
-<file path=ppt/slides/slide6.xml><?xml version="1.0" encoding="utf-8"?>
+<file path=ppt/slides/slide8.xml><?xml version="1.0" encoding="utf-8"?>
 <p:sld xmlns:a="http://schemas.openxmlformats.org/drawingml/2006/main" xmlns:r="http://schemas.openxmlformats.org/officeDocument/2006/relationships" xmlns:p="http://schemas.openxmlformats.org/presentationml/2006/main">
   <p:cSld>
     <p:spTree>
@@ -10096,405 +12315,6 @@
 </p:sld>
 </file>
 
-<file path=ppt/slides/slide7.xml><?xml version="1.0" encoding="utf-8"?>
-<p:sld xmlns:a="http://schemas.openxmlformats.org/drawingml/2006/main" xmlns:r="http://schemas.openxmlformats.org/officeDocument/2006/relationships" xmlns:p="http://schemas.openxmlformats.org/presentationml/2006/main">
-  <p:cSld>
-    <p:spTree>
-      <p:nvGrpSpPr>
-        <p:cNvPr id="1" name=""/>
-        <p:cNvGrpSpPr/>
-        <p:nvPr/>
-      </p:nvGrpSpPr>
-      <p:grpSpPr>
-        <a:xfrm>
-          <a:off x="0" y="0"/>
-          <a:ext cx="0" cy="0"/>
-          <a:chOff x="0" y="0"/>
-          <a:chExt cx="0" cy="0"/>
-        </a:xfrm>
-      </p:grpSpPr>
-      <p:sp>
-        <p:nvSpPr>
-          <p:cNvPr id="2" name="Title 1">
-            <a:extLst>
-              <a:ext uri="{FF2B5EF4-FFF2-40B4-BE49-F238E27FC236}">
-                <a16:creationId xmlns:a16="http://schemas.microsoft.com/office/drawing/2014/main" id="{3FE9D3BF-D6DD-386D-201C-20F1F64D24E1}"/>
-              </a:ext>
-            </a:extLst>
-          </p:cNvPr>
-          <p:cNvSpPr>
-            <a:spLocks noGrp="1"/>
-          </p:cNvSpPr>
-          <p:nvPr>
-            <p:ph type="title"/>
-          </p:nvPr>
-        </p:nvSpPr>
-        <p:spPr/>
-        <p:txBody>
-          <a:bodyPr/>
-          <a:lstStyle/>
-          <a:p>
-            <a:r>
-              <a:rPr lang="en-KR" dirty="0"/>
-              <a:t>Current </a:t>
-            </a:r>
-            <a:r>
-              <a:rPr lang="en-US" dirty="0"/>
-              <a:t>Progress</a:t>
-            </a:r>
-            <a:endParaRPr lang="en-KR" dirty="0"/>
-          </a:p>
-        </p:txBody>
-      </p:sp>
-      <p:sp>
-        <p:nvSpPr>
-          <p:cNvPr id="3" name="Content Placeholder 2">
-            <a:extLst>
-              <a:ext uri="{FF2B5EF4-FFF2-40B4-BE49-F238E27FC236}">
-                <a16:creationId xmlns:a16="http://schemas.microsoft.com/office/drawing/2014/main" id="{02B47AC7-2B64-344E-177B-270FEEDC4F59}"/>
-              </a:ext>
-            </a:extLst>
-          </p:cNvPr>
-          <p:cNvSpPr>
-            <a:spLocks noGrp="1"/>
-          </p:cNvSpPr>
-          <p:nvPr>
-            <p:ph idx="1"/>
-          </p:nvPr>
-        </p:nvSpPr>
-        <p:spPr/>
-        <p:txBody>
-          <a:bodyPr/>
-          <a:lstStyle/>
-          <a:p>
-            <a:r>
-              <a:rPr lang="en-KR" dirty="0"/>
-              <a:t>ZIO gRPC communication</a:t>
-            </a:r>
-          </a:p>
-        </p:txBody>
-      </p:sp>
-      <p:pic>
-        <p:nvPicPr>
-          <p:cNvPr id="4" name="Picture 3">
-            <a:extLst>
-              <a:ext uri="{FF2B5EF4-FFF2-40B4-BE49-F238E27FC236}">
-                <a16:creationId xmlns:a16="http://schemas.microsoft.com/office/drawing/2014/main" id="{1C1DC192-1606-1289-A8DE-6EF3D3FCC0E3}"/>
-              </a:ext>
-            </a:extLst>
-          </p:cNvPr>
-          <p:cNvPicPr>
-            <a:picLocks noChangeAspect="1"/>
-          </p:cNvPicPr>
-          <p:nvPr/>
-        </p:nvPicPr>
-        <p:blipFill>
-          <a:blip r:embed="rId2"/>
-          <a:stretch>
-            <a:fillRect/>
-          </a:stretch>
-        </p:blipFill>
-        <p:spPr>
-          <a:xfrm>
-            <a:off x="4381500" y="3473349"/>
-            <a:ext cx="9525000" cy="2528592"/>
-          </a:xfrm>
-          <a:prstGeom prst="rect">
-            <a:avLst/>
-          </a:prstGeom>
-        </p:spPr>
-      </p:pic>
-      <p:pic>
-        <p:nvPicPr>
-          <p:cNvPr id="5" name="Picture 4">
-            <a:extLst>
-              <a:ext uri="{FF2B5EF4-FFF2-40B4-BE49-F238E27FC236}">
-                <a16:creationId xmlns:a16="http://schemas.microsoft.com/office/drawing/2014/main" id="{C7D068AF-411C-0B4A-0C0D-5978B3FE5857}"/>
-              </a:ext>
-            </a:extLst>
-          </p:cNvPr>
-          <p:cNvPicPr>
-            <a:picLocks noChangeAspect="1"/>
-          </p:cNvPicPr>
-          <p:nvPr/>
-        </p:nvPicPr>
-        <p:blipFill>
-          <a:blip r:embed="rId3"/>
-          <a:stretch>
-            <a:fillRect/>
-          </a:stretch>
-        </p:blipFill>
-        <p:spPr>
-          <a:xfrm>
-            <a:off x="4381500" y="6180452"/>
-            <a:ext cx="9525000" cy="2483931"/>
-          </a:xfrm>
-          <a:prstGeom prst="rect">
-            <a:avLst/>
-          </a:prstGeom>
-        </p:spPr>
-      </p:pic>
-    </p:spTree>
-    <p:extLst>
-      <p:ext uri="{BB962C8B-B14F-4D97-AF65-F5344CB8AC3E}">
-        <p14:creationId xmlns:p14="http://schemas.microsoft.com/office/powerpoint/2010/main" val="4266501358"/>
-      </p:ext>
-    </p:extLst>
-  </p:cSld>
-  <p:clrMapOvr>
-    <a:masterClrMapping/>
-  </p:clrMapOvr>
-</p:sld>
-</file>
-
-<file path=ppt/slides/slide8.xml><?xml version="1.0" encoding="utf-8"?>
-<p:sld xmlns:a="http://schemas.openxmlformats.org/drawingml/2006/main" xmlns:r="http://schemas.openxmlformats.org/officeDocument/2006/relationships" xmlns:p="http://schemas.openxmlformats.org/presentationml/2006/main">
-  <p:cSld>
-    <p:spTree>
-      <p:nvGrpSpPr>
-        <p:cNvPr id="1" name="">
-          <a:extLst>
-            <a:ext uri="{FF2B5EF4-FFF2-40B4-BE49-F238E27FC236}">
-              <a16:creationId xmlns:a16="http://schemas.microsoft.com/office/drawing/2014/main" id="{4FC890A9-16A9-4DAB-A330-65BA6E36BE4A}"/>
-            </a:ext>
-          </a:extLst>
-        </p:cNvPr>
-        <p:cNvGrpSpPr/>
-        <p:nvPr/>
-      </p:nvGrpSpPr>
-      <p:grpSpPr>
-        <a:xfrm>
-          <a:off x="0" y="0"/>
-          <a:ext cx="0" cy="0"/>
-          <a:chOff x="0" y="0"/>
-          <a:chExt cx="0" cy="0"/>
-        </a:xfrm>
-      </p:grpSpPr>
-      <p:sp>
-        <p:nvSpPr>
-          <p:cNvPr id="2" name="Title 1">
-            <a:extLst>
-              <a:ext uri="{FF2B5EF4-FFF2-40B4-BE49-F238E27FC236}">
-                <a16:creationId xmlns:a16="http://schemas.microsoft.com/office/drawing/2014/main" id="{D457A58C-9E62-EAA8-A90E-F602DD59F1D4}"/>
-              </a:ext>
-            </a:extLst>
-          </p:cNvPr>
-          <p:cNvSpPr>
-            <a:spLocks noGrp="1"/>
-          </p:cNvSpPr>
-          <p:nvPr>
-            <p:ph type="title"/>
-          </p:nvPr>
-        </p:nvSpPr>
-        <p:spPr/>
-        <p:txBody>
-          <a:bodyPr/>
-          <a:lstStyle/>
-          <a:p>
-            <a:r>
-              <a:rPr lang="en-KR" dirty="0"/>
-              <a:t>Master Plan</a:t>
-            </a:r>
-          </a:p>
-        </p:txBody>
-      </p:sp>
-      <p:sp>
-        <p:nvSpPr>
-          <p:cNvPr id="6" name="TextBox 5">
-            <a:extLst>
-              <a:ext uri="{FF2B5EF4-FFF2-40B4-BE49-F238E27FC236}">
-                <a16:creationId xmlns:a16="http://schemas.microsoft.com/office/drawing/2014/main" id="{8A833590-9F32-19CD-C3D4-C2CC91B6CEC1}"/>
-              </a:ext>
-            </a:extLst>
-          </p:cNvPr>
-          <p:cNvSpPr txBox="1"/>
-          <p:nvPr/>
-        </p:nvSpPr>
-        <p:spPr>
-          <a:xfrm>
-            <a:off x="1046023" y="2695617"/>
-            <a:ext cx="7653121" cy="923330"/>
-          </a:xfrm>
-          <a:prstGeom prst="rect">
-            <a:avLst/>
-          </a:prstGeom>
-          <a:noFill/>
-        </p:spPr>
-        <p:txBody>
-          <a:bodyPr wrap="none" rtlCol="0">
-            <a:spAutoFit/>
-          </a:bodyPr>
-          <a:lstStyle/>
-          <a:p>
-            <a:pPr marL="428625" indent="-428625">
-              <a:buFontTx/>
-              <a:buChar char="-"/>
-            </a:pPr>
-            <a:r>
-              <a:rPr lang="en-US" sz="2700" b="1" dirty="0">
-                <a:solidFill>
-                  <a:srgbClr val="FF0000"/>
-                </a:solidFill>
-              </a:rPr>
-              <a:t>Implement some message structures in proto file</a:t>
-            </a:r>
-          </a:p>
-          <a:p>
-            <a:pPr marL="428625" indent="-428625">
-              <a:buFontTx/>
-              <a:buChar char="-"/>
-            </a:pPr>
-            <a:r>
-              <a:rPr lang="en-US" sz="2700" b="1" dirty="0">
-                <a:solidFill>
-                  <a:srgbClr val="FF0000"/>
-                </a:solidFill>
-              </a:rPr>
-              <a:t>Implement error handling logic</a:t>
-            </a:r>
-            <a:endParaRPr lang="en-KR" sz="2700" b="1" dirty="0">
-              <a:solidFill>
-                <a:srgbClr val="FF0000"/>
-              </a:solidFill>
-            </a:endParaRPr>
-          </a:p>
-        </p:txBody>
-      </p:sp>
-      <p:pic>
-        <p:nvPicPr>
-          <p:cNvPr id="12" name="Picture 11" descr="A diagram of a computer program&#10;&#10;AI-generated content may be incorrect.">
-            <a:extLst>
-              <a:ext uri="{FF2B5EF4-FFF2-40B4-BE49-F238E27FC236}">
-                <a16:creationId xmlns:a16="http://schemas.microsoft.com/office/drawing/2014/main" id="{9B1ECC24-A3A0-8DFD-CEC8-97527AC06AD3}"/>
-              </a:ext>
-            </a:extLst>
-          </p:cNvPr>
-          <p:cNvPicPr>
-            <a:picLocks noChangeAspect="1"/>
-          </p:cNvPicPr>
-          <p:nvPr/>
-        </p:nvPicPr>
-        <p:blipFill>
-          <a:blip r:embed="rId2"/>
-          <a:stretch>
-            <a:fillRect/>
-          </a:stretch>
-        </p:blipFill>
-        <p:spPr>
-          <a:xfrm>
-            <a:off x="1046022" y="3665114"/>
-            <a:ext cx="8097978" cy="4031088"/>
-          </a:xfrm>
-          <a:prstGeom prst="rect">
-            <a:avLst/>
-          </a:prstGeom>
-        </p:spPr>
-      </p:pic>
-      <p:pic>
-        <p:nvPicPr>
-          <p:cNvPr id="14" name="Picture 13" descr="A diagram of a workflow&#10;&#10;AI-generated content may be incorrect.">
-            <a:extLst>
-              <a:ext uri="{FF2B5EF4-FFF2-40B4-BE49-F238E27FC236}">
-                <a16:creationId xmlns:a16="http://schemas.microsoft.com/office/drawing/2014/main" id="{E0AF1C67-3A71-A520-CD32-2880AB9112D3}"/>
-              </a:ext>
-            </a:extLst>
-          </p:cNvPr>
-          <p:cNvPicPr>
-            <a:picLocks noChangeAspect="1"/>
-          </p:cNvPicPr>
-          <p:nvPr/>
-        </p:nvPicPr>
-        <p:blipFill>
-          <a:blip r:embed="rId3"/>
-          <a:stretch>
-            <a:fillRect/>
-          </a:stretch>
-        </p:blipFill>
-        <p:spPr>
-          <a:xfrm>
-            <a:off x="10020301" y="3673846"/>
-            <a:ext cx="6845300" cy="3629417"/>
-          </a:xfrm>
-          <a:prstGeom prst="rect">
-            <a:avLst/>
-          </a:prstGeom>
-        </p:spPr>
-      </p:pic>
-      <p:sp>
-        <p:nvSpPr>
-          <p:cNvPr id="15" name="TextBox 14">
-            <a:extLst>
-              <a:ext uri="{FF2B5EF4-FFF2-40B4-BE49-F238E27FC236}">
-                <a16:creationId xmlns:a16="http://schemas.microsoft.com/office/drawing/2014/main" id="{BD9BC214-6920-1C12-583B-21EBEED1D4B1}"/>
-              </a:ext>
-            </a:extLst>
-          </p:cNvPr>
-          <p:cNvSpPr txBox="1"/>
-          <p:nvPr/>
-        </p:nvSpPr>
-        <p:spPr>
-          <a:xfrm>
-            <a:off x="9732823" y="2695617"/>
-            <a:ext cx="7653121" cy="923330"/>
-          </a:xfrm>
-          <a:prstGeom prst="rect">
-            <a:avLst/>
-          </a:prstGeom>
-          <a:noFill/>
-        </p:spPr>
-        <p:txBody>
-          <a:bodyPr wrap="none" rtlCol="0">
-            <a:spAutoFit/>
-          </a:bodyPr>
-          <a:lstStyle/>
-          <a:p>
-            <a:pPr marL="428625" indent="-428625">
-              <a:buFontTx/>
-              <a:buChar char="-"/>
-            </a:pPr>
-            <a:r>
-              <a:rPr lang="en-US" sz="2700" b="1" dirty="0">
-                <a:solidFill>
-                  <a:srgbClr val="FF0000"/>
-                </a:solidFill>
-              </a:rPr>
-              <a:t>Implement some message structures in proto file</a:t>
-            </a:r>
-          </a:p>
-          <a:p>
-            <a:pPr marL="428625" indent="-428625">
-              <a:buFontTx/>
-              <a:buChar char="-"/>
-            </a:pPr>
-            <a:r>
-              <a:rPr lang="en-US" sz="2700" b="1" dirty="0">
-                <a:solidFill>
-                  <a:srgbClr val="FF0000"/>
-                </a:solidFill>
-              </a:rPr>
-              <a:t>Implement sampling logic</a:t>
-            </a:r>
-            <a:endParaRPr lang="en-KR" sz="2700" b="1" dirty="0">
-              <a:solidFill>
-                <a:srgbClr val="FF0000"/>
-              </a:solidFill>
-            </a:endParaRPr>
-          </a:p>
-        </p:txBody>
-      </p:sp>
-    </p:spTree>
-    <p:extLst>
-      <p:ext uri="{BB962C8B-B14F-4D97-AF65-F5344CB8AC3E}">
-        <p14:creationId xmlns:p14="http://schemas.microsoft.com/office/powerpoint/2010/main" val="3065963681"/>
-      </p:ext>
-    </p:extLst>
-  </p:cSld>
-  <p:clrMapOvr>
-    <a:masterClrMapping/>
-  </p:clrMapOvr>
-</p:sld>
-</file>
-
 <file path=ppt/slides/slide9.xml><?xml version="1.0" encoding="utf-8"?>
 <p:sld xmlns:a="http://schemas.openxmlformats.org/drawingml/2006/main" xmlns:r="http://schemas.openxmlformats.org/officeDocument/2006/relationships" xmlns:p="http://schemas.openxmlformats.org/presentationml/2006/main">
   <p:cSld>
@@ -10514,1696 +12334,129 @@
       </p:grpSpPr>
       <p:sp>
         <p:nvSpPr>
-          <p:cNvPr id="28" name="사각형: 둥근 모서리 27">
-            <a:extLst>
-              <a:ext uri="{FF2B5EF4-FFF2-40B4-BE49-F238E27FC236}">
-                <a16:creationId xmlns:a16="http://schemas.microsoft.com/office/drawing/2014/main" id="{EF56AD0E-7B14-F1B7-DAA2-34A034E509CC}"/>
-              </a:ext>
-            </a:extLst>
-          </p:cNvPr>
-          <p:cNvSpPr/>
-          <p:nvPr/>
-        </p:nvSpPr>
-        <p:spPr>
-          <a:xfrm>
-            <a:off x="6202687" y="1606132"/>
-            <a:ext cx="4239312" cy="3036470"/>
-          </a:xfrm>
-          <a:prstGeom prst="roundRect">
-            <a:avLst>
-              <a:gd name="adj" fmla="val 13083"/>
-            </a:avLst>
-          </a:prstGeom>
-          <a:noFill/>
-        </p:spPr>
-        <p:style>
-          <a:lnRef idx="2">
-            <a:schemeClr val="accent1">
-              <a:shade val="15000"/>
-            </a:schemeClr>
-          </a:lnRef>
-          <a:fillRef idx="1">
-            <a:schemeClr val="accent1"/>
-          </a:fillRef>
-          <a:effectRef idx="0">
-            <a:schemeClr val="accent1"/>
-          </a:effectRef>
-          <a:fontRef idx="minor">
-            <a:schemeClr val="lt1"/>
-          </a:fontRef>
-        </p:style>
-        <p:txBody>
-          <a:bodyPr rtlCol="0" anchor="ctr"/>
-          <a:lstStyle/>
-          <a:p>
-            <a:pPr algn="ctr"/>
-            <a:endParaRPr lang="ko-KR" altLang="en-US" sz="2700" dirty="0"/>
-          </a:p>
-        </p:txBody>
-      </p:sp>
-      <p:sp>
-        <p:nvSpPr>
-          <p:cNvPr id="9" name="사각형: 둥근 모서리 8">
-            <a:extLst>
-              <a:ext uri="{FF2B5EF4-FFF2-40B4-BE49-F238E27FC236}">
-                <a16:creationId xmlns:a16="http://schemas.microsoft.com/office/drawing/2014/main" id="{AEB63CFC-CAA2-9E98-9495-52E356BC0F25}"/>
-              </a:ext>
-            </a:extLst>
-          </p:cNvPr>
-          <p:cNvSpPr/>
-          <p:nvPr/>
-        </p:nvSpPr>
-        <p:spPr>
-          <a:xfrm>
-            <a:off x="11504856" y="1352119"/>
-            <a:ext cx="4560936" cy="6823757"/>
-          </a:xfrm>
-          <a:prstGeom prst="roundRect">
-            <a:avLst>
-              <a:gd name="adj" fmla="val 8906"/>
-            </a:avLst>
-          </a:prstGeom>
-          <a:solidFill>
-            <a:schemeClr val="bg1">
-              <a:lumMod val="75000"/>
-            </a:schemeClr>
-          </a:solidFill>
-          <a:ln>
-            <a:noFill/>
-          </a:ln>
-        </p:spPr>
-        <p:style>
-          <a:lnRef idx="2">
-            <a:schemeClr val="accent1">
-              <a:shade val="15000"/>
-            </a:schemeClr>
-          </a:lnRef>
-          <a:fillRef idx="1">
-            <a:schemeClr val="accent1"/>
-          </a:fillRef>
-          <a:effectRef idx="0">
-            <a:schemeClr val="accent1"/>
-          </a:effectRef>
-          <a:fontRef idx="minor">
-            <a:schemeClr val="lt1"/>
-          </a:fontRef>
-        </p:style>
-        <p:txBody>
-          <a:bodyPr rtlCol="0" anchor="ctr"/>
-          <a:lstStyle/>
-          <a:p>
-            <a:pPr algn="ctr"/>
-            <a:endParaRPr lang="ko-KR" altLang="en-US" sz="2700"/>
-          </a:p>
-        </p:txBody>
-      </p:sp>
-      <p:sp>
-        <p:nvSpPr>
-          <p:cNvPr id="5" name="사각형: 둥근 모서리 4">
-            <a:extLst>
-              <a:ext uri="{FF2B5EF4-FFF2-40B4-BE49-F238E27FC236}">
-                <a16:creationId xmlns:a16="http://schemas.microsoft.com/office/drawing/2014/main" id="{BEBAE5D3-1CAC-029C-D557-9AFF299C803B}"/>
-              </a:ext>
-            </a:extLst>
-          </p:cNvPr>
-          <p:cNvSpPr/>
-          <p:nvPr/>
-        </p:nvSpPr>
-        <p:spPr>
-          <a:xfrm>
-            <a:off x="5176683" y="952500"/>
-            <a:ext cx="11739717" cy="7625268"/>
-          </a:xfrm>
-          <a:prstGeom prst="roundRect">
-            <a:avLst>
-              <a:gd name="adj" fmla="val 13083"/>
-            </a:avLst>
-          </a:prstGeom>
-          <a:noFill/>
-        </p:spPr>
-        <p:style>
-          <a:lnRef idx="2">
-            <a:schemeClr val="accent1">
-              <a:shade val="15000"/>
-            </a:schemeClr>
-          </a:lnRef>
-          <a:fillRef idx="1">
-            <a:schemeClr val="accent1"/>
-          </a:fillRef>
-          <a:effectRef idx="0">
-            <a:schemeClr val="accent1"/>
-          </a:effectRef>
-          <a:fontRef idx="minor">
-            <a:schemeClr val="lt1"/>
-          </a:fontRef>
-        </p:style>
-        <p:txBody>
-          <a:bodyPr rtlCol="0" anchor="ctr"/>
-          <a:lstStyle/>
-          <a:p>
-            <a:pPr algn="ctr"/>
-            <a:endParaRPr lang="ko-KR" altLang="en-US" sz="2700"/>
-          </a:p>
-        </p:txBody>
-      </p:sp>
-      <p:sp>
-        <p:nvSpPr>
-          <p:cNvPr id="4" name="TextBox 3">
-            <a:extLst>
-              <a:ext uri="{FF2B5EF4-FFF2-40B4-BE49-F238E27FC236}">
-                <a16:creationId xmlns:a16="http://schemas.microsoft.com/office/drawing/2014/main" id="{71C17467-D8B1-5AEB-954A-CDAFFEFAB05D}"/>
-              </a:ext>
-            </a:extLst>
-          </p:cNvPr>
-          <p:cNvSpPr txBox="1"/>
-          <p:nvPr/>
-        </p:nvSpPr>
-        <p:spPr>
-          <a:xfrm>
-            <a:off x="9735944" y="609451"/>
-            <a:ext cx="2551473" cy="738664"/>
-          </a:xfrm>
-          <a:prstGeom prst="rect">
-            <a:avLst/>
-          </a:prstGeom>
-          <a:solidFill>
-            <a:schemeClr val="bg1"/>
-          </a:solidFill>
-        </p:spPr>
-        <p:txBody>
-          <a:bodyPr wrap="square" rtlCol="0">
-            <a:spAutoFit/>
-          </a:bodyPr>
-          <a:lstStyle/>
-          <a:p>
-            <a:pPr algn="ctr"/>
-            <a:r>
-              <a:rPr lang="en-US" altLang="ko-KR" sz="4200" dirty="0">
-                <a:latin typeface="Aptos Display" panose="020B0004020202020204" pitchFamily="34" charset="0"/>
-              </a:rPr>
-              <a:t>Worker 1</a:t>
-            </a:r>
-            <a:endParaRPr lang="ko-KR" altLang="en-US" sz="2700" dirty="0">
-              <a:latin typeface="Aptos Display" panose="020B0004020202020204" pitchFamily="34" charset="0"/>
-            </a:endParaRPr>
-          </a:p>
-        </p:txBody>
-      </p:sp>
-      <p:sp>
-        <p:nvSpPr>
-          <p:cNvPr id="7" name="직사각형 6">
-            <a:extLst>
-              <a:ext uri="{FF2B5EF4-FFF2-40B4-BE49-F238E27FC236}">
-                <a16:creationId xmlns:a16="http://schemas.microsoft.com/office/drawing/2014/main" id="{BADAED13-15D1-90A6-1540-9AA81355447C}"/>
-              </a:ext>
-            </a:extLst>
-          </p:cNvPr>
-          <p:cNvSpPr/>
-          <p:nvPr/>
-        </p:nvSpPr>
-        <p:spPr>
-          <a:xfrm>
-            <a:off x="11867115" y="2160235"/>
-            <a:ext cx="3836423" cy="1479041"/>
-          </a:xfrm>
-          <a:prstGeom prst="rect">
-            <a:avLst/>
-          </a:prstGeom>
-          <a:solidFill>
-            <a:schemeClr val="bg1">
-              <a:lumMod val="50000"/>
-            </a:schemeClr>
-          </a:solidFill>
-          <a:ln>
-            <a:noFill/>
-          </a:ln>
-        </p:spPr>
-        <p:style>
-          <a:lnRef idx="2">
-            <a:schemeClr val="accent1">
-              <a:shade val="15000"/>
-            </a:schemeClr>
-          </a:lnRef>
-          <a:fillRef idx="1">
-            <a:schemeClr val="accent1"/>
-          </a:fillRef>
-          <a:effectRef idx="0">
-            <a:schemeClr val="accent1"/>
-          </a:effectRef>
-          <a:fontRef idx="minor">
-            <a:schemeClr val="lt1"/>
-          </a:fontRef>
-        </p:style>
-        <p:txBody>
-          <a:bodyPr rtlCol="0" anchor="ctr"/>
-          <a:lstStyle/>
-          <a:p>
-            <a:pPr algn="ctr"/>
-            <a:r>
-              <a:rPr lang="en-US" altLang="ko-KR" sz="2700" dirty="0">
-                <a:latin typeface="Aptos Display" panose="020B0004020202020204" pitchFamily="34" charset="0"/>
-              </a:rPr>
-              <a:t>Input data</a:t>
-            </a:r>
-            <a:endParaRPr lang="ko-KR" altLang="en-US" sz="2700" dirty="0">
-              <a:latin typeface="Aptos Display" panose="020B0004020202020204" pitchFamily="34" charset="0"/>
-            </a:endParaRPr>
-          </a:p>
-        </p:txBody>
-      </p:sp>
-      <p:sp>
-        <p:nvSpPr>
-          <p:cNvPr id="8" name="TextBox 7">
-            <a:extLst>
-              <a:ext uri="{FF2B5EF4-FFF2-40B4-BE49-F238E27FC236}">
-                <a16:creationId xmlns:a16="http://schemas.microsoft.com/office/drawing/2014/main" id="{7D4CC956-1733-C218-2846-E5764CC01711}"/>
-              </a:ext>
-            </a:extLst>
-          </p:cNvPr>
-          <p:cNvSpPr txBox="1"/>
-          <p:nvPr/>
-        </p:nvSpPr>
-        <p:spPr>
-          <a:xfrm>
-            <a:off x="13330635" y="1456829"/>
-            <a:ext cx="814647" cy="553998"/>
-          </a:xfrm>
-          <a:prstGeom prst="rect">
-            <a:avLst/>
-          </a:prstGeom>
-          <a:noFill/>
-        </p:spPr>
-        <p:txBody>
-          <a:bodyPr wrap="none" rtlCol="0">
-            <a:spAutoFit/>
-          </a:bodyPr>
-          <a:lstStyle/>
-          <a:p>
-            <a:r>
-              <a:rPr lang="en-US" altLang="ko-KR" sz="3000" dirty="0">
-                <a:solidFill>
-                  <a:schemeClr val="bg1"/>
-                </a:solidFill>
-                <a:latin typeface="Aptos Display" panose="020B0004020202020204" pitchFamily="34" charset="0"/>
-              </a:rPr>
-              <a:t>disk</a:t>
-            </a:r>
-            <a:endParaRPr lang="ko-KR" altLang="en-US" sz="3000" dirty="0">
-              <a:solidFill>
-                <a:schemeClr val="bg1"/>
-              </a:solidFill>
-              <a:latin typeface="Aptos Display" panose="020B0004020202020204" pitchFamily="34" charset="0"/>
-            </a:endParaRPr>
-          </a:p>
-        </p:txBody>
-      </p:sp>
-      <p:sp>
-        <p:nvSpPr>
-          <p:cNvPr id="10" name="직사각형 9">
-            <a:extLst>
-              <a:ext uri="{FF2B5EF4-FFF2-40B4-BE49-F238E27FC236}">
-                <a16:creationId xmlns:a16="http://schemas.microsoft.com/office/drawing/2014/main" id="{71881D22-44EF-8992-6EDB-F1DF53DFF6BB}"/>
-              </a:ext>
-            </a:extLst>
-          </p:cNvPr>
-          <p:cNvSpPr/>
-          <p:nvPr/>
-        </p:nvSpPr>
-        <p:spPr>
-          <a:xfrm>
-            <a:off x="11867115" y="3742195"/>
-            <a:ext cx="3836423" cy="477740"/>
-          </a:xfrm>
-          <a:prstGeom prst="rect">
-            <a:avLst/>
-          </a:prstGeom>
-          <a:solidFill>
-            <a:schemeClr val="bg1">
-              <a:lumMod val="50000"/>
-            </a:schemeClr>
-          </a:solidFill>
-          <a:ln>
-            <a:noFill/>
-          </a:ln>
-        </p:spPr>
-        <p:style>
-          <a:lnRef idx="2">
-            <a:schemeClr val="accent1">
-              <a:shade val="15000"/>
-            </a:schemeClr>
-          </a:lnRef>
-          <a:fillRef idx="1">
-            <a:schemeClr val="accent1"/>
-          </a:fillRef>
-          <a:effectRef idx="0">
-            <a:schemeClr val="accent1"/>
-          </a:effectRef>
-          <a:fontRef idx="minor">
-            <a:schemeClr val="lt1"/>
-          </a:fontRef>
-        </p:style>
-        <p:txBody>
-          <a:bodyPr rtlCol="0" anchor="ctr"/>
-          <a:lstStyle/>
-          <a:p>
-            <a:pPr algn="ctr"/>
-            <a:r>
-              <a:rPr lang="en-US" altLang="ko-KR" dirty="0"/>
-              <a:t>Worker 1 </a:t>
-            </a:r>
-            <a:endParaRPr lang="ko-KR" altLang="en-US" dirty="0"/>
-          </a:p>
-        </p:txBody>
-      </p:sp>
-      <p:sp>
-        <p:nvSpPr>
-          <p:cNvPr id="11" name="직사각형 10">
-            <a:extLst>
-              <a:ext uri="{FF2B5EF4-FFF2-40B4-BE49-F238E27FC236}">
-                <a16:creationId xmlns:a16="http://schemas.microsoft.com/office/drawing/2014/main" id="{DDEA7143-26E5-5D75-F104-B88BDF5D79C6}"/>
-              </a:ext>
-            </a:extLst>
-          </p:cNvPr>
-          <p:cNvSpPr/>
-          <p:nvPr/>
-        </p:nvSpPr>
-        <p:spPr>
-          <a:xfrm>
-            <a:off x="11867112" y="4330285"/>
-            <a:ext cx="3836423" cy="477740"/>
-          </a:xfrm>
-          <a:prstGeom prst="rect">
-            <a:avLst/>
-          </a:prstGeom>
-          <a:solidFill>
-            <a:schemeClr val="bg1">
-              <a:lumMod val="50000"/>
-            </a:schemeClr>
-          </a:solidFill>
-          <a:ln>
-            <a:noFill/>
-          </a:ln>
-        </p:spPr>
-        <p:style>
-          <a:lnRef idx="2">
-            <a:schemeClr val="accent1">
-              <a:shade val="15000"/>
-            </a:schemeClr>
-          </a:lnRef>
-          <a:fillRef idx="1">
-            <a:schemeClr val="accent1"/>
-          </a:fillRef>
-          <a:effectRef idx="0">
-            <a:schemeClr val="accent1"/>
-          </a:effectRef>
-          <a:fontRef idx="minor">
-            <a:schemeClr val="lt1"/>
-          </a:fontRef>
-        </p:style>
-        <p:txBody>
-          <a:bodyPr rtlCol="0" anchor="ctr"/>
-          <a:lstStyle/>
-          <a:p>
-            <a:pPr algn="ctr"/>
-            <a:r>
-              <a:rPr lang="en-US" altLang="ko-KR" dirty="0"/>
-              <a:t>Worker 2</a:t>
-            </a:r>
-            <a:endParaRPr lang="ko-KR" altLang="en-US" dirty="0"/>
-          </a:p>
-        </p:txBody>
-      </p:sp>
-      <p:sp>
-        <p:nvSpPr>
-          <p:cNvPr id="13" name="직사각형 12">
-            <a:extLst>
-              <a:ext uri="{FF2B5EF4-FFF2-40B4-BE49-F238E27FC236}">
-                <a16:creationId xmlns:a16="http://schemas.microsoft.com/office/drawing/2014/main" id="{855C3C4A-5A3E-275B-2045-A7E67A9EB499}"/>
-              </a:ext>
-            </a:extLst>
-          </p:cNvPr>
-          <p:cNvSpPr/>
-          <p:nvPr/>
-        </p:nvSpPr>
-        <p:spPr>
-          <a:xfrm>
-            <a:off x="11867111" y="5811289"/>
-            <a:ext cx="3836423" cy="477740"/>
-          </a:xfrm>
-          <a:prstGeom prst="rect">
-            <a:avLst/>
-          </a:prstGeom>
-          <a:solidFill>
-            <a:schemeClr val="bg1">
-              <a:lumMod val="50000"/>
-            </a:schemeClr>
-          </a:solidFill>
-          <a:ln>
-            <a:noFill/>
-          </a:ln>
-        </p:spPr>
-        <p:style>
-          <a:lnRef idx="2">
-            <a:schemeClr val="accent1">
-              <a:shade val="15000"/>
-            </a:schemeClr>
-          </a:lnRef>
-          <a:fillRef idx="1">
-            <a:schemeClr val="accent1"/>
-          </a:fillRef>
-          <a:effectRef idx="0">
-            <a:schemeClr val="accent1"/>
-          </a:effectRef>
-          <a:fontRef idx="minor">
-            <a:schemeClr val="lt1"/>
-          </a:fontRef>
-        </p:style>
-        <p:txBody>
-          <a:bodyPr rtlCol="0" anchor="ctr"/>
-          <a:lstStyle/>
-          <a:p>
-            <a:pPr algn="ctr"/>
-            <a:r>
-              <a:rPr lang="en-US" altLang="ko-KR" dirty="0"/>
-              <a:t>Worker 20</a:t>
-            </a:r>
-            <a:endParaRPr lang="ko-KR" altLang="en-US" dirty="0"/>
-          </a:p>
-        </p:txBody>
-      </p:sp>
-      <p:sp>
-        <p:nvSpPr>
-          <p:cNvPr id="15" name="TextBox 14">
-            <a:extLst>
-              <a:ext uri="{FF2B5EF4-FFF2-40B4-BE49-F238E27FC236}">
-                <a16:creationId xmlns:a16="http://schemas.microsoft.com/office/drawing/2014/main" id="{552218C7-4CCA-7E13-1B56-6D847D294606}"/>
-              </a:ext>
-            </a:extLst>
-          </p:cNvPr>
-          <p:cNvSpPr txBox="1"/>
-          <p:nvPr/>
-        </p:nvSpPr>
-        <p:spPr>
-          <a:xfrm rot="5400000">
-            <a:off x="13582443" y="5037739"/>
-            <a:ext cx="665567" cy="553998"/>
-          </a:xfrm>
-          <a:prstGeom prst="rect">
-            <a:avLst/>
-          </a:prstGeom>
-          <a:noFill/>
-        </p:spPr>
-        <p:txBody>
-          <a:bodyPr wrap="none" rtlCol="0">
-            <a:spAutoFit/>
-          </a:bodyPr>
-          <a:lstStyle/>
-          <a:p>
-            <a:r>
-              <a:rPr lang="en-US" altLang="ko-KR" sz="3000" b="1" dirty="0">
-                <a:solidFill>
-                  <a:schemeClr val="bg1"/>
-                </a:solidFill>
-              </a:rPr>
-              <a:t>. . .</a:t>
-            </a:r>
-            <a:endParaRPr lang="ko-KR" altLang="en-US" sz="3000" b="1" dirty="0">
-              <a:solidFill>
-                <a:schemeClr val="bg1"/>
-              </a:solidFill>
-            </a:endParaRPr>
-          </a:p>
-        </p:txBody>
-      </p:sp>
-      <p:sp>
-        <p:nvSpPr>
-          <p:cNvPr id="16" name="사각형: 둥근 모서리 15">
-            <a:extLst>
-              <a:ext uri="{FF2B5EF4-FFF2-40B4-BE49-F238E27FC236}">
-                <a16:creationId xmlns:a16="http://schemas.microsoft.com/office/drawing/2014/main" id="{91DA388E-33E2-3782-2246-B4865B72E89F}"/>
-              </a:ext>
-            </a:extLst>
-          </p:cNvPr>
-          <p:cNvSpPr/>
-          <p:nvPr/>
-        </p:nvSpPr>
-        <p:spPr>
-          <a:xfrm>
-            <a:off x="1463081" y="5117324"/>
-            <a:ext cx="2959910" cy="1050837"/>
-          </a:xfrm>
-          <a:prstGeom prst="roundRect">
-            <a:avLst/>
-          </a:prstGeom>
-          <a:noFill/>
-          <a:ln>
-            <a:prstDash val="solid"/>
-            <a:extLst>
-              <a:ext uri="{C807C97D-BFC1-408E-A445-0C87EB9F89A2}">
-                <ask:lineSketchStyleProps xmlns:ask="http://schemas.microsoft.com/office/drawing/2018/sketchyshapes">
-                  <ask:type>
-                    <ask:lineSketchNone/>
-                  </ask:type>
-                </ask:lineSketchStyleProps>
-              </a:ext>
-            </a:extLst>
-          </a:ln>
-        </p:spPr>
-        <p:style>
-          <a:lnRef idx="2">
-            <a:schemeClr val="accent1">
-              <a:shade val="15000"/>
-            </a:schemeClr>
-          </a:lnRef>
-          <a:fillRef idx="1">
-            <a:schemeClr val="accent1"/>
-          </a:fillRef>
-          <a:effectRef idx="0">
-            <a:schemeClr val="accent1"/>
-          </a:effectRef>
-          <a:fontRef idx="minor">
-            <a:schemeClr val="lt1"/>
-          </a:fontRef>
-        </p:style>
-        <p:txBody>
-          <a:bodyPr rtlCol="0" anchor="ctr"/>
-          <a:lstStyle/>
-          <a:p>
-            <a:pPr algn="ctr"/>
-            <a:r>
-              <a:rPr lang="en-US" altLang="ko-KR" sz="2700" dirty="0">
-                <a:solidFill>
-                  <a:schemeClr val="tx1"/>
-                </a:solidFill>
-              </a:rPr>
-              <a:t>Master</a:t>
-            </a:r>
-            <a:endParaRPr lang="ko-KR" altLang="en-US" sz="2700" dirty="0">
-              <a:solidFill>
-                <a:schemeClr val="tx1"/>
-              </a:solidFill>
-            </a:endParaRPr>
-          </a:p>
-        </p:txBody>
-      </p:sp>
-      <p:sp>
-        <p:nvSpPr>
-          <p:cNvPr id="19" name="사각형: 둥근 모서리 18">
-            <a:extLst>
-              <a:ext uri="{FF2B5EF4-FFF2-40B4-BE49-F238E27FC236}">
-                <a16:creationId xmlns:a16="http://schemas.microsoft.com/office/drawing/2014/main" id="{D576BBB1-7C29-9A46-E70E-194DCACA804A}"/>
-              </a:ext>
-            </a:extLst>
-          </p:cNvPr>
-          <p:cNvSpPr/>
-          <p:nvPr/>
-        </p:nvSpPr>
-        <p:spPr>
-          <a:xfrm>
-            <a:off x="12435270" y="8969463"/>
-            <a:ext cx="2959910" cy="1050837"/>
-          </a:xfrm>
-          <a:prstGeom prst="roundRect">
-            <a:avLst>
-              <a:gd name="adj" fmla="val 13083"/>
-            </a:avLst>
-          </a:prstGeom>
-          <a:noFill/>
-        </p:spPr>
-        <p:style>
-          <a:lnRef idx="2">
-            <a:schemeClr val="accent1">
-              <a:shade val="15000"/>
-            </a:schemeClr>
-          </a:lnRef>
-          <a:fillRef idx="1">
-            <a:schemeClr val="accent1"/>
-          </a:fillRef>
-          <a:effectRef idx="0">
-            <a:schemeClr val="accent1"/>
-          </a:effectRef>
-          <a:fontRef idx="minor">
-            <a:schemeClr val="lt1"/>
-          </a:fontRef>
-        </p:style>
-        <p:txBody>
-          <a:bodyPr rtlCol="0" anchor="ctr"/>
-          <a:lstStyle/>
-          <a:p>
-            <a:pPr algn="ctr"/>
-            <a:r>
-              <a:rPr lang="en-US" altLang="ko-KR" sz="2700" dirty="0">
-                <a:solidFill>
-                  <a:schemeClr val="tx1"/>
-                </a:solidFill>
-              </a:rPr>
-              <a:t>Worker 20</a:t>
-            </a:r>
-            <a:endParaRPr lang="ko-KR" altLang="en-US" sz="2700" dirty="0">
-              <a:solidFill>
-                <a:schemeClr val="tx1"/>
-              </a:solidFill>
-            </a:endParaRPr>
+          <p:cNvPr id="2" name="Title 1">
+            <a:extLst>
+              <a:ext uri="{FF2B5EF4-FFF2-40B4-BE49-F238E27FC236}">
+                <a16:creationId xmlns:a16="http://schemas.microsoft.com/office/drawing/2014/main" id="{3FE9D3BF-D6DD-386D-201C-20F1F64D24E1}"/>
+              </a:ext>
+            </a:extLst>
+          </p:cNvPr>
+          <p:cNvSpPr>
+            <a:spLocks noGrp="1"/>
+          </p:cNvSpPr>
+          <p:nvPr>
+            <p:ph type="title"/>
+          </p:nvPr>
+        </p:nvSpPr>
+        <p:spPr/>
+        <p:txBody>
+          <a:bodyPr/>
+          <a:lstStyle/>
+          <a:p>
+            <a:r>
+              <a:rPr lang="en-KR" dirty="0"/>
+              <a:t>Current </a:t>
+            </a:r>
+            <a:r>
+              <a:rPr lang="en-US" dirty="0"/>
+              <a:t>Progress</a:t>
+            </a:r>
+            <a:endParaRPr lang="en-KR" dirty="0"/>
+          </a:p>
+        </p:txBody>
+      </p:sp>
+      <p:sp>
+        <p:nvSpPr>
+          <p:cNvPr id="3" name="Content Placeholder 2">
+            <a:extLst>
+              <a:ext uri="{FF2B5EF4-FFF2-40B4-BE49-F238E27FC236}">
+                <a16:creationId xmlns:a16="http://schemas.microsoft.com/office/drawing/2014/main" id="{02B47AC7-2B64-344E-177B-270FEEDC4F59}"/>
+              </a:ext>
+            </a:extLst>
+          </p:cNvPr>
+          <p:cNvSpPr>
+            <a:spLocks noGrp="1"/>
+          </p:cNvSpPr>
+          <p:nvPr>
+            <p:ph idx="1"/>
+          </p:nvPr>
+        </p:nvSpPr>
+        <p:spPr/>
+        <p:txBody>
+          <a:bodyPr/>
+          <a:lstStyle/>
+          <a:p>
+            <a:r>
+              <a:rPr lang="en-KR" dirty="0"/>
+              <a:t>ZIO gRPC communication</a:t>
+            </a:r>
           </a:p>
         </p:txBody>
       </p:sp>
       <p:pic>
         <p:nvPicPr>
-          <p:cNvPr id="1026" name="Picture 2" descr="정렬 - 무료 ui개 아이콘">
-            <a:extLst>
-              <a:ext uri="{FF2B5EF4-FFF2-40B4-BE49-F238E27FC236}">
-                <a16:creationId xmlns:a16="http://schemas.microsoft.com/office/drawing/2014/main" id="{8575AA38-E128-3F49-933F-A447B228788B}"/>
+          <p:cNvPr id="4" name="Picture 3">
+            <a:extLst>
+              <a:ext uri="{FF2B5EF4-FFF2-40B4-BE49-F238E27FC236}">
+                <a16:creationId xmlns:a16="http://schemas.microsoft.com/office/drawing/2014/main" id="{1C1DC192-1606-1289-A8DE-6EF3D3FCC0E3}"/>
               </a:ext>
             </a:extLst>
           </p:cNvPr>
           <p:cNvPicPr>
-            <a:picLocks noChangeAspect="1" noChangeArrowheads="1"/>
+            <a:picLocks noChangeAspect="1"/>
           </p:cNvPicPr>
           <p:nvPr/>
         </p:nvPicPr>
-        <p:blipFill rotWithShape="1">
-          <a:blip r:embed="rId2">
-            <a:extLst>
-              <a:ext uri="{28A0092B-C50C-407E-A947-70E740481C1C}">
-                <a14:useLocalDpi xmlns:a14="http://schemas.microsoft.com/office/drawing/2010/main" val="0"/>
-              </a:ext>
-            </a:extLst>
-          </a:blip>
-          <a:srcRect b="13066"/>
+        <p:blipFill>
+          <a:blip r:embed="rId2"/>
           <a:stretch>
             <a:fillRect/>
           </a:stretch>
         </p:blipFill>
-        <p:spPr bwMode="auto">
-          <a:xfrm>
-            <a:off x="6648638" y="1565179"/>
-            <a:ext cx="3406646" cy="2961509"/>
+        <p:spPr>
+          <a:xfrm>
+            <a:off x="4381500" y="3473349"/>
+            <a:ext cx="9525000" cy="2528592"/>
           </a:xfrm>
           <a:prstGeom prst="rect">
             <a:avLst/>
           </a:prstGeom>
-          <a:noFill/>
-          <a:extLst>
-            <a:ext uri="{909E8E84-426E-40DD-AFC4-6F175D3DCCD1}">
-              <a14:hiddenFill xmlns:a14="http://schemas.microsoft.com/office/drawing/2010/main">
-                <a:solidFill>
-                  <a:srgbClr val="FFFFFF"/>
-                </a:solidFill>
-              </a14:hiddenFill>
-            </a:ext>
-          </a:extLst>
         </p:spPr>
       </p:pic>
-      <p:sp>
-        <p:nvSpPr>
-          <p:cNvPr id="27" name="TextBox 26">
-            <a:extLst>
-              <a:ext uri="{FF2B5EF4-FFF2-40B4-BE49-F238E27FC236}">
-                <a16:creationId xmlns:a16="http://schemas.microsoft.com/office/drawing/2014/main" id="{81A08C38-C98A-E792-2608-FFF503709C2F}"/>
-              </a:ext>
-            </a:extLst>
-          </p:cNvPr>
-          <p:cNvSpPr txBox="1"/>
-          <p:nvPr/>
-        </p:nvSpPr>
-        <p:spPr>
-          <a:xfrm>
-            <a:off x="6524414" y="1218931"/>
-            <a:ext cx="3661091" cy="646331"/>
-          </a:xfrm>
-          <a:prstGeom prst="rect">
-            <a:avLst/>
-          </a:prstGeom>
-          <a:noFill/>
-        </p:spPr>
-        <p:txBody>
-          <a:bodyPr wrap="square" rtlCol="0">
-            <a:spAutoFit/>
-          </a:bodyPr>
-          <a:lstStyle/>
-          <a:p>
-            <a:pPr algn="ctr"/>
-            <a:r>
-              <a:rPr lang="en-US" altLang="ko-KR" sz="3600" dirty="0">
-                <a:latin typeface="Aptos Display" panose="020B0004020202020204" pitchFamily="34" charset="0"/>
-              </a:rPr>
-              <a:t>Sorting Algorithm</a:t>
-            </a:r>
-            <a:endParaRPr lang="ko-KR" altLang="en-US" sz="2400" dirty="0">
-              <a:latin typeface="Aptos Display" panose="020B0004020202020204" pitchFamily="34" charset="0"/>
-            </a:endParaRPr>
-          </a:p>
-        </p:txBody>
-      </p:sp>
-      <p:cxnSp>
-        <p:nvCxnSpPr>
-          <p:cNvPr id="44" name="연결선: 구부러짐 43">
-            <a:extLst>
-              <a:ext uri="{FF2B5EF4-FFF2-40B4-BE49-F238E27FC236}">
-                <a16:creationId xmlns:a16="http://schemas.microsoft.com/office/drawing/2014/main" id="{CF512DA3-7AB6-B946-A38B-192EA7AE2C9B}"/>
-              </a:ext>
-            </a:extLst>
-          </p:cNvPr>
-          <p:cNvCxnSpPr>
-            <a:cxnSpLocks/>
-            <a:stCxn id="7" idx="1"/>
-            <a:endCxn id="28" idx="3"/>
-          </p:cNvCxnSpPr>
-          <p:nvPr/>
-        </p:nvCxnSpPr>
-        <p:spPr>
-          <a:xfrm rot="10800000" flipV="1">
-            <a:off x="10442001" y="2899754"/>
-            <a:ext cx="1425116" cy="224612"/>
-          </a:xfrm>
-          <a:prstGeom prst="curvedConnector3">
-            <a:avLst/>
-          </a:prstGeom>
-          <a:ln w="28575">
-            <a:tailEnd type="triangle"/>
-          </a:ln>
-        </p:spPr>
-        <p:style>
-          <a:lnRef idx="2">
-            <a:schemeClr val="dk1"/>
-          </a:lnRef>
-          <a:fillRef idx="0">
-            <a:schemeClr val="dk1"/>
-          </a:fillRef>
-          <a:effectRef idx="1">
-            <a:schemeClr val="dk1"/>
-          </a:effectRef>
-          <a:fontRef idx="minor">
-            <a:schemeClr val="tx1"/>
-          </a:fontRef>
-        </p:style>
-      </p:cxnSp>
-      <p:cxnSp>
-        <p:nvCxnSpPr>
-          <p:cNvPr id="1046" name="연결선: 구부러짐 1045">
-            <a:extLst>
-              <a:ext uri="{FF2B5EF4-FFF2-40B4-BE49-F238E27FC236}">
-                <a16:creationId xmlns:a16="http://schemas.microsoft.com/office/drawing/2014/main" id="{4D54E85B-F582-656F-4AAE-5F065EE0EBEF}"/>
-              </a:ext>
-            </a:extLst>
-          </p:cNvPr>
-          <p:cNvCxnSpPr>
-            <a:stCxn id="16" idx="3"/>
-            <a:endCxn id="28" idx="1"/>
-          </p:cNvCxnSpPr>
-          <p:nvPr/>
-        </p:nvCxnSpPr>
-        <p:spPr>
-          <a:xfrm flipV="1">
-            <a:off x="4422991" y="3124367"/>
-            <a:ext cx="1779696" cy="2518376"/>
-          </a:xfrm>
-          <a:prstGeom prst="curvedConnector3">
-            <a:avLst/>
-          </a:prstGeom>
-          <a:ln w="28575">
-            <a:solidFill>
-              <a:schemeClr val="tx1"/>
-            </a:solidFill>
-            <a:headEnd type="triangle"/>
-            <a:tailEnd type="triangle"/>
-          </a:ln>
-        </p:spPr>
-        <p:style>
-          <a:lnRef idx="2">
-            <a:schemeClr val="dk1"/>
-          </a:lnRef>
-          <a:fillRef idx="0">
-            <a:schemeClr val="dk1"/>
-          </a:fillRef>
-          <a:effectRef idx="1">
-            <a:schemeClr val="dk1"/>
-          </a:effectRef>
-          <a:fontRef idx="minor">
-            <a:schemeClr val="tx1"/>
-          </a:fontRef>
-        </p:style>
-      </p:cxnSp>
-      <p:sp>
-        <p:nvSpPr>
-          <p:cNvPr id="1047" name="직사각형 1046">
-            <a:extLst>
-              <a:ext uri="{FF2B5EF4-FFF2-40B4-BE49-F238E27FC236}">
-                <a16:creationId xmlns:a16="http://schemas.microsoft.com/office/drawing/2014/main" id="{8625605C-A1D4-A781-F758-BE027437D060}"/>
-              </a:ext>
-            </a:extLst>
-          </p:cNvPr>
-          <p:cNvSpPr/>
-          <p:nvPr/>
-        </p:nvSpPr>
-        <p:spPr>
-          <a:xfrm>
-            <a:off x="11867109" y="6384283"/>
-            <a:ext cx="3836423" cy="1479041"/>
-          </a:xfrm>
-          <a:prstGeom prst="rect">
-            <a:avLst/>
-          </a:prstGeom>
-          <a:solidFill>
-            <a:schemeClr val="bg1">
-              <a:lumMod val="50000"/>
-            </a:schemeClr>
-          </a:solidFill>
-          <a:ln>
-            <a:noFill/>
-          </a:ln>
-        </p:spPr>
-        <p:style>
-          <a:lnRef idx="2">
-            <a:schemeClr val="accent1">
-              <a:shade val="15000"/>
-            </a:schemeClr>
-          </a:lnRef>
-          <a:fillRef idx="1">
-            <a:schemeClr val="accent1"/>
-          </a:fillRef>
-          <a:effectRef idx="0">
-            <a:schemeClr val="accent1"/>
-          </a:effectRef>
-          <a:fontRef idx="minor">
-            <a:schemeClr val="lt1"/>
-          </a:fontRef>
-        </p:style>
-        <p:txBody>
-          <a:bodyPr rtlCol="0" anchor="ctr"/>
-          <a:lstStyle/>
-          <a:p>
-            <a:pPr algn="ctr"/>
-            <a:r>
-              <a:rPr lang="en-US" altLang="ko-KR" sz="2700" dirty="0">
-                <a:latin typeface="Aptos Display" panose="020B0004020202020204" pitchFamily="34" charset="0"/>
-              </a:rPr>
-              <a:t>Output data</a:t>
-            </a:r>
-            <a:endParaRPr lang="ko-KR" altLang="en-US" sz="2700" dirty="0">
-              <a:latin typeface="Aptos Display" panose="020B0004020202020204" pitchFamily="34" charset="0"/>
-            </a:endParaRPr>
-          </a:p>
-        </p:txBody>
-      </p:sp>
-      <p:sp>
-        <p:nvSpPr>
-          <p:cNvPr id="1053" name="사각형: 둥근 모서리 1052">
-            <a:extLst>
-              <a:ext uri="{FF2B5EF4-FFF2-40B4-BE49-F238E27FC236}">
-                <a16:creationId xmlns:a16="http://schemas.microsoft.com/office/drawing/2014/main" id="{34794977-44E8-6C1C-5400-5B29CB7A97D9}"/>
-              </a:ext>
-            </a:extLst>
-          </p:cNvPr>
-          <p:cNvSpPr/>
-          <p:nvPr/>
-        </p:nvSpPr>
-        <p:spPr>
-          <a:xfrm>
-            <a:off x="6480168" y="8969463"/>
-            <a:ext cx="2959910" cy="1050837"/>
-          </a:xfrm>
-          <a:prstGeom prst="roundRect">
-            <a:avLst>
-              <a:gd name="adj" fmla="val 13083"/>
-            </a:avLst>
-          </a:prstGeom>
-          <a:noFill/>
-        </p:spPr>
-        <p:style>
-          <a:lnRef idx="2">
-            <a:schemeClr val="accent1">
-              <a:shade val="15000"/>
-            </a:schemeClr>
-          </a:lnRef>
-          <a:fillRef idx="1">
-            <a:schemeClr val="accent1"/>
-          </a:fillRef>
-          <a:effectRef idx="0">
-            <a:schemeClr val="accent1"/>
-          </a:effectRef>
-          <a:fontRef idx="minor">
-            <a:schemeClr val="lt1"/>
-          </a:fontRef>
-        </p:style>
-        <p:txBody>
-          <a:bodyPr rtlCol="0" anchor="ctr"/>
-          <a:lstStyle/>
-          <a:p>
-            <a:pPr algn="ctr"/>
-            <a:r>
-              <a:rPr lang="en-US" altLang="ko-KR" sz="2700" dirty="0">
-                <a:solidFill>
-                  <a:schemeClr val="tx1"/>
-                </a:solidFill>
-              </a:rPr>
-              <a:t>Worker 2</a:t>
-            </a:r>
-            <a:endParaRPr lang="ko-KR" altLang="en-US" sz="2700" dirty="0">
-              <a:solidFill>
-                <a:schemeClr val="tx1"/>
-              </a:solidFill>
-            </a:endParaRPr>
-          </a:p>
-        </p:txBody>
-      </p:sp>
-      <p:sp>
-        <p:nvSpPr>
-          <p:cNvPr id="1054" name="사각형: 둥근 모서리 1053">
-            <a:extLst>
-              <a:ext uri="{FF2B5EF4-FFF2-40B4-BE49-F238E27FC236}">
-                <a16:creationId xmlns:a16="http://schemas.microsoft.com/office/drawing/2014/main" id="{51FE1A14-D5F4-F567-59D1-610CC7BDE7AF}"/>
-              </a:ext>
-            </a:extLst>
-          </p:cNvPr>
-          <p:cNvSpPr/>
-          <p:nvPr/>
-        </p:nvSpPr>
-        <p:spPr>
-          <a:xfrm>
-            <a:off x="9829797" y="8964969"/>
-            <a:ext cx="370454" cy="1050837"/>
-          </a:xfrm>
-          <a:prstGeom prst="roundRect">
-            <a:avLst>
-              <a:gd name="adj" fmla="val 13083"/>
-            </a:avLst>
-          </a:prstGeom>
-          <a:noFill/>
-        </p:spPr>
-        <p:style>
-          <a:lnRef idx="2">
-            <a:schemeClr val="accent1">
-              <a:shade val="15000"/>
-            </a:schemeClr>
-          </a:lnRef>
-          <a:fillRef idx="1">
-            <a:schemeClr val="accent1"/>
-          </a:fillRef>
-          <a:effectRef idx="0">
-            <a:schemeClr val="accent1"/>
-          </a:effectRef>
-          <a:fontRef idx="minor">
-            <a:schemeClr val="lt1"/>
-          </a:fontRef>
-        </p:style>
-        <p:txBody>
-          <a:bodyPr rtlCol="0" anchor="ctr"/>
-          <a:lstStyle/>
-          <a:p>
-            <a:pPr algn="ctr"/>
-            <a:endParaRPr lang="ko-KR" altLang="en-US" sz="2700" dirty="0">
-              <a:solidFill>
-                <a:schemeClr val="tx1"/>
-              </a:solidFill>
-            </a:endParaRPr>
-          </a:p>
-        </p:txBody>
-      </p:sp>
-      <p:sp>
-        <p:nvSpPr>
-          <p:cNvPr id="1055" name="TextBox 1054">
-            <a:extLst>
-              <a:ext uri="{FF2B5EF4-FFF2-40B4-BE49-F238E27FC236}">
-                <a16:creationId xmlns:a16="http://schemas.microsoft.com/office/drawing/2014/main" id="{9E8525B7-E348-E674-DAEF-3DD3F082E029}"/>
-              </a:ext>
-            </a:extLst>
-          </p:cNvPr>
-          <p:cNvSpPr txBox="1"/>
-          <p:nvPr/>
-        </p:nvSpPr>
-        <p:spPr>
-          <a:xfrm>
-            <a:off x="10863629" y="9114108"/>
-            <a:ext cx="665567" cy="553998"/>
-          </a:xfrm>
-          <a:prstGeom prst="rect">
-            <a:avLst/>
-          </a:prstGeom>
-          <a:noFill/>
-        </p:spPr>
-        <p:txBody>
-          <a:bodyPr wrap="none" rtlCol="0">
-            <a:spAutoFit/>
-          </a:bodyPr>
-          <a:lstStyle/>
-          <a:p>
-            <a:r>
-              <a:rPr lang="en-US" altLang="ko-KR" sz="3000" b="1" dirty="0"/>
-              <a:t>. . .</a:t>
-            </a:r>
-            <a:endParaRPr lang="ko-KR" altLang="en-US" sz="3000" b="1" dirty="0"/>
-          </a:p>
-        </p:txBody>
-      </p:sp>
       <p:pic>
         <p:nvPicPr>
-          <p:cNvPr id="1060" name="Picture 6" descr="git pull과 git merge 비교">
-            <a:extLst>
-              <a:ext uri="{FF2B5EF4-FFF2-40B4-BE49-F238E27FC236}">
-                <a16:creationId xmlns:a16="http://schemas.microsoft.com/office/drawing/2014/main" id="{8573909C-5E72-535A-C0D9-475ED2BD88A7}"/>
+          <p:cNvPr id="5" name="Picture 4">
+            <a:extLst>
+              <a:ext uri="{FF2B5EF4-FFF2-40B4-BE49-F238E27FC236}">
+                <a16:creationId xmlns:a16="http://schemas.microsoft.com/office/drawing/2014/main" id="{C7D068AF-411C-0B4A-0C0D-5978B3FE5857}"/>
               </a:ext>
             </a:extLst>
           </p:cNvPr>
           <p:cNvPicPr>
-            <a:picLocks noChangeAspect="1" noChangeArrowheads="1"/>
+            <a:picLocks noChangeAspect="1"/>
           </p:cNvPicPr>
           <p:nvPr/>
         </p:nvPicPr>
         <p:blipFill>
-          <a:blip r:embed="rId3">
-            <a:extLst>
-              <a:ext uri="{28A0092B-C50C-407E-A947-70E740481C1C}">
-                <a14:useLocalDpi xmlns:a14="http://schemas.microsoft.com/office/drawing/2010/main" val="0"/>
-              </a:ext>
-            </a:extLst>
-          </a:blip>
-          <a:srcRect/>
+          <a:blip r:embed="rId3"/>
           <a:stretch>
             <a:fillRect/>
           </a:stretch>
         </p:blipFill>
-        <p:spPr bwMode="auto">
-          <a:xfrm rot="16200000">
-            <a:off x="6865338" y="5234466"/>
-            <a:ext cx="2853762" cy="2853762"/>
+        <p:spPr>
+          <a:xfrm>
+            <a:off x="4381500" y="6180452"/>
+            <a:ext cx="9525000" cy="2483931"/>
           </a:xfrm>
           <a:prstGeom prst="rect">
             <a:avLst/>
           </a:prstGeom>
-          <a:noFill/>
-          <a:extLst>
-            <a:ext uri="{909E8E84-426E-40DD-AFC4-6F175D3DCCD1}">
-              <a14:hiddenFill xmlns:a14="http://schemas.microsoft.com/office/drawing/2010/main">
-                <a:solidFill>
-                  <a:srgbClr val="FFFFFF"/>
-                </a:solidFill>
-              </a14:hiddenFill>
-            </a:ext>
-          </a:extLst>
         </p:spPr>
       </p:pic>
-      <p:sp>
-        <p:nvSpPr>
-          <p:cNvPr id="1062" name="사각형: 둥근 모서리 1061">
-            <a:extLst>
-              <a:ext uri="{FF2B5EF4-FFF2-40B4-BE49-F238E27FC236}">
-                <a16:creationId xmlns:a16="http://schemas.microsoft.com/office/drawing/2014/main" id="{1EF32E6D-5F3F-D73F-8507-03D13280B725}"/>
-              </a:ext>
-            </a:extLst>
-          </p:cNvPr>
-          <p:cNvSpPr/>
-          <p:nvPr/>
-        </p:nvSpPr>
-        <p:spPr>
-          <a:xfrm>
-            <a:off x="6194101" y="5050912"/>
-            <a:ext cx="4239312" cy="3036470"/>
-          </a:xfrm>
-          <a:prstGeom prst="roundRect">
-            <a:avLst>
-              <a:gd name="adj" fmla="val 13083"/>
-            </a:avLst>
-          </a:prstGeom>
-          <a:noFill/>
-        </p:spPr>
-        <p:style>
-          <a:lnRef idx="2">
-            <a:schemeClr val="accent1">
-              <a:shade val="15000"/>
-            </a:schemeClr>
-          </a:lnRef>
-          <a:fillRef idx="1">
-            <a:schemeClr val="accent1"/>
-          </a:fillRef>
-          <a:effectRef idx="0">
-            <a:schemeClr val="accent1"/>
-          </a:effectRef>
-          <a:fontRef idx="minor">
-            <a:schemeClr val="lt1"/>
-          </a:fontRef>
-        </p:style>
-        <p:txBody>
-          <a:bodyPr rtlCol="0" anchor="ctr"/>
-          <a:lstStyle/>
-          <a:p>
-            <a:pPr algn="ctr"/>
-            <a:endParaRPr lang="ko-KR" altLang="en-US" sz="2700" dirty="0"/>
-          </a:p>
-        </p:txBody>
-      </p:sp>
-      <p:sp>
-        <p:nvSpPr>
-          <p:cNvPr id="1063" name="TextBox 1062">
-            <a:extLst>
-              <a:ext uri="{FF2B5EF4-FFF2-40B4-BE49-F238E27FC236}">
-                <a16:creationId xmlns:a16="http://schemas.microsoft.com/office/drawing/2014/main" id="{8BE6016C-4006-5855-9A96-BE27812E88CC}"/>
-              </a:ext>
-            </a:extLst>
-          </p:cNvPr>
-          <p:cNvSpPr txBox="1"/>
-          <p:nvPr/>
-        </p:nvSpPr>
-        <p:spPr>
-          <a:xfrm>
-            <a:off x="7329192" y="4669336"/>
-            <a:ext cx="1967564" cy="646331"/>
-          </a:xfrm>
-          <a:prstGeom prst="rect">
-            <a:avLst/>
-          </a:prstGeom>
-          <a:solidFill>
-            <a:schemeClr val="bg1"/>
-          </a:solidFill>
-        </p:spPr>
-        <p:txBody>
-          <a:bodyPr wrap="square" rtlCol="0">
-            <a:spAutoFit/>
-          </a:bodyPr>
-          <a:lstStyle/>
-          <a:p>
-            <a:pPr algn="ctr"/>
-            <a:r>
-              <a:rPr lang="en-US" altLang="ko-KR" sz="3600" dirty="0">
-                <a:latin typeface="Aptos Display" panose="020B0004020202020204" pitchFamily="34" charset="0"/>
-              </a:rPr>
-              <a:t>Merge</a:t>
-            </a:r>
-            <a:endParaRPr lang="ko-KR" altLang="en-US" sz="2400" dirty="0">
-              <a:latin typeface="Aptos Display" panose="020B0004020202020204" pitchFamily="34" charset="0"/>
-            </a:endParaRPr>
-          </a:p>
-        </p:txBody>
-      </p:sp>
-      <p:cxnSp>
-        <p:nvCxnSpPr>
-          <p:cNvPr id="1067" name="연결선: 구부러짐 1066">
-            <a:extLst>
-              <a:ext uri="{FF2B5EF4-FFF2-40B4-BE49-F238E27FC236}">
-                <a16:creationId xmlns:a16="http://schemas.microsoft.com/office/drawing/2014/main" id="{105EA37D-4FE8-EE40-A157-CB92629E3BA3}"/>
-              </a:ext>
-            </a:extLst>
-          </p:cNvPr>
-          <p:cNvCxnSpPr>
-            <a:cxnSpLocks/>
-            <a:stCxn id="10" idx="1"/>
-            <a:endCxn id="1062" idx="3"/>
-          </p:cNvCxnSpPr>
-          <p:nvPr/>
-        </p:nvCxnSpPr>
-        <p:spPr>
-          <a:xfrm rot="10800000" flipV="1">
-            <a:off x="10433415" y="3981065"/>
-            <a:ext cx="1433702" cy="2588082"/>
-          </a:xfrm>
-          <a:prstGeom prst="curvedConnector3">
-            <a:avLst/>
-          </a:prstGeom>
-          <a:ln w="28575">
-            <a:tailEnd type="triangle"/>
-          </a:ln>
-        </p:spPr>
-        <p:style>
-          <a:lnRef idx="2">
-            <a:schemeClr val="dk1"/>
-          </a:lnRef>
-          <a:fillRef idx="0">
-            <a:schemeClr val="dk1"/>
-          </a:fillRef>
-          <a:effectRef idx="1">
-            <a:schemeClr val="dk1"/>
-          </a:effectRef>
-          <a:fontRef idx="minor">
-            <a:schemeClr val="tx1"/>
-          </a:fontRef>
-        </p:style>
-      </p:cxnSp>
-      <p:cxnSp>
-        <p:nvCxnSpPr>
-          <p:cNvPr id="1069" name="연결선: 구부러짐 1068">
-            <a:extLst>
-              <a:ext uri="{FF2B5EF4-FFF2-40B4-BE49-F238E27FC236}">
-                <a16:creationId xmlns:a16="http://schemas.microsoft.com/office/drawing/2014/main" id="{EE0E06F7-2A96-F10B-6A07-881C12605785}"/>
-              </a:ext>
-            </a:extLst>
-          </p:cNvPr>
-          <p:cNvCxnSpPr>
-            <a:cxnSpLocks/>
-            <a:stCxn id="1062" idx="1"/>
-            <a:endCxn id="1047" idx="1"/>
-          </p:cNvCxnSpPr>
-          <p:nvPr/>
-        </p:nvCxnSpPr>
-        <p:spPr>
-          <a:xfrm rot="10800000" flipH="1" flipV="1">
-            <a:off x="6194100" y="6569146"/>
-            <a:ext cx="5673008" cy="554657"/>
-          </a:xfrm>
-          <a:prstGeom prst="curvedConnector5">
-            <a:avLst>
-              <a:gd name="adj1" fmla="val -9684"/>
-              <a:gd name="adj2" fmla="val 321229"/>
-              <a:gd name="adj3" fmla="val 87364"/>
-            </a:avLst>
-          </a:prstGeom>
-          <a:ln w="28575">
-            <a:tailEnd type="triangle"/>
-          </a:ln>
-        </p:spPr>
-        <p:style>
-          <a:lnRef idx="2">
-            <a:schemeClr val="dk1"/>
-          </a:lnRef>
-          <a:fillRef idx="0">
-            <a:schemeClr val="dk1"/>
-          </a:fillRef>
-          <a:effectRef idx="1">
-            <a:schemeClr val="dk1"/>
-          </a:effectRef>
-          <a:fontRef idx="minor">
-            <a:schemeClr val="tx1"/>
-          </a:fontRef>
-        </p:style>
-      </p:cxnSp>
-      <p:sp>
-        <p:nvSpPr>
-          <p:cNvPr id="3" name="TextBox 2">
-            <a:extLst>
-              <a:ext uri="{FF2B5EF4-FFF2-40B4-BE49-F238E27FC236}">
-                <a16:creationId xmlns:a16="http://schemas.microsoft.com/office/drawing/2014/main" id="{DC946AB8-E302-DAE5-810E-1B36BE9B6B12}"/>
-              </a:ext>
-            </a:extLst>
-          </p:cNvPr>
-          <p:cNvSpPr txBox="1"/>
-          <p:nvPr/>
-        </p:nvSpPr>
-        <p:spPr>
-          <a:xfrm>
-            <a:off x="11011681" y="2535581"/>
-            <a:ext cx="301686" cy="369332"/>
-          </a:xfrm>
-          <a:prstGeom prst="rect">
-            <a:avLst/>
-          </a:prstGeom>
-          <a:noFill/>
-        </p:spPr>
-        <p:txBody>
-          <a:bodyPr wrap="none" rtlCol="0">
-            <a:spAutoFit/>
-          </a:bodyPr>
-          <a:lstStyle/>
-          <a:p>
-            <a:r>
-              <a:rPr lang="en-US" altLang="ko-KR" dirty="0"/>
-              <a:t>1</a:t>
-            </a:r>
-            <a:endParaRPr lang="ko-KR" altLang="en-US" dirty="0"/>
-          </a:p>
-        </p:txBody>
-      </p:sp>
-      <p:sp>
-        <p:nvSpPr>
-          <p:cNvPr id="6" name="TextBox 5">
-            <a:extLst>
-              <a:ext uri="{FF2B5EF4-FFF2-40B4-BE49-F238E27FC236}">
-                <a16:creationId xmlns:a16="http://schemas.microsoft.com/office/drawing/2014/main" id="{3C2932DF-4C22-EFA9-8EEC-E55D776B19CE}"/>
-              </a:ext>
-            </a:extLst>
-          </p:cNvPr>
-          <p:cNvSpPr txBox="1"/>
-          <p:nvPr/>
-        </p:nvSpPr>
-        <p:spPr>
-          <a:xfrm>
-            <a:off x="5392169" y="3853853"/>
-            <a:ext cx="301686" cy="369332"/>
-          </a:xfrm>
-          <a:prstGeom prst="rect">
-            <a:avLst/>
-          </a:prstGeom>
-          <a:noFill/>
-        </p:spPr>
-        <p:txBody>
-          <a:bodyPr wrap="none" rtlCol="0">
-            <a:spAutoFit/>
-          </a:bodyPr>
-          <a:lstStyle/>
-          <a:p>
-            <a:r>
-              <a:rPr lang="en-US" altLang="ko-KR" dirty="0"/>
-              <a:t>2</a:t>
-            </a:r>
-            <a:endParaRPr lang="ko-KR" altLang="en-US" dirty="0"/>
-          </a:p>
-        </p:txBody>
-      </p:sp>
-      <p:cxnSp>
-        <p:nvCxnSpPr>
-          <p:cNvPr id="22" name="연결선: 구부러짐 21">
-            <a:extLst>
-              <a:ext uri="{FF2B5EF4-FFF2-40B4-BE49-F238E27FC236}">
-                <a16:creationId xmlns:a16="http://schemas.microsoft.com/office/drawing/2014/main" id="{80B0557B-65B0-164E-958B-A5ADF5D3DEC0}"/>
-              </a:ext>
-            </a:extLst>
-          </p:cNvPr>
-          <p:cNvCxnSpPr>
-            <a:cxnSpLocks/>
-            <a:stCxn id="28" idx="3"/>
-            <a:endCxn id="11" idx="1"/>
-          </p:cNvCxnSpPr>
-          <p:nvPr/>
-        </p:nvCxnSpPr>
-        <p:spPr>
-          <a:xfrm>
-            <a:off x="10441999" y="3124367"/>
-            <a:ext cx="1425113" cy="1444788"/>
-          </a:xfrm>
-          <a:prstGeom prst="curvedConnector3">
-            <a:avLst/>
-          </a:prstGeom>
-          <a:ln w="28575">
-            <a:tailEnd type="triangle"/>
-          </a:ln>
-        </p:spPr>
-        <p:style>
-          <a:lnRef idx="1">
-            <a:schemeClr val="dk1"/>
-          </a:lnRef>
-          <a:fillRef idx="0">
-            <a:schemeClr val="dk1"/>
-          </a:fillRef>
-          <a:effectRef idx="0">
-            <a:schemeClr val="dk1"/>
-          </a:effectRef>
-          <a:fontRef idx="minor">
-            <a:schemeClr val="tx1"/>
-          </a:fontRef>
-        </p:style>
-      </p:cxnSp>
-      <p:sp>
-        <p:nvSpPr>
-          <p:cNvPr id="24" name="TextBox 23">
-            <a:extLst>
-              <a:ext uri="{FF2B5EF4-FFF2-40B4-BE49-F238E27FC236}">
-                <a16:creationId xmlns:a16="http://schemas.microsoft.com/office/drawing/2014/main" id="{8F633A61-08F6-2890-3E12-E1E17FD9F866}"/>
-              </a:ext>
-            </a:extLst>
-          </p:cNvPr>
-          <p:cNvSpPr txBox="1"/>
-          <p:nvPr/>
-        </p:nvSpPr>
-        <p:spPr>
-          <a:xfrm>
-            <a:off x="11047564" y="3169660"/>
-            <a:ext cx="301686" cy="369332"/>
-          </a:xfrm>
-          <a:prstGeom prst="rect">
-            <a:avLst/>
-          </a:prstGeom>
-          <a:noFill/>
-        </p:spPr>
-        <p:txBody>
-          <a:bodyPr wrap="none" rtlCol="0">
-            <a:spAutoFit/>
-          </a:bodyPr>
-          <a:lstStyle/>
-          <a:p>
-            <a:r>
-              <a:rPr lang="en-US" altLang="ko-KR" dirty="0"/>
-              <a:t>3</a:t>
-            </a:r>
-            <a:endParaRPr lang="ko-KR" altLang="en-US" dirty="0"/>
-          </a:p>
-        </p:txBody>
-      </p:sp>
-      <p:sp>
-        <p:nvSpPr>
-          <p:cNvPr id="25" name="TextBox 24">
-            <a:extLst>
-              <a:ext uri="{FF2B5EF4-FFF2-40B4-BE49-F238E27FC236}">
-                <a16:creationId xmlns:a16="http://schemas.microsoft.com/office/drawing/2014/main" id="{55238D4A-4C7E-DD97-1A73-7B742A782CC5}"/>
-              </a:ext>
-            </a:extLst>
-          </p:cNvPr>
-          <p:cNvSpPr txBox="1"/>
-          <p:nvPr/>
-        </p:nvSpPr>
-        <p:spPr>
-          <a:xfrm>
-            <a:off x="16090373" y="7917943"/>
-            <a:ext cx="301686" cy="369332"/>
-          </a:xfrm>
-          <a:prstGeom prst="rect">
-            <a:avLst/>
-          </a:prstGeom>
-          <a:noFill/>
-        </p:spPr>
-        <p:txBody>
-          <a:bodyPr wrap="none" rtlCol="0">
-            <a:spAutoFit/>
-          </a:bodyPr>
-          <a:lstStyle/>
-          <a:p>
-            <a:r>
-              <a:rPr lang="en-US" altLang="ko-KR" dirty="0"/>
-              <a:t>4</a:t>
-            </a:r>
-            <a:endParaRPr lang="ko-KR" altLang="en-US" dirty="0"/>
-          </a:p>
-        </p:txBody>
-      </p:sp>
-      <p:sp>
-        <p:nvSpPr>
-          <p:cNvPr id="26" name="TextBox 25">
-            <a:extLst>
-              <a:ext uri="{FF2B5EF4-FFF2-40B4-BE49-F238E27FC236}">
-                <a16:creationId xmlns:a16="http://schemas.microsoft.com/office/drawing/2014/main" id="{F7182D90-3788-40CC-24CB-169B0D645518}"/>
-              </a:ext>
-            </a:extLst>
-          </p:cNvPr>
-          <p:cNvSpPr txBox="1"/>
-          <p:nvPr/>
-        </p:nvSpPr>
-        <p:spPr>
-          <a:xfrm>
-            <a:off x="10790541" y="5499299"/>
-            <a:ext cx="301686" cy="369332"/>
-          </a:xfrm>
-          <a:prstGeom prst="rect">
-            <a:avLst/>
-          </a:prstGeom>
-          <a:noFill/>
-        </p:spPr>
-        <p:txBody>
-          <a:bodyPr wrap="none" rtlCol="0">
-            <a:spAutoFit/>
-          </a:bodyPr>
-          <a:lstStyle/>
-          <a:p>
-            <a:r>
-              <a:rPr lang="en-US" altLang="ko-KR" dirty="0"/>
-              <a:t>5</a:t>
-            </a:r>
-            <a:endParaRPr lang="ko-KR" altLang="en-US" dirty="0"/>
-          </a:p>
-        </p:txBody>
-      </p:sp>
-      <p:sp>
-        <p:nvSpPr>
-          <p:cNvPr id="29" name="TextBox 28">
-            <a:extLst>
-              <a:ext uri="{FF2B5EF4-FFF2-40B4-BE49-F238E27FC236}">
-                <a16:creationId xmlns:a16="http://schemas.microsoft.com/office/drawing/2014/main" id="{00B30E3E-E4B1-BF04-025C-60166AC81D0D}"/>
-              </a:ext>
-            </a:extLst>
-          </p:cNvPr>
-          <p:cNvSpPr txBox="1"/>
-          <p:nvPr/>
-        </p:nvSpPr>
-        <p:spPr>
-          <a:xfrm>
-            <a:off x="10639726" y="7587854"/>
-            <a:ext cx="301686" cy="369332"/>
-          </a:xfrm>
-          <a:prstGeom prst="rect">
-            <a:avLst/>
-          </a:prstGeom>
-          <a:noFill/>
-        </p:spPr>
-        <p:txBody>
-          <a:bodyPr wrap="none" rtlCol="0">
-            <a:spAutoFit/>
-          </a:bodyPr>
-          <a:lstStyle/>
-          <a:p>
-            <a:r>
-              <a:rPr lang="en-US" altLang="ko-KR" dirty="0"/>
-              <a:t>6</a:t>
-            </a:r>
-            <a:endParaRPr lang="ko-KR" altLang="en-US" dirty="0"/>
-          </a:p>
-        </p:txBody>
-      </p:sp>
-      <p:cxnSp>
-        <p:nvCxnSpPr>
-          <p:cNvPr id="31" name="연결선: 구부러짐 30">
-            <a:extLst>
-              <a:ext uri="{FF2B5EF4-FFF2-40B4-BE49-F238E27FC236}">
-                <a16:creationId xmlns:a16="http://schemas.microsoft.com/office/drawing/2014/main" id="{7B2142AC-A3C8-CC94-6F4A-224C6774F14C}"/>
-              </a:ext>
-            </a:extLst>
-          </p:cNvPr>
-          <p:cNvCxnSpPr>
-            <a:stCxn id="1047" idx="3"/>
-            <a:endCxn id="19" idx="3"/>
-          </p:cNvCxnSpPr>
-          <p:nvPr/>
-        </p:nvCxnSpPr>
-        <p:spPr>
-          <a:xfrm flipH="1">
-            <a:off x="15395180" y="7123804"/>
-            <a:ext cx="308352" cy="2371078"/>
-          </a:xfrm>
-          <a:prstGeom prst="curvedConnector3">
-            <a:avLst>
-              <a:gd name="adj1" fmla="val -74136"/>
-            </a:avLst>
-          </a:prstGeom>
-          <a:ln w="28575">
-            <a:tailEnd type="triangle"/>
-          </a:ln>
-        </p:spPr>
-        <p:style>
-          <a:lnRef idx="1">
-            <a:schemeClr val="dk1"/>
-          </a:lnRef>
-          <a:fillRef idx="0">
-            <a:schemeClr val="dk1"/>
-          </a:fillRef>
-          <a:effectRef idx="0">
-            <a:schemeClr val="dk1"/>
-          </a:effectRef>
-          <a:fontRef idx="minor">
-            <a:schemeClr val="tx1"/>
-          </a:fontRef>
-        </p:style>
-      </p:cxnSp>
-      <p:cxnSp>
-        <p:nvCxnSpPr>
-          <p:cNvPr id="33" name="연결선: 구부러짐 32">
-            <a:extLst>
-              <a:ext uri="{FF2B5EF4-FFF2-40B4-BE49-F238E27FC236}">
-                <a16:creationId xmlns:a16="http://schemas.microsoft.com/office/drawing/2014/main" id="{C52BF79D-597B-3819-FB50-4E703FF808DE}"/>
-              </a:ext>
-            </a:extLst>
-          </p:cNvPr>
-          <p:cNvCxnSpPr>
-            <a:stCxn id="19" idx="3"/>
-            <a:endCxn id="10" idx="3"/>
-          </p:cNvCxnSpPr>
-          <p:nvPr/>
-        </p:nvCxnSpPr>
-        <p:spPr>
-          <a:xfrm flipV="1">
-            <a:off x="15395180" y="3981065"/>
-            <a:ext cx="308358" cy="5513817"/>
-          </a:xfrm>
-          <a:prstGeom prst="curvedConnector3">
-            <a:avLst>
-              <a:gd name="adj1" fmla="val 451542"/>
-            </a:avLst>
-          </a:prstGeom>
-          <a:ln w="28575">
-            <a:tailEnd type="triangle"/>
-          </a:ln>
-        </p:spPr>
-        <p:style>
-          <a:lnRef idx="1">
-            <a:schemeClr val="dk1"/>
-          </a:lnRef>
-          <a:fillRef idx="0">
-            <a:schemeClr val="dk1"/>
-          </a:fillRef>
-          <a:effectRef idx="0">
-            <a:schemeClr val="dk1"/>
-          </a:effectRef>
-          <a:fontRef idx="minor">
-            <a:schemeClr val="tx1"/>
-          </a:fontRef>
-        </p:style>
-      </p:cxnSp>
-      <p:sp>
-        <p:nvSpPr>
-          <p:cNvPr id="35" name="Title 1">
-            <a:extLst>
-              <a:ext uri="{FF2B5EF4-FFF2-40B4-BE49-F238E27FC236}">
-                <a16:creationId xmlns:a16="http://schemas.microsoft.com/office/drawing/2014/main" id="{B569BF8D-42B5-4EC7-CC82-47E79E018506}"/>
-              </a:ext>
-            </a:extLst>
-          </p:cNvPr>
-          <p:cNvSpPr txBox="1">
-            <a:spLocks/>
-          </p:cNvSpPr>
-          <p:nvPr/>
-        </p:nvSpPr>
-        <p:spPr>
-          <a:xfrm>
-            <a:off x="783798" y="676798"/>
-            <a:ext cx="3498379" cy="1143000"/>
-          </a:xfrm>
-          <a:prstGeom prst="rect">
-            <a:avLst/>
-          </a:prstGeom>
-        </p:spPr>
-        <p:txBody>
-          <a:bodyPr vert="horz" lIns="91440" tIns="45720" rIns="91440" bIns="45720" rtlCol="0" anchor="ctr">
-            <a:normAutofit fontScale="92500" lnSpcReduction="20000"/>
-          </a:bodyPr>
-          <a:lstStyle>
-            <a:lvl1pPr algn="ctr" defTabSz="914400" rtl="0" eaLnBrk="1" latinLnBrk="0" hangingPunct="1">
-              <a:spcBef>
-                <a:spcPct val="0"/>
-              </a:spcBef>
-              <a:buNone/>
-              <a:defRPr sz="4400" kern="1200">
-                <a:solidFill>
-                  <a:schemeClr val="tx1"/>
-                </a:solidFill>
-                <a:latin typeface="+mj-lt"/>
-                <a:ea typeface="+mj-ea"/>
-                <a:cs typeface="+mj-cs"/>
-              </a:defRPr>
-            </a:lvl1pPr>
-          </a:lstStyle>
-          <a:p>
-            <a:pPr algn="r"/>
-            <a:r>
-              <a:rPr lang="en-US" dirty="0"/>
-              <a:t>Worker</a:t>
-            </a:r>
-            <a:r>
-              <a:rPr lang="en-KR" dirty="0"/>
-              <a:t> </a:t>
-            </a:r>
-            <a:r>
-              <a:rPr lang="en-US" dirty="0"/>
-              <a:t>Design </a:t>
-            </a:r>
-          </a:p>
-          <a:p>
-            <a:pPr algn="r"/>
-            <a:r>
-              <a:rPr lang="en-US" dirty="0"/>
-              <a:t>   - abstraction</a:t>
-            </a:r>
-            <a:endParaRPr lang="en-KR" dirty="0"/>
-          </a:p>
-        </p:txBody>
-      </p:sp>
     </p:spTree>
     <p:extLst>
       <p:ext uri="{BB962C8B-B14F-4D97-AF65-F5344CB8AC3E}">
-        <p14:creationId xmlns:p14="http://schemas.microsoft.com/office/powerpoint/2010/main" val="2850443503"/>
+        <p14:creationId xmlns:p14="http://schemas.microsoft.com/office/powerpoint/2010/main" val="4266501358"/>
       </p:ext>
     </p:extLst>
   </p:cSld>

--- a/CS332_Project_Presentation_Navy_Revised.pptx
+++ b/CS332_Project_Presentation_Navy_Revised.pptx
@@ -19,7 +19,7 @@
     <p:sldId id="262" r:id="rId10"/>
     <p:sldId id="263" r:id="rId11"/>
     <p:sldId id="264" r:id="rId12"/>
-    <p:sldId id="265" r:id="rId13"/>
+    <p:sldId id="269" r:id="rId13"/>
   </p:sldIdLst>
   <p:sldSz cx="18288000" cy="10287000"/>
   <p:notesSz cx="6858000" cy="9144000"/>
@@ -238,7 +238,7 @@
           <a:p>
             <a:fld id="{41380ACF-771A-42F8-8828-7DB254F7E161}" type="datetimeFigureOut">
               <a:rPr lang="ko-KR" altLang="en-US" smtClean="0"/>
-              <a:t>2025-11-18</a:t>
+              <a:t>2025-11-19</a:t>
             </a:fld>
             <a:endParaRPr lang="ko-KR" altLang="en-US"/>
           </a:p>
@@ -869,7 +869,7 @@
             <a:fld id="{1D8BD707-D9CF-40AE-B4C6-C98DA3205C09}" type="datetimeFigureOut">
               <a:rPr lang="en-US" smtClean="0"/>
               <a:pPr/>
-              <a:t>11/18/2025</a:t>
+              <a:t>11/19/2025</a:t>
             </a:fld>
             <a:endParaRPr lang="en-US"/>
           </a:p>
@@ -1034,7 +1034,7 @@
             <a:fld id="{1D8BD707-D9CF-40AE-B4C6-C98DA3205C09}" type="datetimeFigureOut">
               <a:rPr lang="en-US" smtClean="0"/>
               <a:pPr/>
-              <a:t>11/18/2025</a:t>
+              <a:t>11/19/2025</a:t>
             </a:fld>
             <a:endParaRPr lang="en-US"/>
           </a:p>
@@ -1209,7 +1209,7 @@
             <a:fld id="{1D8BD707-D9CF-40AE-B4C6-C98DA3205C09}" type="datetimeFigureOut">
               <a:rPr lang="en-US" smtClean="0"/>
               <a:pPr/>
-              <a:t>11/18/2025</a:t>
+              <a:t>11/19/2025</a:t>
             </a:fld>
             <a:endParaRPr lang="en-US"/>
           </a:p>
@@ -1374,7 +1374,7 @@
             <a:fld id="{1D8BD707-D9CF-40AE-B4C6-C98DA3205C09}" type="datetimeFigureOut">
               <a:rPr lang="en-US" smtClean="0"/>
               <a:pPr/>
-              <a:t>11/18/2025</a:t>
+              <a:t>11/19/2025</a:t>
             </a:fld>
             <a:endParaRPr lang="en-US"/>
           </a:p>
@@ -1616,7 +1616,7 @@
             <a:fld id="{1D8BD707-D9CF-40AE-B4C6-C98DA3205C09}" type="datetimeFigureOut">
               <a:rPr lang="en-US" smtClean="0"/>
               <a:pPr/>
-              <a:t>11/18/2025</a:t>
+              <a:t>11/19/2025</a:t>
             </a:fld>
             <a:endParaRPr lang="en-US"/>
           </a:p>
@@ -1898,7 +1898,7 @@
             <a:fld id="{1D8BD707-D9CF-40AE-B4C6-C98DA3205C09}" type="datetimeFigureOut">
               <a:rPr lang="en-US" smtClean="0"/>
               <a:pPr/>
-              <a:t>11/18/2025</a:t>
+              <a:t>11/19/2025</a:t>
             </a:fld>
             <a:endParaRPr lang="en-US"/>
           </a:p>
@@ -2314,7 +2314,7 @@
             <a:fld id="{1D8BD707-D9CF-40AE-B4C6-C98DA3205C09}" type="datetimeFigureOut">
               <a:rPr lang="en-US" smtClean="0"/>
               <a:pPr/>
-              <a:t>11/18/2025</a:t>
+              <a:t>11/19/2025</a:t>
             </a:fld>
             <a:endParaRPr lang="en-US"/>
           </a:p>
@@ -2428,7 +2428,7 @@
             <a:fld id="{1D8BD707-D9CF-40AE-B4C6-C98DA3205C09}" type="datetimeFigureOut">
               <a:rPr lang="en-US" smtClean="0"/>
               <a:pPr/>
-              <a:t>11/18/2025</a:t>
+              <a:t>11/19/2025</a:t>
             </a:fld>
             <a:endParaRPr lang="en-US"/>
           </a:p>
@@ -2520,7 +2520,7 @@
             <a:fld id="{1D8BD707-D9CF-40AE-B4C6-C98DA3205C09}" type="datetimeFigureOut">
               <a:rPr lang="en-US" smtClean="0"/>
               <a:pPr/>
-              <a:t>11/18/2025</a:t>
+              <a:t>11/19/2025</a:t>
             </a:fld>
             <a:endParaRPr lang="en-US"/>
           </a:p>
@@ -2792,7 +2792,7 @@
             <a:fld id="{1D8BD707-D9CF-40AE-B4C6-C98DA3205C09}" type="datetimeFigureOut">
               <a:rPr lang="en-US" smtClean="0"/>
               <a:pPr/>
-              <a:t>11/18/2025</a:t>
+              <a:t>11/19/2025</a:t>
             </a:fld>
             <a:endParaRPr lang="en-US"/>
           </a:p>
@@ -3041,7 +3041,7 @@
             <a:fld id="{1D8BD707-D9CF-40AE-B4C6-C98DA3205C09}" type="datetimeFigureOut">
               <a:rPr lang="en-US" smtClean="0"/>
               <a:pPr/>
-              <a:t>11/18/2025</a:t>
+              <a:t>11/19/2025</a:t>
             </a:fld>
             <a:endParaRPr lang="en-US"/>
           </a:p>
@@ -3249,7 +3249,7 @@
             <a:fld id="{1D8BD707-D9CF-40AE-B4C6-C98DA3205C09}" type="datetimeFigureOut">
               <a:rPr lang="en-US" smtClean="0"/>
               <a:pPr/>
-              <a:t>11/18/2025</a:t>
+              <a:t>11/19/2025</a:t>
             </a:fld>
             <a:endParaRPr lang="en-US"/>
           </a:p>
@@ -5927,8 +5927,9 @@
             <a:avLst/>
           </a:prstGeom>
           <a:solidFill>
-            <a:schemeClr val="bg1">
-              <a:lumMod val="85000"/>
+            <a:schemeClr val="accent2">
+              <a:lumMod val="40000"/>
+              <a:lumOff val="60000"/>
             </a:schemeClr>
           </a:solidFill>
         </p:spPr>
@@ -5959,7 +5960,7 @@
                   <a:schemeClr val="tx1"/>
                 </a:solidFill>
               </a:rPr>
-              <a:t>Read</a:t>
+              <a:t>Thread 1</a:t>
             </a:r>
             <a:endParaRPr lang="ko-KR" altLang="en-US" sz="1600" dirty="0">
               <a:solidFill>
@@ -5984,7 +5985,7 @@
         <p:spPr>
           <a:xfrm>
             <a:off x="680884" y="5588400"/>
-            <a:ext cx="1104598" cy="400110"/>
+            <a:ext cx="705962" cy="400110"/>
           </a:xfrm>
           <a:prstGeom prst="rect">
             <a:avLst/>
@@ -5999,7 +6000,7 @@
           <a:p>
             <a:r>
               <a:rPr lang="en-US" altLang="ko-KR" sz="2000" dirty="0"/>
-              <a:t>Thread 1</a:t>
+              <a:t>Read</a:t>
             </a:r>
             <a:endParaRPr lang="ko-KR" altLang="en-US" sz="2000" dirty="0"/>
           </a:p>
@@ -6026,8 +6027,9 @@
             <a:avLst/>
           </a:prstGeom>
           <a:solidFill>
-            <a:schemeClr val="bg1">
-              <a:lumMod val="85000"/>
+            <a:schemeClr val="accent2">
+              <a:lumMod val="40000"/>
+              <a:lumOff val="60000"/>
             </a:schemeClr>
           </a:solidFill>
         </p:spPr>
@@ -6053,12 +6055,12 @@
           <a:p>
             <a:pPr algn="ctr"/>
             <a:r>
-              <a:rPr lang="en-US" altLang="ko-KR" sz="1600" dirty="0">
+              <a:rPr lang="en-US" altLang="ko-KR" sz="1600">
                 <a:solidFill>
                   <a:schemeClr val="tx1"/>
                 </a:solidFill>
               </a:rPr>
-              <a:t>Read</a:t>
+              <a:t>Thread 2</a:t>
             </a:r>
             <a:endParaRPr lang="ko-KR" altLang="en-US" sz="1600" dirty="0">
               <a:solidFill>
@@ -6083,7 +6085,7 @@
         <p:spPr>
           <a:xfrm>
             <a:off x="675968" y="6391099"/>
-            <a:ext cx="1104598" cy="400110"/>
+            <a:ext cx="614271" cy="400110"/>
           </a:xfrm>
           <a:prstGeom prst="rect">
             <a:avLst/>
@@ -6098,7 +6100,7 @@
           <a:p>
             <a:r>
               <a:rPr lang="en-US" altLang="ko-KR" sz="2000" dirty="0"/>
-              <a:t>Thread 2</a:t>
+              <a:t>Sort</a:t>
             </a:r>
             <a:endParaRPr lang="ko-KR" altLang="en-US" sz="2000" dirty="0"/>
           </a:p>
@@ -6125,8 +6127,9 @@
             <a:avLst/>
           </a:prstGeom>
           <a:solidFill>
-            <a:schemeClr val="bg1">
-              <a:lumMod val="85000"/>
+            <a:schemeClr val="accent2">
+              <a:lumMod val="40000"/>
+              <a:lumOff val="60000"/>
             </a:schemeClr>
           </a:solidFill>
         </p:spPr>
@@ -6157,7 +6160,7 @@
                   <a:schemeClr val="tx1"/>
                 </a:solidFill>
               </a:rPr>
-              <a:t>Read</a:t>
+              <a:t>Thread 3</a:t>
             </a:r>
             <a:endParaRPr lang="ko-KR" altLang="en-US" sz="1600" dirty="0">
               <a:solidFill>
@@ -6182,7 +6185,7 @@
         <p:spPr>
           <a:xfrm>
             <a:off x="680884" y="7171618"/>
-            <a:ext cx="1104598" cy="400110"/>
+            <a:ext cx="1086451" cy="400110"/>
           </a:xfrm>
           <a:prstGeom prst="rect">
             <a:avLst/>
@@ -6197,7 +6200,7 @@
           <a:p>
             <a:r>
               <a:rPr lang="en-US" altLang="ko-KR" sz="2000" dirty="0"/>
-              <a:t>Thread 3</a:t>
+              <a:t>Partition</a:t>
             </a:r>
             <a:endParaRPr lang="ko-KR" altLang="en-US" sz="2000" dirty="0"/>
           </a:p>
@@ -6224,8 +6227,9 @@
             <a:avLst/>
           </a:prstGeom>
           <a:solidFill>
-            <a:schemeClr val="bg1">
-              <a:lumMod val="85000"/>
+            <a:schemeClr val="accent2">
+              <a:lumMod val="40000"/>
+              <a:lumOff val="60000"/>
             </a:schemeClr>
           </a:solidFill>
         </p:spPr>
@@ -6251,12 +6255,12 @@
           <a:p>
             <a:pPr algn="ctr"/>
             <a:r>
-              <a:rPr lang="en-US" altLang="ko-KR" sz="1600" dirty="0">
+              <a:rPr lang="en-US" altLang="ko-KR" sz="1600">
                 <a:solidFill>
                   <a:schemeClr val="tx1"/>
                 </a:solidFill>
               </a:rPr>
-              <a:t>Read</a:t>
+              <a:t>Thread 4</a:t>
             </a:r>
             <a:endParaRPr lang="ko-KR" altLang="en-US" sz="1600" dirty="0">
               <a:solidFill>
@@ -6281,7 +6285,7 @@
         <p:spPr>
           <a:xfrm>
             <a:off x="680884" y="7985378"/>
-            <a:ext cx="1104598" cy="400110"/>
+            <a:ext cx="914738" cy="400110"/>
           </a:xfrm>
           <a:prstGeom prst="rect">
             <a:avLst/>
@@ -6296,7 +6300,7 @@
           <a:p>
             <a:r>
               <a:rPr lang="en-US" altLang="ko-KR" sz="2000" dirty="0"/>
-              <a:t>Thread 4</a:t>
+              <a:t>Shuffle</a:t>
             </a:r>
             <a:endParaRPr lang="ko-KR" altLang="en-US" sz="2000" dirty="0"/>
           </a:p>
@@ -6323,8 +6327,9 @@
             <a:avLst/>
           </a:prstGeom>
           <a:solidFill>
-            <a:schemeClr val="bg1">
-              <a:lumMod val="85000"/>
+            <a:schemeClr val="accent6">
+              <a:lumMod val="40000"/>
+              <a:lumOff val="60000"/>
             </a:schemeClr>
           </a:solidFill>
         </p:spPr>
@@ -6350,12 +6355,12 @@
           <a:p>
             <a:pPr algn="ctr"/>
             <a:r>
-              <a:rPr lang="en-US" altLang="ko-KR" sz="1600" dirty="0">
+              <a:rPr lang="en-US" altLang="ko-KR" sz="1600">
                 <a:solidFill>
                   <a:schemeClr val="tx1"/>
                 </a:solidFill>
               </a:rPr>
-              <a:t>Sort</a:t>
+              <a:t>Thread 1</a:t>
             </a:r>
             <a:endParaRPr lang="ko-KR" altLang="en-US" sz="1600" dirty="0">
               <a:solidFill>
@@ -6386,8 +6391,9 @@
             <a:avLst/>
           </a:prstGeom>
           <a:solidFill>
-            <a:schemeClr val="bg1">
-              <a:lumMod val="85000"/>
+            <a:schemeClr val="accent6">
+              <a:lumMod val="40000"/>
+              <a:lumOff val="60000"/>
             </a:schemeClr>
           </a:solidFill>
         </p:spPr>
@@ -6418,7 +6424,7 @@
                   <a:schemeClr val="tx1"/>
                 </a:solidFill>
               </a:rPr>
-              <a:t>Sort</a:t>
+              <a:t>Thread 2</a:t>
             </a:r>
             <a:endParaRPr lang="ko-KR" altLang="en-US" sz="1600" dirty="0">
               <a:solidFill>
@@ -6449,8 +6455,9 @@
             <a:avLst/>
           </a:prstGeom>
           <a:solidFill>
-            <a:schemeClr val="bg1">
-              <a:lumMod val="85000"/>
+            <a:schemeClr val="accent6">
+              <a:lumMod val="40000"/>
+              <a:lumOff val="60000"/>
             </a:schemeClr>
           </a:solidFill>
         </p:spPr>
@@ -6476,12 +6483,12 @@
           <a:p>
             <a:pPr algn="ctr"/>
             <a:r>
-              <a:rPr lang="en-US" altLang="ko-KR" sz="1600" dirty="0">
+              <a:rPr lang="en-US" altLang="ko-KR" sz="1600">
                 <a:solidFill>
                   <a:schemeClr val="tx1"/>
                 </a:solidFill>
               </a:rPr>
-              <a:t>Sort</a:t>
+              <a:t>Thread 3</a:t>
             </a:r>
             <a:endParaRPr lang="ko-KR" altLang="en-US" sz="1600" dirty="0">
               <a:solidFill>
@@ -6512,8 +6519,9 @@
             <a:avLst/>
           </a:prstGeom>
           <a:solidFill>
-            <a:schemeClr val="bg1">
-              <a:lumMod val="85000"/>
+            <a:schemeClr val="accent6">
+              <a:lumMod val="40000"/>
+              <a:lumOff val="60000"/>
             </a:schemeClr>
           </a:solidFill>
         </p:spPr>
@@ -6539,12 +6547,12 @@
           <a:p>
             <a:pPr algn="ctr"/>
             <a:r>
-              <a:rPr lang="en-US" altLang="ko-KR" sz="1600" dirty="0">
+              <a:rPr lang="en-US" altLang="ko-KR" sz="1600">
                 <a:solidFill>
                   <a:schemeClr val="tx1"/>
                 </a:solidFill>
               </a:rPr>
-              <a:t>Sort</a:t>
+              <a:t>Thread 4</a:t>
             </a:r>
             <a:endParaRPr lang="ko-KR" altLang="en-US" sz="1600" dirty="0">
               <a:solidFill>
@@ -6575,8 +6583,9 @@
             <a:avLst/>
           </a:prstGeom>
           <a:solidFill>
-            <a:schemeClr val="bg1">
-              <a:lumMod val="85000"/>
+            <a:schemeClr val="accent3">
+              <a:lumMod val="40000"/>
+              <a:lumOff val="60000"/>
             </a:schemeClr>
           </a:solidFill>
         </p:spPr>
@@ -6602,12 +6611,12 @@
           <a:p>
             <a:pPr algn="ctr"/>
             <a:r>
-              <a:rPr lang="en-US" altLang="ko-KR" sz="1600" dirty="0">
+              <a:rPr lang="en-US" altLang="ko-KR" sz="1600">
                 <a:solidFill>
                   <a:schemeClr val="tx1"/>
                 </a:solidFill>
               </a:rPr>
-              <a:t>Partition</a:t>
+              <a:t>Thread 1</a:t>
             </a:r>
             <a:endParaRPr lang="ko-KR" altLang="en-US" sz="1600" dirty="0">
               <a:solidFill>
@@ -6638,8 +6647,9 @@
             <a:avLst/>
           </a:prstGeom>
           <a:solidFill>
-            <a:schemeClr val="bg1">
-              <a:lumMod val="85000"/>
+            <a:schemeClr val="accent3">
+              <a:lumMod val="40000"/>
+              <a:lumOff val="60000"/>
             </a:schemeClr>
           </a:solidFill>
         </p:spPr>
@@ -6665,12 +6675,12 @@
           <a:p>
             <a:pPr algn="ctr"/>
             <a:r>
-              <a:rPr lang="en-US" altLang="ko-KR" sz="1600" dirty="0">
+              <a:rPr lang="en-US" altLang="ko-KR" sz="1600">
                 <a:solidFill>
                   <a:schemeClr val="tx1"/>
                 </a:solidFill>
               </a:rPr>
-              <a:t>Partition</a:t>
+              <a:t>Thread 2</a:t>
             </a:r>
             <a:endParaRPr lang="ko-KR" altLang="en-US" sz="1600" dirty="0">
               <a:solidFill>
@@ -6701,8 +6711,9 @@
             <a:avLst/>
           </a:prstGeom>
           <a:solidFill>
-            <a:schemeClr val="bg1">
-              <a:lumMod val="85000"/>
+            <a:schemeClr val="accent3">
+              <a:lumMod val="40000"/>
+              <a:lumOff val="60000"/>
             </a:schemeClr>
           </a:solidFill>
         </p:spPr>
@@ -6733,7 +6744,7 @@
                   <a:schemeClr val="tx1"/>
                 </a:solidFill>
               </a:rPr>
-              <a:t>Partition</a:t>
+              <a:t>Thread 3</a:t>
             </a:r>
             <a:endParaRPr lang="ko-KR" altLang="en-US" sz="1600" dirty="0">
               <a:solidFill>
@@ -6764,8 +6775,9 @@
             <a:avLst/>
           </a:prstGeom>
           <a:solidFill>
-            <a:schemeClr val="bg1">
-              <a:lumMod val="85000"/>
+            <a:schemeClr val="accent3">
+              <a:lumMod val="40000"/>
+              <a:lumOff val="60000"/>
             </a:schemeClr>
           </a:solidFill>
         </p:spPr>
@@ -6791,12 +6803,12 @@
           <a:p>
             <a:pPr algn="ctr"/>
             <a:r>
-              <a:rPr lang="en-US" altLang="ko-KR" sz="1600" dirty="0">
+              <a:rPr lang="en-US" altLang="ko-KR" sz="1600">
                 <a:solidFill>
                   <a:schemeClr val="tx1"/>
                 </a:solidFill>
               </a:rPr>
-              <a:t>Partition</a:t>
+              <a:t>Thread 4</a:t>
             </a:r>
             <a:endParaRPr lang="ko-KR" altLang="en-US" sz="1600" dirty="0">
               <a:solidFill>
@@ -6827,8 +6839,9 @@
             <a:avLst/>
           </a:prstGeom>
           <a:solidFill>
-            <a:schemeClr val="bg1">
-              <a:lumMod val="85000"/>
+            <a:schemeClr val="accent1">
+              <a:lumMod val="40000"/>
+              <a:lumOff val="60000"/>
             </a:schemeClr>
           </a:solidFill>
         </p:spPr>
@@ -6854,12 +6867,12 @@
           <a:p>
             <a:pPr algn="ctr"/>
             <a:r>
-              <a:rPr lang="en-US" altLang="ko-KR" sz="1600" dirty="0">
+              <a:rPr lang="en-US" altLang="ko-KR" sz="1600">
                 <a:solidFill>
                   <a:schemeClr val="tx1"/>
                 </a:solidFill>
               </a:rPr>
-              <a:t>Shuffle</a:t>
+              <a:t>Thread 1</a:t>
             </a:r>
             <a:endParaRPr lang="ko-KR" altLang="en-US" sz="1600" dirty="0">
               <a:solidFill>
@@ -6890,8 +6903,9 @@
             <a:avLst/>
           </a:prstGeom>
           <a:solidFill>
-            <a:schemeClr val="bg1">
-              <a:lumMod val="85000"/>
+            <a:schemeClr val="accent1">
+              <a:lumMod val="40000"/>
+              <a:lumOff val="60000"/>
             </a:schemeClr>
           </a:solidFill>
         </p:spPr>
@@ -6917,12 +6931,12 @@
           <a:p>
             <a:pPr algn="ctr"/>
             <a:r>
-              <a:rPr lang="en-US" altLang="ko-KR" sz="1600" dirty="0">
+              <a:rPr lang="en-US" altLang="ko-KR" sz="1600">
                 <a:solidFill>
                   <a:schemeClr val="tx1"/>
                 </a:solidFill>
               </a:rPr>
-              <a:t>Shuffle</a:t>
+              <a:t>Thread 2</a:t>
             </a:r>
             <a:endParaRPr lang="ko-KR" altLang="en-US" sz="1600" dirty="0">
               <a:solidFill>
@@ -6953,8 +6967,9 @@
             <a:avLst/>
           </a:prstGeom>
           <a:solidFill>
-            <a:schemeClr val="bg1">
-              <a:lumMod val="85000"/>
+            <a:schemeClr val="accent1">
+              <a:lumMod val="40000"/>
+              <a:lumOff val="60000"/>
             </a:schemeClr>
           </a:solidFill>
         </p:spPr>
@@ -6980,12 +6995,12 @@
           <a:p>
             <a:pPr algn="ctr"/>
             <a:r>
-              <a:rPr lang="en-US" altLang="ko-KR" sz="1600" dirty="0">
+              <a:rPr lang="en-US" altLang="ko-KR" sz="1600">
                 <a:solidFill>
                   <a:schemeClr val="tx1"/>
                 </a:solidFill>
               </a:rPr>
-              <a:t>Shuffle</a:t>
+              <a:t>Thread 3</a:t>
             </a:r>
             <a:endParaRPr lang="ko-KR" altLang="en-US" sz="1600" dirty="0">
               <a:solidFill>
@@ -7016,8 +7031,9 @@
             <a:avLst/>
           </a:prstGeom>
           <a:solidFill>
-            <a:schemeClr val="bg1">
-              <a:lumMod val="85000"/>
+            <a:schemeClr val="accent1">
+              <a:lumMod val="40000"/>
+              <a:lumOff val="60000"/>
             </a:schemeClr>
           </a:solidFill>
         </p:spPr>
@@ -7043,12 +7059,12 @@
           <a:p>
             <a:pPr algn="ctr"/>
             <a:r>
-              <a:rPr lang="en-US" altLang="ko-KR" sz="1600" dirty="0">
+              <a:rPr lang="en-US" altLang="ko-KR" sz="1600">
                 <a:solidFill>
                   <a:schemeClr val="tx1"/>
                 </a:solidFill>
               </a:rPr>
-              <a:t>Shuffle</a:t>
+              <a:t>Thread 4</a:t>
             </a:r>
             <a:endParaRPr lang="ko-KR" altLang="en-US" sz="1600" dirty="0">
               <a:solidFill>
@@ -7498,7 +7514,7 @@
     </p:spTree>
     <p:extLst>
       <p:ext uri="{BB962C8B-B14F-4D97-AF65-F5344CB8AC3E}">
-        <p14:creationId xmlns:p14="http://schemas.microsoft.com/office/powerpoint/2010/main" val="3994033790"/>
+        <p14:creationId xmlns:p14="http://schemas.microsoft.com/office/powerpoint/2010/main" val="1644994206"/>
       </p:ext>
     </p:extLst>
   </p:cSld>
